--- a/documents/1_pitch_deck.pptx
+++ b/documents/1_pitch_deck.pptx
@@ -3202,52 +3202,52 @@
           <a:noFill/>
         </p:spPr>
         <p:txBody>
+          <a:bodyPr wrap="none">
+            <a:spAutoFit/>
+          </a:bodyPr>
+          <a:lstStyle/>
+          <a:p>
+            <a:pPr>
+              <a:defRPr sz="2800" b="1">
+                <a:solidFill>
+                  <a:srgbClr val="D60000"/>
+                </a:solidFill>
+                <a:latin typeface="Outfit"/>
+              </a:defRPr>
+            </a:pPr>
+            <a:r>
+              <a:t>JITHVAR BUSINESS GROUP</a:t>
+            </a:r>
+          </a:p>
+        </p:txBody>
+      </p:sp>
+      <p:sp>
+        <p:nvSpPr>
+          <p:cNvPr id="5" name="TextBox 4"/>
+          <p:cNvSpPr txBox="1"/>
+          <p:nvPr/>
+        </p:nvSpPr>
+        <p:spPr>
+          <a:xfrm>
+            <a:off x="1097280" y="2377440"/>
+            <a:ext cx="10058400" cy="2926080"/>
+          </a:xfrm>
+          <a:prstGeom prst="rect">
+            <a:avLst/>
+          </a:prstGeom>
+          <a:noFill/>
+        </p:spPr>
+        <p:txBody>
           <a:bodyPr wrap="square">
             <a:spAutoFit/>
           </a:bodyPr>
           <a:lstStyle/>
           <a:p>
             <a:pPr>
-              <a:defRPr sz="2800" b="1">
-                <a:solidFill>
-                  <a:srgbClr val="D60000"/>
-                </a:solidFill>
-                <a:latin typeface="Outfit"/>
-              </a:defRPr>
-            </a:pPr>
-            <a:r>
-              <a:t>JITHVAR BUSINESS GROUP</a:t>
-            </a:r>
-          </a:p>
-        </p:txBody>
-      </p:sp>
-      <p:sp>
-        <p:nvSpPr>
-          <p:cNvPr id="5" name="TextBox 4"/>
-          <p:cNvSpPr txBox="1"/>
-          <p:nvPr/>
-        </p:nvSpPr>
-        <p:spPr>
-          <a:xfrm>
-            <a:off x="1097280" y="2377440"/>
-            <a:ext cx="10058400" cy="2926080"/>
-          </a:xfrm>
-          <a:prstGeom prst="rect">
-            <a:avLst/>
-          </a:prstGeom>
-          <a:noFill/>
-        </p:spPr>
-        <p:txBody>
-          <a:bodyPr wrap="square">
-            <a:spAutoFit/>
-          </a:bodyPr>
-          <a:lstStyle/>
-          <a:p>
-            <a:pPr>
               <a:spcAft>
                 <a:spcPts val="1400"/>
               </a:spcAft>
-              <a:defRPr sz="4000" b="1">
+              <a:defRPr sz="3800" b="1">
                 <a:solidFill>
                   <a:srgbClr val="FFFFFF"/>
                 </a:solidFill>
@@ -3261,9 +3261,9 @@
           <a:p>
             <a:pPr>
               <a:spcAft>
-                <a:spcPts val="3000"/>
+                <a:spcPts val="3200"/>
               </a:spcAft>
-              <a:defRPr sz="1800">
+              <a:defRPr sz="1600">
                 <a:solidFill>
                   <a:srgbClr val="93C5FD"/>
                 </a:solidFill>
@@ -3278,13 +3278,13 @@
             <a:pPr>
               <a:defRPr sz="1300">
                 <a:solidFill>
-                  <a:srgbClr val="94A3B8"/>
+                  <a:srgbClr val="64748B"/>
                 </a:solidFill>
                 <a:latin typeface="Inter"/>
               </a:defRPr>
             </a:pPr>
             <a:r>
-              <a:t>JBG Business Fellowship Program | IIM Rohtak Challenge Submission</a:t>
+              <a:t>JBG Business Fellowship Program  |  IIM Rohtak Challenge Submission  |  August 2026</a:t>
             </a:r>
           </a:p>
         </p:txBody>
@@ -3387,7 +3387,7 @@
         </p:nvSpPr>
         <p:spPr>
           <a:xfrm>
-            <a:off x="548640" y="1371600"/>
+            <a:off x="548640" y="1325880"/>
             <a:ext cx="11094415" cy="36576"/>
           </a:xfrm>
           <a:prstGeom prst="rect">
@@ -3424,13 +3424,171 @@
       </p:sp>
       <p:sp>
         <p:nvSpPr>
-          <p:cNvPr id="5" name="Rounded Rectangle 4"/>
+          <p:cNvPr id="5" name="TextBox 4"/>
+          <p:cNvSpPr txBox="1"/>
+          <p:nvPr/>
+        </p:nvSpPr>
+        <p:spPr>
+          <a:xfrm>
+            <a:off x="548640" y="6309360"/>
+            <a:ext cx="11094415" cy="320040"/>
+          </a:xfrm>
+          <a:prstGeom prst="rect">
+            <a:avLst/>
+          </a:prstGeom>
+          <a:noFill/>
+        </p:spPr>
+        <p:txBody>
+          <a:bodyPr wrap="none">
+            <a:spAutoFit/>
+          </a:bodyPr>
+          <a:lstStyle/>
+          <a:p>
+            <a:pPr>
+              <a:defRPr sz="850">
+                <a:solidFill>
+                  <a:srgbClr val="64748B"/>
+                </a:solidFill>
+                <a:latin typeface="Inter"/>
+              </a:defRPr>
+            </a:pPr>
+            <a:r>
+              <a:t>Jithvar Business Group Strategy Deck  |  Confidential  |  Slide 10 of 12</a:t>
+            </a:r>
+          </a:p>
+        </p:txBody>
+      </p:sp>
+      <p:sp>
+        <p:nvSpPr>
+          <p:cNvPr id="6" name="Rectangle 5"/>
           <p:cNvSpPr/>
           <p:nvPr/>
         </p:nvSpPr>
         <p:spPr>
           <a:xfrm>
-            <a:off x="548640" y="1554480"/>
+            <a:off x="548640" y="5623560"/>
+            <a:ext cx="11094415" cy="594360"/>
+          </a:xfrm>
+          <a:prstGeom prst="rect">
+            <a:avLst/>
+          </a:prstGeom>
+          <a:solidFill>
+            <a:srgbClr val="FEE4E6"/>
+          </a:solidFill>
+          <a:ln>
+            <a:noFill/>
+          </a:ln>
+        </p:spPr>
+        <p:style>
+          <a:lnRef idx="1">
+            <a:schemeClr val="accent1"/>
+          </a:lnRef>
+          <a:fillRef idx="3">
+            <a:schemeClr val="accent1"/>
+          </a:fillRef>
+          <a:effectRef idx="2">
+            <a:schemeClr val="accent1"/>
+          </a:effectRef>
+          <a:fontRef idx="minor">
+            <a:schemeClr val="lt1"/>
+          </a:fontRef>
+        </p:style>
+        <p:txBody>
+          <a:bodyPr rtlCol="0" anchor="ctr"/>
+          <a:lstStyle/>
+          <a:p>
+            <a:pPr algn="ctr"/>
+          </a:p>
+        </p:txBody>
+      </p:sp>
+      <p:sp>
+        <p:nvSpPr>
+          <p:cNvPr id="7" name="Rectangle 6"/>
+          <p:cNvSpPr/>
+          <p:nvPr/>
+        </p:nvSpPr>
+        <p:spPr>
+          <a:xfrm>
+            <a:off x="548640" y="5623560"/>
+            <a:ext cx="73152" cy="594360"/>
+          </a:xfrm>
+          <a:prstGeom prst="rect">
+            <a:avLst/>
+          </a:prstGeom>
+          <a:solidFill>
+            <a:srgbClr val="D60000"/>
+          </a:solidFill>
+          <a:ln>
+            <a:noFill/>
+          </a:ln>
+        </p:spPr>
+        <p:style>
+          <a:lnRef idx="1">
+            <a:schemeClr val="accent1"/>
+          </a:lnRef>
+          <a:fillRef idx="3">
+            <a:schemeClr val="accent1"/>
+          </a:fillRef>
+          <a:effectRef idx="2">
+            <a:schemeClr val="accent1"/>
+          </a:effectRef>
+          <a:fontRef idx="minor">
+            <a:schemeClr val="lt1"/>
+          </a:fontRef>
+        </p:style>
+        <p:txBody>
+          <a:bodyPr rtlCol="0" anchor="ctr"/>
+          <a:lstStyle/>
+          <a:p>
+            <a:pPr algn="ctr"/>
+          </a:p>
+        </p:txBody>
+      </p:sp>
+      <p:sp>
+        <p:nvSpPr>
+          <p:cNvPr id="8" name="TextBox 7"/>
+          <p:cNvSpPr txBox="1"/>
+          <p:nvPr/>
+        </p:nvSpPr>
+        <p:spPr>
+          <a:xfrm>
+            <a:off x="731520" y="5669280"/>
+            <a:ext cx="10698480" cy="502920"/>
+          </a:xfrm>
+          <a:prstGeom prst="rect">
+            <a:avLst/>
+          </a:prstGeom>
+          <a:noFill/>
+        </p:spPr>
+        <p:txBody>
+          <a:bodyPr wrap="square">
+            <a:spAutoFit/>
+          </a:bodyPr>
+          <a:lstStyle/>
+          <a:p>
+            <a:pPr>
+              <a:defRPr sz="1100" b="1">
+                <a:solidFill>
+                  <a:srgbClr val="991B1B"/>
+                </a:solidFill>
+                <a:latin typeface="Inter"/>
+              </a:defRPr>
+            </a:pPr>
+            <a:r>
+              <a:t>Strategic Takeaway: Committing growth capital requires quantitative verification of market demand, competitive space, and technical scope.</a:t>
+            </a:r>
+          </a:p>
+        </p:txBody>
+      </p:sp>
+      <p:sp>
+        <p:nvSpPr>
+          <p:cNvPr id="9" name="Rounded Rectangle 8"/>
+          <p:cNvSpPr/>
+          <p:nvPr/>
+        </p:nvSpPr>
+        <p:spPr>
+          <a:xfrm>
+            <a:off x="548640" y="1508760"/>
             <a:ext cx="5394960" cy="3931920"/>
           </a:xfrm>
           <a:prstGeom prst="roundRect">
@@ -3469,13 +3627,13 @@
       </p:sp>
       <p:sp>
         <p:nvSpPr>
-          <p:cNvPr id="6" name="TextBox 5"/>
+          <p:cNvPr id="10" name="TextBox 9"/>
           <p:cNvSpPr txBox="1"/>
           <p:nvPr/>
         </p:nvSpPr>
         <p:spPr>
           <a:xfrm>
-            <a:off x="731520" y="1645920"/>
+            <a:off x="731520" y="1600200"/>
             <a:ext cx="5029200" cy="3749039"/>
           </a:xfrm>
           <a:prstGeom prst="rect">
@@ -3501,15 +3659,15 @@
               </a:defRPr>
             </a:pPr>
             <a:r>
-              <a:t>Required Due Diligence Studies</a:t>
+              <a:t>Required Research &amp; Data Inputs</a:t>
             </a:r>
           </a:p>
           <a:p>
             <a:pPr>
               <a:spcAft>
-                <a:spcPts val="800"/>
+                <a:spcPts val="600"/>
               </a:spcAft>
-              <a:defRPr sz="1050">
+              <a:defRPr sz="1000">
                 <a:solidFill>
                   <a:srgbClr val="1E293B"/>
                 </a:solidFill>
@@ -3517,15 +3675,15 @@
               </a:defRPr>
             </a:pPr>
             <a:r>
-              <a:t>• TAM Verification: Confirm actual market sizing and B2B customer densities using Gartner and IDC industry reports.</a:t>
+              <a:t>• TAM Validation: Verify actual market sizing, CAGR, and customer densities using Gartner and IDC research databases.</a:t>
             </a:r>
           </a:p>
           <a:p>
             <a:pPr>
               <a:spcAft>
-                <a:spcPts val="800"/>
+                <a:spcPts val="600"/>
               </a:spcAft>
-              <a:defRPr sz="1050">
+              <a:defRPr sz="1000">
                 <a:solidFill>
                   <a:srgbClr val="1E293B"/>
                 </a:solidFill>
@@ -3533,15 +3691,15 @@
               </a:defRPr>
             </a:pPr>
             <a:r>
-              <a:t>• Competitive Mapping: Audit pricing structures, features, and commercial models of existing CRM, staffing, and IoT telemetry products.</a:t>
+              <a:t>• Competitive Audits: Map feature sets and contract pricing structures of existing CRM, staffing, and solar telemetry software.</a:t>
             </a:r>
           </a:p>
           <a:p>
             <a:pPr>
               <a:spcAft>
-                <a:spcPts val="800"/>
+                <a:spcPts val="600"/>
               </a:spcAft>
-              <a:defRPr sz="1050">
+              <a:defRPr sz="1000">
                 <a:solidFill>
                   <a:srgbClr val="1E293B"/>
                 </a:solidFill>
@@ -3549,20 +3707,20 @@
               </a:defRPr>
             </a:pPr>
             <a:r>
-              <a:t>• Regulatory Audits: Verify state-level solar net metering policies and candidate data privacy compliance (GDPR/DPD).</a:t>
-            </a:r>
-          </a:p>
-        </p:txBody>
-      </p:sp>
-      <p:sp>
-        <p:nvSpPr>
-          <p:cNvPr id="7" name="Rounded Rectangle 6"/>
+              <a:t>• Regulatory Compliance: Audit state-level net metering, solar tax credits, and candidate data privacy regulations (GDPR).</a:t>
+            </a:r>
+          </a:p>
+        </p:txBody>
+      </p:sp>
+      <p:sp>
+        <p:nvSpPr>
+          <p:cNvPr id="11" name="Rounded Rectangle 10"/>
           <p:cNvSpPr/>
           <p:nvPr/>
         </p:nvSpPr>
         <p:spPr>
           <a:xfrm>
-            <a:off x="6217920" y="1554480"/>
+            <a:off x="6248095" y="1508760"/>
             <a:ext cx="5394960" cy="3931920"/>
           </a:xfrm>
           <a:prstGeom prst="roundRect">
@@ -3601,13 +3759,13 @@
       </p:sp>
       <p:sp>
         <p:nvSpPr>
-          <p:cNvPr id="8" name="TextBox 7"/>
+          <p:cNvPr id="12" name="TextBox 11"/>
           <p:cNvSpPr txBox="1"/>
           <p:nvPr/>
         </p:nvSpPr>
         <p:spPr>
           <a:xfrm>
-            <a:off x="6400800" y="1645920"/>
+            <a:off x="6430975" y="1600200"/>
             <a:ext cx="5029200" cy="3749039"/>
           </a:xfrm>
           <a:prstGeom prst="rect">
@@ -3639,9 +3797,9 @@
           <a:p>
             <a:pPr>
               <a:spcAft>
-                <a:spcPts val="800"/>
+                <a:spcPts val="600"/>
               </a:spcAft>
-              <a:defRPr sz="1050">
+              <a:defRPr sz="1000">
                 <a:solidFill>
                   <a:srgbClr val="1E293B"/>
                 </a:solidFill>
@@ -3649,15 +3807,15 @@
               </a:defRPr>
             </a:pPr>
             <a:r>
-              <a:t>• Technical POCs: Run developer hackathons within JCS to test integrations before hiring specialized architects.</a:t>
+              <a:t>• Technical POCs: Conduct JCS developer hackathons to verify database integrations and sensor telemetry API connectivity.</a:t>
             </a:r>
           </a:p>
           <a:p>
             <a:pPr>
               <a:spcAft>
-                <a:spcPts val="800"/>
+                <a:spcPts val="600"/>
               </a:spcAft>
-              <a:defRPr sz="1050">
+              <a:defRPr sz="1000">
                 <a:solidFill>
                   <a:srgbClr val="1E293B"/>
                 </a:solidFill>
@@ -3665,165 +3823,7 @@
               </a:defRPr>
             </a:pPr>
             <a:r>
-              <a:t>• The 5-Client Gate: Present interactive simulators to 5 target B2B clients. Allocate development budgets ONLY if at least 3 clients commit.</a:t>
-            </a:r>
-          </a:p>
-        </p:txBody>
-      </p:sp>
-      <p:sp>
-        <p:nvSpPr>
-          <p:cNvPr id="9" name="Rectangle 8"/>
-          <p:cNvSpPr/>
-          <p:nvPr/>
-        </p:nvSpPr>
-        <p:spPr>
-          <a:xfrm>
-            <a:off x="548640" y="5623560"/>
-            <a:ext cx="11094415" cy="594360"/>
-          </a:xfrm>
-          <a:prstGeom prst="rect">
-            <a:avLst/>
-          </a:prstGeom>
-          <a:solidFill>
-            <a:srgbClr val="FEE4E6"/>
-          </a:solidFill>
-          <a:ln>
-            <a:noFill/>
-          </a:ln>
-        </p:spPr>
-        <p:style>
-          <a:lnRef idx="1">
-            <a:schemeClr val="accent1"/>
-          </a:lnRef>
-          <a:fillRef idx="3">
-            <a:schemeClr val="accent1"/>
-          </a:fillRef>
-          <a:effectRef idx="2">
-            <a:schemeClr val="accent1"/>
-          </a:effectRef>
-          <a:fontRef idx="minor">
-            <a:schemeClr val="lt1"/>
-          </a:fontRef>
-        </p:style>
-        <p:txBody>
-          <a:bodyPr rtlCol="0" anchor="ctr"/>
-          <a:lstStyle/>
-          <a:p>
-            <a:pPr algn="ctr"/>
-          </a:p>
-        </p:txBody>
-      </p:sp>
-      <p:sp>
-        <p:nvSpPr>
-          <p:cNvPr id="10" name="Rectangle 9"/>
-          <p:cNvSpPr/>
-          <p:nvPr/>
-        </p:nvSpPr>
-        <p:spPr>
-          <a:xfrm>
-            <a:off x="548640" y="5623560"/>
-            <a:ext cx="73152" cy="594360"/>
-          </a:xfrm>
-          <a:prstGeom prst="rect">
-            <a:avLst/>
-          </a:prstGeom>
-          <a:solidFill>
-            <a:srgbClr val="D60000"/>
-          </a:solidFill>
-          <a:ln>
-            <a:noFill/>
-          </a:ln>
-        </p:spPr>
-        <p:style>
-          <a:lnRef idx="1">
-            <a:schemeClr val="accent1"/>
-          </a:lnRef>
-          <a:fillRef idx="3">
-            <a:schemeClr val="accent1"/>
-          </a:fillRef>
-          <a:effectRef idx="2">
-            <a:schemeClr val="accent1"/>
-          </a:effectRef>
-          <a:fontRef idx="minor">
-            <a:schemeClr val="lt1"/>
-          </a:fontRef>
-        </p:style>
-        <p:txBody>
-          <a:bodyPr rtlCol="0" anchor="ctr"/>
-          <a:lstStyle/>
-          <a:p>
-            <a:pPr algn="ctr"/>
-          </a:p>
-        </p:txBody>
-      </p:sp>
-      <p:sp>
-        <p:nvSpPr>
-          <p:cNvPr id="11" name="TextBox 10"/>
-          <p:cNvSpPr txBox="1"/>
-          <p:nvPr/>
-        </p:nvSpPr>
-        <p:spPr>
-          <a:xfrm>
-            <a:off x="731520" y="5669280"/>
-            <a:ext cx="10698480" cy="502920"/>
-          </a:xfrm>
-          <a:prstGeom prst="rect">
-            <a:avLst/>
-          </a:prstGeom>
-          <a:noFill/>
-        </p:spPr>
-        <p:txBody>
-          <a:bodyPr wrap="square">
-            <a:spAutoFit/>
-          </a:bodyPr>
-          <a:lstStyle/>
-          <a:p>
-            <a:pPr>
-              <a:defRPr sz="1100" b="1">
-                <a:solidFill>
-                  <a:srgbClr val="991B1B"/>
-                </a:solidFill>
-                <a:latin typeface="Inter"/>
-              </a:defRPr>
-            </a:pPr>
-            <a:r>
-              <a:t>Strategic Takeaway: Committing growth capital requires quantitative verification of market demand, competitive space, and technical scope.</a:t>
-            </a:r>
-          </a:p>
-        </p:txBody>
-      </p:sp>
-      <p:sp>
-        <p:nvSpPr>
-          <p:cNvPr id="12" name="TextBox 11"/>
-          <p:cNvSpPr txBox="1"/>
-          <p:nvPr/>
-        </p:nvSpPr>
-        <p:spPr>
-          <a:xfrm>
-            <a:off x="548640" y="6309360"/>
-            <a:ext cx="11094415" cy="320040"/>
-          </a:xfrm>
-          <a:prstGeom prst="rect">
-            <a:avLst/>
-          </a:prstGeom>
-          <a:noFill/>
-        </p:spPr>
-        <p:txBody>
-          <a:bodyPr wrap="none">
-            <a:spAutoFit/>
-          </a:bodyPr>
-          <a:lstStyle/>
-          <a:p>
-            <a:pPr>
-              <a:defRPr sz="850">
-                <a:solidFill>
-                  <a:srgbClr val="64748B"/>
-                </a:solidFill>
-                <a:latin typeface="Inter"/>
-              </a:defRPr>
-            </a:pPr>
-            <a:r>
-              <a:t>Jithvar Business Group Strategy Deck  |  Confidential  |  Slide 10 of 12</a:t>
+              <a:t>• The 5-Client Gate: Present interactive simulators to 5 target B2B clients. Commit development budget ONLY if at least 3 clients express intent-to-buy.</a:t>
             </a:r>
           </a:p>
         </p:txBody>
@@ -3926,7 +3926,7 @@
         </p:nvSpPr>
         <p:spPr>
           <a:xfrm>
-            <a:off x="548640" y="1371600"/>
+            <a:off x="548640" y="1325880"/>
             <a:ext cx="11094415" cy="36576"/>
           </a:xfrm>
           <a:prstGeom prst="rect">
@@ -3963,14 +3963,172 @@
       </p:sp>
       <p:sp>
         <p:nvSpPr>
-          <p:cNvPr id="5" name="Rounded Rectangle 4"/>
+          <p:cNvPr id="5" name="TextBox 4"/>
+          <p:cNvSpPr txBox="1"/>
+          <p:nvPr/>
+        </p:nvSpPr>
+        <p:spPr>
+          <a:xfrm>
+            <a:off x="548640" y="6309360"/>
+            <a:ext cx="11094415" cy="320040"/>
+          </a:xfrm>
+          <a:prstGeom prst="rect">
+            <a:avLst/>
+          </a:prstGeom>
+          <a:noFill/>
+        </p:spPr>
+        <p:txBody>
+          <a:bodyPr wrap="none">
+            <a:spAutoFit/>
+          </a:bodyPr>
+          <a:lstStyle/>
+          <a:p>
+            <a:pPr>
+              <a:defRPr sz="850">
+                <a:solidFill>
+                  <a:srgbClr val="64748B"/>
+                </a:solidFill>
+                <a:latin typeface="Inter"/>
+              </a:defRPr>
+            </a:pPr>
+            <a:r>
+              <a:t>Jithvar Business Group Strategy Deck  |  Confidential  |  Slide 11 of 12</a:t>
+            </a:r>
+          </a:p>
+        </p:txBody>
+      </p:sp>
+      <p:sp>
+        <p:nvSpPr>
+          <p:cNvPr id="6" name="Rectangle 5"/>
           <p:cNvSpPr/>
           <p:nvPr/>
         </p:nvSpPr>
         <p:spPr>
           <a:xfrm>
-            <a:off x="548640" y="1554480"/>
-            <a:ext cx="5394960" cy="3931920"/>
+            <a:off x="548640" y="5623560"/>
+            <a:ext cx="11094415" cy="594360"/>
+          </a:xfrm>
+          <a:prstGeom prst="rect">
+            <a:avLst/>
+          </a:prstGeom>
+          <a:solidFill>
+            <a:srgbClr val="FEE4E6"/>
+          </a:solidFill>
+          <a:ln>
+            <a:noFill/>
+          </a:ln>
+        </p:spPr>
+        <p:style>
+          <a:lnRef idx="1">
+            <a:schemeClr val="accent1"/>
+          </a:lnRef>
+          <a:fillRef idx="3">
+            <a:schemeClr val="accent1"/>
+          </a:fillRef>
+          <a:effectRef idx="2">
+            <a:schemeClr val="accent1"/>
+          </a:effectRef>
+          <a:fontRef idx="minor">
+            <a:schemeClr val="lt1"/>
+          </a:fontRef>
+        </p:style>
+        <p:txBody>
+          <a:bodyPr rtlCol="0" anchor="ctr"/>
+          <a:lstStyle/>
+          <a:p>
+            <a:pPr algn="ctr"/>
+          </a:p>
+        </p:txBody>
+      </p:sp>
+      <p:sp>
+        <p:nvSpPr>
+          <p:cNvPr id="7" name="Rectangle 6"/>
+          <p:cNvSpPr/>
+          <p:nvPr/>
+        </p:nvSpPr>
+        <p:spPr>
+          <a:xfrm>
+            <a:off x="548640" y="5623560"/>
+            <a:ext cx="73152" cy="594360"/>
+          </a:xfrm>
+          <a:prstGeom prst="rect">
+            <a:avLst/>
+          </a:prstGeom>
+          <a:solidFill>
+            <a:srgbClr val="D60000"/>
+          </a:solidFill>
+          <a:ln>
+            <a:noFill/>
+          </a:ln>
+        </p:spPr>
+        <p:style>
+          <a:lnRef idx="1">
+            <a:schemeClr val="accent1"/>
+          </a:lnRef>
+          <a:fillRef idx="3">
+            <a:schemeClr val="accent1"/>
+          </a:fillRef>
+          <a:effectRef idx="2">
+            <a:schemeClr val="accent1"/>
+          </a:effectRef>
+          <a:fontRef idx="minor">
+            <a:schemeClr val="lt1"/>
+          </a:fontRef>
+        </p:style>
+        <p:txBody>
+          <a:bodyPr rtlCol="0" anchor="ctr"/>
+          <a:lstStyle/>
+          <a:p>
+            <a:pPr algn="ctr"/>
+          </a:p>
+        </p:txBody>
+      </p:sp>
+      <p:sp>
+        <p:nvSpPr>
+          <p:cNvPr id="8" name="TextBox 7"/>
+          <p:cNvSpPr txBox="1"/>
+          <p:nvPr/>
+        </p:nvSpPr>
+        <p:spPr>
+          <a:xfrm>
+            <a:off x="731520" y="5669280"/>
+            <a:ext cx="10698480" cy="502920"/>
+          </a:xfrm>
+          <a:prstGeom prst="rect">
+            <a:avLst/>
+          </a:prstGeom>
+          <a:noFill/>
+        </p:spPr>
+        <p:txBody>
+          <a:bodyPr wrap="square">
+            <a:spAutoFit/>
+          </a:bodyPr>
+          <a:lstStyle/>
+          <a:p>
+            <a:pPr>
+              <a:defRPr sz="1100" b="1">
+                <a:solidFill>
+                  <a:srgbClr val="991B1B"/>
+                </a:solidFill>
+                <a:latin typeface="Inter"/>
+              </a:defRPr>
+            </a:pPr>
+            <a:r>
+              <a:t>Strategic Takeaway: A structured 90-day timeline prevents 'zombie projects' by enforcing clear exit gates at each phase.</a:t>
+            </a:r>
+          </a:p>
+        </p:txBody>
+      </p:sp>
+      <p:sp>
+        <p:nvSpPr>
+          <p:cNvPr id="9" name="Rounded Rectangle 8"/>
+          <p:cNvSpPr/>
+          <p:nvPr/>
+        </p:nvSpPr>
+        <p:spPr>
+          <a:xfrm>
+            <a:off x="548640" y="1508760"/>
+            <a:ext cx="3514953" cy="3931920"/>
           </a:xfrm>
           <a:prstGeom prst="roundRect">
             <a:avLst/>
@@ -4008,14 +4166,14 @@
       </p:sp>
       <p:sp>
         <p:nvSpPr>
-          <p:cNvPr id="6" name="TextBox 5"/>
+          <p:cNvPr id="10" name="TextBox 9"/>
           <p:cNvSpPr txBox="1"/>
           <p:nvPr/>
         </p:nvSpPr>
         <p:spPr>
           <a:xfrm>
-            <a:off x="731520" y="1645920"/>
-            <a:ext cx="5029200" cy="3749039"/>
+            <a:off x="685800" y="1600200"/>
+            <a:ext cx="3240633" cy="3749039"/>
           </a:xfrm>
           <a:prstGeom prst="rect">
             <a:avLst/>
@@ -4030,9 +4188,25 @@
           <a:p>
             <a:pPr>
               <a:spcAft>
+                <a:spcPts val="400"/>
+              </a:spcAft>
+              <a:defRPr sz="850" b="1">
+                <a:solidFill>
+                  <a:srgbClr val="64748B"/>
+                </a:solidFill>
+                <a:latin typeface="Inter"/>
+              </a:defRPr>
+            </a:pPr>
+            <a:r>
+              <a:t>[DAYS 1 - 30]</a:t>
+            </a:r>
+          </a:p>
+          <a:p>
+            <a:pPr>
+              <a:spcAft>
                 <a:spcPts val="1000"/>
               </a:spcAft>
-              <a:defRPr sz="1400" b="1">
+              <a:defRPr sz="1300" b="1">
                 <a:solidFill>
                   <a:srgbClr val="0F2537"/>
                 </a:solidFill>
@@ -4040,15 +4214,15 @@
               </a:defRPr>
             </a:pPr>
             <a:r>
-              <a:t>Phase 1: Diagnose &amp; Phase 2: Design</a:t>
+              <a:t>Phase 1: Diagnose</a:t>
             </a:r>
           </a:p>
           <a:p>
             <a:pPr>
               <a:spcAft>
-                <a:spcPts val="800"/>
+                <a:spcPts val="600"/>
               </a:spcAft>
-              <a:defRPr sz="1050">
+              <a:defRPr sz="950">
                 <a:solidFill>
                   <a:srgbClr val="1E293B"/>
                 </a:solidFill>
@@ -4056,15 +4230,15 @@
               </a:defRPr>
             </a:pPr>
             <a:r>
-              <a:t>• Phase 1 (Days 1–30): Audit JCS developer availability, Nature Grid margins, and identify target Aequalis client candidates.</a:t>
+              <a:t>• Audit developer utilization rates.</a:t>
             </a:r>
           </a:p>
           <a:p>
             <a:pPr>
               <a:spcAft>
-                <a:spcPts val="800"/>
+                <a:spcPts val="600"/>
               </a:spcAft>
-              <a:defRPr sz="1050">
+              <a:defRPr sz="950">
                 <a:solidFill>
                   <a:srgbClr val="1E293B"/>
                 </a:solidFill>
@@ -4072,21 +4246,80 @@
               </a:defRPr>
             </a:pPr>
             <a:r>
-              <a:t>• Phase 2 (Days 31–60): Apply prioritized scorecard to the longlist. Build interactive B2B simulators to demonstrate SaaS concepts.</a:t>
-            </a:r>
-          </a:p>
-        </p:txBody>
-      </p:sp>
-      <p:sp>
-        <p:nvSpPr>
-          <p:cNvPr id="7" name="Rounded Rectangle 6"/>
+              <a:t>• Analyze Nature Grid margins.</a:t>
+            </a:r>
+          </a:p>
+          <a:p>
+            <a:pPr>
+              <a:spcAft>
+                <a:spcPts val="600"/>
+              </a:spcAft>
+              <a:defRPr sz="950">
+                <a:solidFill>
+                  <a:srgbClr val="1E293B"/>
+                </a:solidFill>
+                <a:latin typeface="Inter"/>
+              </a:defRPr>
+            </a:pPr>
+            <a:r>
+              <a:t>• Map Aequalis's client accounts for warm SaaS cross-sell opportunities.</a:t>
+            </a:r>
+          </a:p>
+        </p:txBody>
+      </p:sp>
+      <p:sp>
+        <p:nvSpPr>
+          <p:cNvPr id="11" name="Right Arrow 10"/>
           <p:cNvSpPr/>
           <p:nvPr/>
         </p:nvSpPr>
         <p:spPr>
           <a:xfrm>
-            <a:off x="6217920" y="1554480"/>
-            <a:ext cx="5394960" cy="3931920"/>
+            <a:off x="4109313" y="3291840"/>
+            <a:ext cx="182880" cy="182880"/>
+          </a:xfrm>
+          <a:prstGeom prst="rightArrow">
+            <a:avLst/>
+          </a:prstGeom>
+          <a:solidFill>
+            <a:srgbClr val="CBD5E1"/>
+          </a:solidFill>
+          <a:ln>
+            <a:noFill/>
+          </a:ln>
+        </p:spPr>
+        <p:style>
+          <a:lnRef idx="1">
+            <a:schemeClr val="accent1"/>
+          </a:lnRef>
+          <a:fillRef idx="3">
+            <a:schemeClr val="accent1"/>
+          </a:fillRef>
+          <a:effectRef idx="2">
+            <a:schemeClr val="accent1"/>
+          </a:effectRef>
+          <a:fontRef idx="minor">
+            <a:schemeClr val="lt1"/>
+          </a:fontRef>
+        </p:style>
+        <p:txBody>
+          <a:bodyPr rtlCol="0" anchor="ctr"/>
+          <a:lstStyle/>
+          <a:p>
+            <a:pPr algn="ctr"/>
+          </a:p>
+        </p:txBody>
+      </p:sp>
+      <p:sp>
+        <p:nvSpPr>
+          <p:cNvPr id="12" name="Rounded Rectangle 11"/>
+          <p:cNvSpPr/>
+          <p:nvPr/>
+        </p:nvSpPr>
+        <p:spPr>
+          <a:xfrm>
+            <a:off x="4337913" y="1508760"/>
+            <a:ext cx="3514953" cy="3931920"/>
           </a:xfrm>
           <a:prstGeom prst="roundRect">
             <a:avLst/>
@@ -4124,14 +4357,14 @@
       </p:sp>
       <p:sp>
         <p:nvSpPr>
-          <p:cNvPr id="8" name="TextBox 7"/>
+          <p:cNvPr id="13" name="TextBox 12"/>
           <p:cNvSpPr txBox="1"/>
           <p:nvPr/>
         </p:nvSpPr>
         <p:spPr>
           <a:xfrm>
-            <a:off x="6400800" y="1645920"/>
-            <a:ext cx="5029200" cy="3749039"/>
+            <a:off x="4475073" y="1600200"/>
+            <a:ext cx="3240633" cy="3749039"/>
           </a:xfrm>
           <a:prstGeom prst="rect">
             <a:avLst/>
@@ -4146,9 +4379,25 @@
           <a:p>
             <a:pPr>
               <a:spcAft>
+                <a:spcPts val="400"/>
+              </a:spcAft>
+              <a:defRPr sz="850" b="1">
+                <a:solidFill>
+                  <a:srgbClr val="0284C7"/>
+                </a:solidFill>
+                <a:latin typeface="Inter"/>
+              </a:defRPr>
+            </a:pPr>
+            <a:r>
+              <a:t>[DAYS 31 - 60]</a:t>
+            </a:r>
+          </a:p>
+          <a:p>
+            <a:pPr>
+              <a:spcAft>
                 <a:spcPts val="1000"/>
               </a:spcAft>
-              <a:defRPr sz="1400" b="1">
+              <a:defRPr sz="1300" b="1">
                 <a:solidFill>
                   <a:srgbClr val="0F2537"/>
                 </a:solidFill>
@@ -4156,15 +4405,15 @@
               </a:defRPr>
             </a:pPr>
             <a:r>
-              <a:t>Phase 3: Validate &amp; Pilot</a:t>
+              <a:t>Phase 2: Design</a:t>
             </a:r>
           </a:p>
           <a:p>
             <a:pPr>
               <a:spcAft>
-                <a:spcPts val="800"/>
+                <a:spcPts val="600"/>
               </a:spcAft>
-              <a:defRPr sz="1050">
+              <a:defRPr sz="950">
                 <a:solidFill>
                   <a:srgbClr val="1E293B"/>
                 </a:solidFill>
@@ -4172,15 +4421,15 @@
               </a:defRPr>
             </a:pPr>
             <a:r>
-              <a:t>• Phase 3 (Days 61–90): Present simulators to the 5 strategic B2B clients. Collect feedback, finalize pricing models.</a:t>
+              <a:t>• Score pipeline ideas using prioritized scorecard.</a:t>
             </a:r>
           </a:p>
           <a:p>
             <a:pPr>
               <a:spcAft>
-                <a:spcPts val="800"/>
+                <a:spcPts val="600"/>
               </a:spcAft>
-              <a:defRPr sz="1050">
+              <a:defRPr sz="950">
                 <a:solidFill>
                   <a:srgbClr val="1E293B"/>
                 </a:solidFill>
@@ -4188,27 +4437,43 @@
               </a:defRPr>
             </a:pPr>
             <a:r>
-              <a:t>• Letter of Intent (LOI) Gates: Secure early pilot commitments to validate willingness to pay before writing product code.</a:t>
-            </a:r>
-          </a:p>
-        </p:txBody>
-      </p:sp>
-      <p:sp>
-        <p:nvSpPr>
-          <p:cNvPr id="9" name="Rectangle 8"/>
+              <a:t>• Build interactive B2B simulators to demonstrate solar &amp; staffing SaaS.</a:t>
+            </a:r>
+          </a:p>
+          <a:p>
+            <a:pPr>
+              <a:spcAft>
+                <a:spcPts val="600"/>
+              </a:spcAft>
+              <a:defRPr sz="950">
+                <a:solidFill>
+                  <a:srgbClr val="1E293B"/>
+                </a:solidFill>
+                <a:latin typeface="Inter"/>
+              </a:defRPr>
+            </a:pPr>
+            <a:r>
+              <a:t>• Draft API connector marketplace database schemas.</a:t>
+            </a:r>
+          </a:p>
+        </p:txBody>
+      </p:sp>
+      <p:sp>
+        <p:nvSpPr>
+          <p:cNvPr id="14" name="Right Arrow 13"/>
           <p:cNvSpPr/>
           <p:nvPr/>
         </p:nvSpPr>
         <p:spPr>
           <a:xfrm>
-            <a:off x="548640" y="5623560"/>
-            <a:ext cx="11094415" cy="594360"/>
-          </a:xfrm>
-          <a:prstGeom prst="rect">
+            <a:off x="7898586" y="3291840"/>
+            <a:ext cx="182880" cy="182880"/>
+          </a:xfrm>
+          <a:prstGeom prst="rightArrow">
             <a:avLst/>
           </a:prstGeom>
           <a:solidFill>
-            <a:srgbClr val="FEE4E6"/>
+            <a:srgbClr val="CBD5E1"/>
           </a:solidFill>
           <a:ln>
             <a:noFill/>
@@ -4238,23 +4503,25 @@
       </p:sp>
       <p:sp>
         <p:nvSpPr>
-          <p:cNvPr id="10" name="Rectangle 9"/>
+          <p:cNvPr id="15" name="Rounded Rectangle 14"/>
           <p:cNvSpPr/>
           <p:nvPr/>
         </p:nvSpPr>
         <p:spPr>
           <a:xfrm>
-            <a:off x="548640" y="5623560"/>
-            <a:ext cx="73152" cy="594360"/>
-          </a:xfrm>
-          <a:prstGeom prst="rect">
+            <a:off x="8127186" y="1508760"/>
+            <a:ext cx="3514953" cy="3931920"/>
+          </a:xfrm>
+          <a:prstGeom prst="roundRect">
             <a:avLst/>
           </a:prstGeom>
           <a:solidFill>
-            <a:srgbClr val="D60000"/>
+            <a:srgbClr val="F8FAFC"/>
           </a:solidFill>
           <a:ln>
-            <a:noFill/>
+            <a:solidFill>
+              <a:srgbClr val="CBD5E1"/>
+            </a:solidFill>
           </a:ln>
         </p:spPr>
         <p:style>
@@ -4281,14 +4548,14 @@
       </p:sp>
       <p:sp>
         <p:nvSpPr>
-          <p:cNvPr id="11" name="TextBox 10"/>
+          <p:cNvPr id="16" name="TextBox 15"/>
           <p:cNvSpPr txBox="1"/>
           <p:nvPr/>
         </p:nvSpPr>
         <p:spPr>
           <a:xfrm>
-            <a:off x="731520" y="5669280"/>
-            <a:ext cx="10698480" cy="502920"/>
+            <a:off x="8264346" y="1600200"/>
+            <a:ext cx="3240633" cy="3749039"/>
           </a:xfrm>
           <a:prstGeom prst="rect">
             <a:avLst/>
@@ -4302,51 +4569,82 @@
           <a:lstStyle/>
           <a:p>
             <a:pPr>
-              <a:defRPr sz="1100" b="1">
-                <a:solidFill>
-                  <a:srgbClr val="991B1B"/>
+              <a:spcAft>
+                <a:spcPts val="400"/>
+              </a:spcAft>
+              <a:defRPr sz="850" b="1">
+                <a:solidFill>
+                  <a:srgbClr val="0284C7"/>
                 </a:solidFill>
                 <a:latin typeface="Inter"/>
               </a:defRPr>
             </a:pPr>
             <a:r>
-              <a:t>Strategic Takeaway: A structured 90-day timeline prevents 'zombie projects' by enforcing clear exit gates at each phase.</a:t>
-            </a:r>
-          </a:p>
-        </p:txBody>
-      </p:sp>
-      <p:sp>
-        <p:nvSpPr>
-          <p:cNvPr id="12" name="TextBox 11"/>
-          <p:cNvSpPr txBox="1"/>
-          <p:nvPr/>
-        </p:nvSpPr>
-        <p:spPr>
-          <a:xfrm>
-            <a:off x="548640" y="6309360"/>
-            <a:ext cx="11094415" cy="320040"/>
-          </a:xfrm>
-          <a:prstGeom prst="rect">
-            <a:avLst/>
-          </a:prstGeom>
-          <a:noFill/>
-        </p:spPr>
-        <p:txBody>
-          <a:bodyPr wrap="none">
-            <a:spAutoFit/>
-          </a:bodyPr>
-          <a:lstStyle/>
-          <a:p>
-            <a:pPr>
-              <a:defRPr sz="850">
-                <a:solidFill>
-                  <a:srgbClr val="64748B"/>
+              <a:t>[DAYS 61 - 90]</a:t>
+            </a:r>
+          </a:p>
+          <a:p>
+            <a:pPr>
+              <a:spcAft>
+                <a:spcPts val="1000"/>
+              </a:spcAft>
+              <a:defRPr sz="1300" b="1">
+                <a:solidFill>
+                  <a:srgbClr val="0F2537"/>
+                </a:solidFill>
+                <a:latin typeface="Outfit"/>
+              </a:defRPr>
+            </a:pPr>
+            <a:r>
+              <a:t>Phase 3: Pilot &amp; Validate</a:t>
+            </a:r>
+          </a:p>
+          <a:p>
+            <a:pPr>
+              <a:spcAft>
+                <a:spcPts val="600"/>
+              </a:spcAft>
+              <a:defRPr sz="950">
+                <a:solidFill>
+                  <a:srgbClr val="1E293B"/>
                 </a:solidFill>
                 <a:latin typeface="Inter"/>
               </a:defRPr>
             </a:pPr>
             <a:r>
-              <a:t>Jithvar Business Group Strategy Deck  |  Confidential  |  Slide 11 of 12</a:t>
+              <a:t>• Present simulators to 5 strategic B2B clients.</a:t>
+            </a:r>
+          </a:p>
+          <a:p>
+            <a:pPr>
+              <a:spcAft>
+                <a:spcPts val="600"/>
+              </a:spcAft>
+              <a:defRPr sz="950">
+                <a:solidFill>
+                  <a:srgbClr val="1E293B"/>
+                </a:solidFill>
+                <a:latin typeface="Inter"/>
+              </a:defRPr>
+            </a:pPr>
+            <a:r>
+              <a:t>• Collect feedback, define subscription pricing models.</a:t>
+            </a:r>
+          </a:p>
+          <a:p>
+            <a:pPr>
+              <a:spcAft>
+                <a:spcPts val="600"/>
+              </a:spcAft>
+              <a:defRPr sz="950">
+                <a:solidFill>
+                  <a:srgbClr val="1E293B"/>
+                </a:solidFill>
+                <a:latin typeface="Inter"/>
+              </a:defRPr>
+            </a:pPr>
+            <a:r>
+              <a:t>• Secure early pilot letters of intent (LOI) to validate demand.</a:t>
             </a:r>
           </a:p>
         </p:txBody>
@@ -4449,7 +4747,7 @@
         </p:nvSpPr>
         <p:spPr>
           <a:xfrm>
-            <a:off x="548640" y="1371600"/>
+            <a:off x="548640" y="1325880"/>
             <a:ext cx="11094415" cy="36576"/>
           </a:xfrm>
           <a:prstGeom prst="rect">
@@ -4486,14 +4784,172 @@
       </p:sp>
       <p:sp>
         <p:nvSpPr>
-          <p:cNvPr id="5" name="Rounded Rectangle 4"/>
+          <p:cNvPr id="5" name="TextBox 4"/>
+          <p:cNvSpPr txBox="1"/>
+          <p:nvPr/>
+        </p:nvSpPr>
+        <p:spPr>
+          <a:xfrm>
+            <a:off x="548640" y="6309360"/>
+            <a:ext cx="11094415" cy="320040"/>
+          </a:xfrm>
+          <a:prstGeom prst="rect">
+            <a:avLst/>
+          </a:prstGeom>
+          <a:noFill/>
+        </p:spPr>
+        <p:txBody>
+          <a:bodyPr wrap="none">
+            <a:spAutoFit/>
+          </a:bodyPr>
+          <a:lstStyle/>
+          <a:p>
+            <a:pPr>
+              <a:defRPr sz="850">
+                <a:solidFill>
+                  <a:srgbClr val="64748B"/>
+                </a:solidFill>
+                <a:latin typeface="Inter"/>
+              </a:defRPr>
+            </a:pPr>
+            <a:r>
+              <a:t>Jithvar Business Group Strategy Deck  |  Confidential  |  Slide 12 of 12</a:t>
+            </a:r>
+          </a:p>
+        </p:txBody>
+      </p:sp>
+      <p:sp>
+        <p:nvSpPr>
+          <p:cNvPr id="6" name="Rectangle 5"/>
           <p:cNvSpPr/>
           <p:nvPr/>
         </p:nvSpPr>
         <p:spPr>
           <a:xfrm>
-            <a:off x="548640" y="1554480"/>
-            <a:ext cx="5394960" cy="3931920"/>
+            <a:off x="548640" y="5623560"/>
+            <a:ext cx="11094415" cy="594360"/>
+          </a:xfrm>
+          <a:prstGeom prst="rect">
+            <a:avLst/>
+          </a:prstGeom>
+          <a:solidFill>
+            <a:srgbClr val="FEE4E6"/>
+          </a:solidFill>
+          <a:ln>
+            <a:noFill/>
+          </a:ln>
+        </p:spPr>
+        <p:style>
+          <a:lnRef idx="1">
+            <a:schemeClr val="accent1"/>
+          </a:lnRef>
+          <a:fillRef idx="3">
+            <a:schemeClr val="accent1"/>
+          </a:fillRef>
+          <a:effectRef idx="2">
+            <a:schemeClr val="accent1"/>
+          </a:effectRef>
+          <a:fontRef idx="minor">
+            <a:schemeClr val="lt1"/>
+          </a:fontRef>
+        </p:style>
+        <p:txBody>
+          <a:bodyPr rtlCol="0" anchor="ctr"/>
+          <a:lstStyle/>
+          <a:p>
+            <a:pPr algn="ctr"/>
+          </a:p>
+        </p:txBody>
+      </p:sp>
+      <p:sp>
+        <p:nvSpPr>
+          <p:cNvPr id="7" name="Rectangle 6"/>
+          <p:cNvSpPr/>
+          <p:nvPr/>
+        </p:nvSpPr>
+        <p:spPr>
+          <a:xfrm>
+            <a:off x="548640" y="5623560"/>
+            <a:ext cx="73152" cy="594360"/>
+          </a:xfrm>
+          <a:prstGeom prst="rect">
+            <a:avLst/>
+          </a:prstGeom>
+          <a:solidFill>
+            <a:srgbClr val="D60000"/>
+          </a:solidFill>
+          <a:ln>
+            <a:noFill/>
+          </a:ln>
+        </p:spPr>
+        <p:style>
+          <a:lnRef idx="1">
+            <a:schemeClr val="accent1"/>
+          </a:lnRef>
+          <a:fillRef idx="3">
+            <a:schemeClr val="accent1"/>
+          </a:fillRef>
+          <a:effectRef idx="2">
+            <a:schemeClr val="accent1"/>
+          </a:effectRef>
+          <a:fontRef idx="minor">
+            <a:schemeClr val="lt1"/>
+          </a:fontRef>
+        </p:style>
+        <p:txBody>
+          <a:bodyPr rtlCol="0" anchor="ctr"/>
+          <a:lstStyle/>
+          <a:p>
+            <a:pPr algn="ctr"/>
+          </a:p>
+        </p:txBody>
+      </p:sp>
+      <p:sp>
+        <p:nvSpPr>
+          <p:cNvPr id="8" name="TextBox 7"/>
+          <p:cNvSpPr txBox="1"/>
+          <p:nvPr/>
+        </p:nvSpPr>
+        <p:spPr>
+          <a:xfrm>
+            <a:off x="731520" y="5669280"/>
+            <a:ext cx="10698480" cy="502920"/>
+          </a:xfrm>
+          <a:prstGeom prst="rect">
+            <a:avLst/>
+          </a:prstGeom>
+          <a:noFill/>
+        </p:spPr>
+        <p:txBody>
+          <a:bodyPr wrap="square">
+            <a:spAutoFit/>
+          </a:bodyPr>
+          <a:lstStyle/>
+          <a:p>
+            <a:pPr>
+              <a:defRPr sz="1100" b="1">
+                <a:solidFill>
+                  <a:srgbClr val="991B1B"/>
+                </a:solidFill>
+                <a:latin typeface="Inter"/>
+              </a:defRPr>
+            </a:pPr>
+            <a:r>
+              <a:t>Strategic Takeaway: Corporate discipline requires funding winners and terminating unviable projects before capital is exhausted.</a:t>
+            </a:r>
+          </a:p>
+        </p:txBody>
+      </p:sp>
+      <p:sp>
+        <p:nvSpPr>
+          <p:cNvPr id="9" name="Rounded Rectangle 8"/>
+          <p:cNvSpPr/>
+          <p:nvPr/>
+        </p:nvSpPr>
+        <p:spPr>
+          <a:xfrm>
+            <a:off x="548640" y="1508760"/>
+            <a:ext cx="3514953" cy="3931920"/>
           </a:xfrm>
           <a:prstGeom prst="roundRect">
             <a:avLst/>
@@ -4531,14 +4987,14 @@
       </p:sp>
       <p:sp>
         <p:nvSpPr>
-          <p:cNvPr id="6" name="TextBox 5"/>
+          <p:cNvPr id="10" name="TextBox 9"/>
           <p:cNvSpPr txBox="1"/>
           <p:nvPr/>
         </p:nvSpPr>
         <p:spPr>
           <a:xfrm>
-            <a:off x="731520" y="1645920"/>
-            <a:ext cx="5029200" cy="3749039"/>
+            <a:off x="685800" y="1600200"/>
+            <a:ext cx="3240633" cy="3749039"/>
           </a:xfrm>
           <a:prstGeom prst="rect">
             <a:avLst/>
@@ -4553,9 +5009,25 @@
           <a:p>
             <a:pPr>
               <a:spcAft>
+                <a:spcPts val="400"/>
+              </a:spcAft>
+              <a:defRPr sz="850" b="1">
+                <a:solidFill>
+                  <a:srgbClr val="64748B"/>
+                </a:solidFill>
+                <a:latin typeface="Inter"/>
+              </a:defRPr>
+            </a:pPr>
+            <a:r>
+              <a:t>[PORTFOLIO HEALTH]</a:t>
+            </a:r>
+          </a:p>
+          <a:p>
+            <a:pPr>
+              <a:spcAft>
                 <a:spcPts val="1000"/>
               </a:spcAft>
-              <a:defRPr sz="1400" b="1">
+              <a:defRPr sz="1300" b="1">
                 <a:solidFill>
                   <a:srgbClr val="0F2537"/>
                 </a:solidFill>
@@ -4563,15 +5035,15 @@
               </a:defRPr>
             </a:pPr>
             <a:r>
-              <a:t>Group ROIC &amp; Unit Economics</a:t>
+              <a:t>Group Level Metrics</a:t>
             </a:r>
           </a:p>
           <a:p>
             <a:pPr>
               <a:spcAft>
-                <a:spcPts val="800"/>
+                <a:spcPts val="600"/>
               </a:spcAft>
-              <a:defRPr sz="1050">
+              <a:defRPr sz="950">
                 <a:solidFill>
                   <a:srgbClr val="1E293B"/>
                 </a:solidFill>
@@ -4579,15 +5051,15 @@
               </a:defRPr>
             </a:pPr>
             <a:r>
-              <a:t>• Portfolio Gate: Target EBITDA margin expansion, overall Group ROIC, and developer utilization rates.</a:t>
+              <a:t>• Group-wide EBITDA margin expansion.</a:t>
             </a:r>
           </a:p>
           <a:p>
             <a:pPr>
               <a:spcAft>
-                <a:spcPts val="800"/>
+                <a:spcPts val="600"/>
               </a:spcAft>
-              <a:defRPr sz="1050">
+              <a:defRPr sz="950">
                 <a:solidFill>
                   <a:srgbClr val="1E293B"/>
                 </a:solidFill>
@@ -4595,21 +5067,37 @@
               </a:defRPr>
             </a:pPr>
             <a:r>
-              <a:t>• Commercial Gate: Target a Customer Lifetime Value to CAC ratio (LTV:CAC) &gt; 3.0x, and a cash payback cycle under 12 months.</a:t>
-            </a:r>
-          </a:p>
-        </p:txBody>
-      </p:sp>
-      <p:sp>
-        <p:nvSpPr>
-          <p:cNvPr id="7" name="Rounded Rectangle 6"/>
+              <a:t>• Group Return on Invested Capital (ROIC).</a:t>
+            </a:r>
+          </a:p>
+          <a:p>
+            <a:pPr>
+              <a:spcAft>
+                <a:spcPts val="600"/>
+              </a:spcAft>
+              <a:defRPr sz="950">
+                <a:solidFill>
+                  <a:srgbClr val="1E293B"/>
+                </a:solidFill>
+                <a:latin typeface="Inter"/>
+              </a:defRPr>
+            </a:pPr>
+            <a:r>
+              <a:t>• Software engineer resource utilization rates.</a:t>
+            </a:r>
+          </a:p>
+        </p:txBody>
+      </p:sp>
+      <p:sp>
+        <p:nvSpPr>
+          <p:cNvPr id="11" name="Rounded Rectangle 10"/>
           <p:cNvSpPr/>
           <p:nvPr/>
         </p:nvSpPr>
         <p:spPr>
           <a:xfrm>
-            <a:off x="6217920" y="1554480"/>
-            <a:ext cx="5394960" cy="3931920"/>
+            <a:off x="4337913" y="1508760"/>
+            <a:ext cx="3514953" cy="3931920"/>
           </a:xfrm>
           <a:prstGeom prst="roundRect">
             <a:avLst/>
@@ -4647,14 +5135,14 @@
       </p:sp>
       <p:sp>
         <p:nvSpPr>
-          <p:cNvPr id="8" name="TextBox 7"/>
+          <p:cNvPr id="12" name="TextBox 11"/>
           <p:cNvSpPr txBox="1"/>
           <p:nvPr/>
         </p:nvSpPr>
         <p:spPr>
           <a:xfrm>
-            <a:off x="6400800" y="1645920"/>
-            <a:ext cx="5029200" cy="3749039"/>
+            <a:off x="4475073" y="1600200"/>
+            <a:ext cx="3240633" cy="3749039"/>
           </a:xfrm>
           <a:prstGeom prst="rect">
             <a:avLst/>
@@ -4669,9 +5157,25 @@
           <a:p>
             <a:pPr>
               <a:spcAft>
+                <a:spcPts val="400"/>
+              </a:spcAft>
+              <a:defRPr sz="850" b="1">
+                <a:solidFill>
+                  <a:srgbClr val="0284C7"/>
+                </a:solidFill>
+                <a:latin typeface="Inter"/>
+              </a:defRPr>
+            </a:pPr>
+            <a:r>
+              <a:t>[UNIT ECONOMICS]</a:t>
+            </a:r>
+          </a:p>
+          <a:p>
+            <a:pPr>
+              <a:spcAft>
                 <a:spcPts val="1000"/>
               </a:spcAft>
-              <a:defRPr sz="1400" b="1">
+              <a:defRPr sz="1300" b="1">
                 <a:solidFill>
                   <a:srgbClr val="0F2537"/>
                 </a:solidFill>
@@ -4679,15 +5183,15 @@
               </a:defRPr>
             </a:pPr>
             <a:r>
-              <a:t>Capital Discipline &amp; Fail-Fast Rules</a:t>
+              <a:t>Commercial Viability</a:t>
             </a:r>
           </a:p>
           <a:p>
             <a:pPr>
               <a:spcAft>
-                <a:spcPts val="800"/>
+                <a:spcPts val="600"/>
               </a:spcAft>
-              <a:defRPr sz="1050">
+              <a:defRPr sz="950">
                 <a:solidFill>
                   <a:srgbClr val="1E293B"/>
                 </a:solidFill>
@@ -4695,15 +5199,15 @@
               </a:defRPr>
             </a:pPr>
             <a:r>
-              <a:t>• Milestone Gates: Enforce strict 60-day development milestones to prevent resource drag.</a:t>
+              <a:t>• Customer Lifetime Value to CAC ratio (LTV:CAC) &gt; 3.0x.</a:t>
             </a:r>
           </a:p>
           <a:p>
             <a:pPr>
               <a:spcAft>
-                <a:spcPts val="800"/>
+                <a:spcPts val="600"/>
               </a:spcAft>
-              <a:defRPr sz="1050">
+              <a:defRPr sz="950">
                 <a:solidFill>
                   <a:srgbClr val="1E293B"/>
                 </a:solidFill>
@@ -4711,15 +5215,15 @@
               </a:defRPr>
             </a:pPr>
             <a:r>
-              <a:t>• Exit Protocol: Automatically terminate any MVP that does not secure at least 2 paid pilot commitments in 60 days.</a:t>
+              <a:t>• Cash payback cycle under 12 months.</a:t>
             </a:r>
           </a:p>
           <a:p>
             <a:pPr>
               <a:spcAft>
-                <a:spcPts val="800"/>
+                <a:spcPts val="600"/>
               </a:spcAft>
-              <a:defRPr sz="1050">
+              <a:defRPr sz="950">
                 <a:solidFill>
                   <a:srgbClr val="1E293B"/>
                 </a:solidFill>
@@ -4727,30 +5231,32 @@
               </a:defRPr>
             </a:pPr>
             <a:r>
-              <a:t>• Velocity: Target a &gt; 70% early rejection rate at the design gate to protect JBG's primary balance sheet.</a:t>
-            </a:r>
-          </a:p>
-        </p:txBody>
-      </p:sp>
-      <p:sp>
-        <p:nvSpPr>
-          <p:cNvPr id="9" name="Rectangle 8"/>
+              <a:t>• Subscription churn rate under 1.5% per month.</a:t>
+            </a:r>
+          </a:p>
+        </p:txBody>
+      </p:sp>
+      <p:sp>
+        <p:nvSpPr>
+          <p:cNvPr id="13" name="Rounded Rectangle 12"/>
           <p:cNvSpPr/>
           <p:nvPr/>
         </p:nvSpPr>
         <p:spPr>
           <a:xfrm>
-            <a:off x="548640" y="5623560"/>
-            <a:ext cx="11094415" cy="594360"/>
-          </a:xfrm>
-          <a:prstGeom prst="rect">
+            <a:off x="8127186" y="1508760"/>
+            <a:ext cx="3514953" cy="3931920"/>
+          </a:xfrm>
+          <a:prstGeom prst="roundRect">
             <a:avLst/>
           </a:prstGeom>
           <a:solidFill>
             <a:srgbClr val="FEE4E6"/>
           </a:solidFill>
           <a:ln>
-            <a:noFill/>
+            <a:solidFill>
+              <a:srgbClr val="D60000"/>
+            </a:solidFill>
           </a:ln>
         </p:spPr>
         <p:style>
@@ -4777,57 +5283,14 @@
       </p:sp>
       <p:sp>
         <p:nvSpPr>
-          <p:cNvPr id="10" name="Rectangle 9"/>
-          <p:cNvSpPr/>
-          <p:nvPr/>
-        </p:nvSpPr>
-        <p:spPr>
-          <a:xfrm>
-            <a:off x="548640" y="5623560"/>
-            <a:ext cx="73152" cy="594360"/>
-          </a:xfrm>
-          <a:prstGeom prst="rect">
-            <a:avLst/>
-          </a:prstGeom>
-          <a:solidFill>
-            <a:srgbClr val="D60000"/>
-          </a:solidFill>
-          <a:ln>
-            <a:noFill/>
-          </a:ln>
-        </p:spPr>
-        <p:style>
-          <a:lnRef idx="1">
-            <a:schemeClr val="accent1"/>
-          </a:lnRef>
-          <a:fillRef idx="3">
-            <a:schemeClr val="accent1"/>
-          </a:fillRef>
-          <a:effectRef idx="2">
-            <a:schemeClr val="accent1"/>
-          </a:effectRef>
-          <a:fontRef idx="minor">
-            <a:schemeClr val="lt1"/>
-          </a:fontRef>
-        </p:style>
-        <p:txBody>
-          <a:bodyPr rtlCol="0" anchor="ctr"/>
-          <a:lstStyle/>
-          <a:p>
-            <a:pPr algn="ctr"/>
-          </a:p>
-        </p:txBody>
-      </p:sp>
-      <p:sp>
-        <p:nvSpPr>
-          <p:cNvPr id="11" name="TextBox 10"/>
+          <p:cNvPr id="14" name="TextBox 13"/>
           <p:cNvSpPr txBox="1"/>
           <p:nvPr/>
         </p:nvSpPr>
         <p:spPr>
           <a:xfrm>
-            <a:off x="731520" y="5669280"/>
-            <a:ext cx="10698480" cy="502920"/>
+            <a:off x="8264346" y="1600200"/>
+            <a:ext cx="3240633" cy="3749039"/>
           </a:xfrm>
           <a:prstGeom prst="rect">
             <a:avLst/>
@@ -4841,51 +5304,82 @@
           <a:lstStyle/>
           <a:p>
             <a:pPr>
-              <a:defRPr sz="1100" b="1">
-                <a:solidFill>
-                  <a:srgbClr val="991B1B"/>
+              <a:spcAft>
+                <a:spcPts val="400"/>
+              </a:spcAft>
+              <a:defRPr sz="850" b="1">
+                <a:solidFill>
+                  <a:srgbClr val="D60000"/>
                 </a:solidFill>
                 <a:latin typeface="Inter"/>
               </a:defRPr>
             </a:pPr>
             <a:r>
-              <a:t>Strategic Takeaway: Corporate discipline requires funding winners and terminating unviable projects before capital is exhausted.</a:t>
-            </a:r>
-          </a:p>
-        </p:txBody>
-      </p:sp>
-      <p:sp>
-        <p:nvSpPr>
-          <p:cNvPr id="12" name="TextBox 11"/>
-          <p:cNvSpPr txBox="1"/>
-          <p:nvPr/>
-        </p:nvSpPr>
-        <p:spPr>
-          <a:xfrm>
-            <a:off x="548640" y="6309360"/>
-            <a:ext cx="11094415" cy="320040"/>
-          </a:xfrm>
-          <a:prstGeom prst="rect">
-            <a:avLst/>
-          </a:prstGeom>
-          <a:noFill/>
-        </p:spPr>
-        <p:txBody>
-          <a:bodyPr wrap="none">
-            <a:spAutoFit/>
-          </a:bodyPr>
-          <a:lstStyle/>
-          <a:p>
-            <a:pPr>
-              <a:defRPr sz="850">
-                <a:solidFill>
-                  <a:srgbClr val="64748B"/>
+              <a:t>[DISCIPLINE GATE]</a:t>
+            </a:r>
+          </a:p>
+          <a:p>
+            <a:pPr>
+              <a:spcAft>
+                <a:spcPts val="1000"/>
+              </a:spcAft>
+              <a:defRPr sz="1300" b="1">
+                <a:solidFill>
+                  <a:srgbClr val="0F2537"/>
+                </a:solidFill>
+                <a:latin typeface="Outfit"/>
+              </a:defRPr>
+            </a:pPr>
+            <a:r>
+              <a:t>Fail-Fast Rules</a:t>
+            </a:r>
+          </a:p>
+          <a:p>
+            <a:pPr>
+              <a:spcAft>
+                <a:spcPts val="600"/>
+              </a:spcAft>
+              <a:defRPr sz="950">
+                <a:solidFill>
+                  <a:srgbClr val="1E293B"/>
                 </a:solidFill>
                 <a:latin typeface="Inter"/>
               </a:defRPr>
             </a:pPr>
             <a:r>
-              <a:t>Jithvar Business Group Strategy Deck  |  Confidential  |  Slide 12 of 12</a:t>
+              <a:t>• Enforce strict 60-day development milestones.</a:t>
+            </a:r>
+          </a:p>
+          <a:p>
+            <a:pPr>
+              <a:spcAft>
+                <a:spcPts val="600"/>
+              </a:spcAft>
+              <a:defRPr sz="950">
+                <a:solidFill>
+                  <a:srgbClr val="1E293B"/>
+                </a:solidFill>
+                <a:latin typeface="Inter"/>
+              </a:defRPr>
+            </a:pPr>
+            <a:r>
+              <a:t>• Automatically terminate any MVP that does not secure at least 2 paid pilot commitments in 60 days.</a:t>
+            </a:r>
+          </a:p>
+          <a:p>
+            <a:pPr>
+              <a:spcAft>
+                <a:spcPts val="600"/>
+              </a:spcAft>
+              <a:defRPr sz="950">
+                <a:solidFill>
+                  <a:srgbClr val="1E293B"/>
+                </a:solidFill>
+                <a:latin typeface="Inter"/>
+              </a:defRPr>
+            </a:pPr>
+            <a:r>
+              <a:t>• Target &gt; 70% early rejection rate at the design gate.</a:t>
             </a:r>
           </a:p>
         </p:txBody>
@@ -4988,7 +5482,7 @@
         </p:nvSpPr>
         <p:spPr>
           <a:xfrm>
-            <a:off x="548640" y="1371600"/>
+            <a:off x="548640" y="1325880"/>
             <a:ext cx="11094415" cy="36576"/>
           </a:xfrm>
           <a:prstGeom prst="rect">
@@ -5025,13 +5519,171 @@
       </p:sp>
       <p:sp>
         <p:nvSpPr>
-          <p:cNvPr id="5" name="Rounded Rectangle 4"/>
+          <p:cNvPr id="5" name="TextBox 4"/>
+          <p:cNvSpPr txBox="1"/>
+          <p:nvPr/>
+        </p:nvSpPr>
+        <p:spPr>
+          <a:xfrm>
+            <a:off x="548640" y="6309360"/>
+            <a:ext cx="11094415" cy="320040"/>
+          </a:xfrm>
+          <a:prstGeom prst="rect">
+            <a:avLst/>
+          </a:prstGeom>
+          <a:noFill/>
+        </p:spPr>
+        <p:txBody>
+          <a:bodyPr wrap="none">
+            <a:spAutoFit/>
+          </a:bodyPr>
+          <a:lstStyle/>
+          <a:p>
+            <a:pPr>
+              <a:defRPr sz="850">
+                <a:solidFill>
+                  <a:srgbClr val="64748B"/>
+                </a:solidFill>
+                <a:latin typeface="Inter"/>
+              </a:defRPr>
+            </a:pPr>
+            <a:r>
+              <a:t>Jithvar Business Group Strategy Deck  |  Confidential  |  Slide 2 of 12</a:t>
+            </a:r>
+          </a:p>
+        </p:txBody>
+      </p:sp>
+      <p:sp>
+        <p:nvSpPr>
+          <p:cNvPr id="6" name="Rectangle 5"/>
           <p:cNvSpPr/>
           <p:nvPr/>
         </p:nvSpPr>
         <p:spPr>
           <a:xfrm>
-            <a:off x="548640" y="1554480"/>
+            <a:off x="548640" y="5623560"/>
+            <a:ext cx="11094415" cy="594360"/>
+          </a:xfrm>
+          <a:prstGeom prst="rect">
+            <a:avLst/>
+          </a:prstGeom>
+          <a:solidFill>
+            <a:srgbClr val="FEE4E6"/>
+          </a:solidFill>
+          <a:ln>
+            <a:noFill/>
+          </a:ln>
+        </p:spPr>
+        <p:style>
+          <a:lnRef idx="1">
+            <a:schemeClr val="accent1"/>
+          </a:lnRef>
+          <a:fillRef idx="3">
+            <a:schemeClr val="accent1"/>
+          </a:fillRef>
+          <a:effectRef idx="2">
+            <a:schemeClr val="accent1"/>
+          </a:effectRef>
+          <a:fontRef idx="minor">
+            <a:schemeClr val="lt1"/>
+          </a:fontRef>
+        </p:style>
+        <p:txBody>
+          <a:bodyPr rtlCol="0" anchor="ctr"/>
+          <a:lstStyle/>
+          <a:p>
+            <a:pPr algn="ctr"/>
+          </a:p>
+        </p:txBody>
+      </p:sp>
+      <p:sp>
+        <p:nvSpPr>
+          <p:cNvPr id="7" name="Rectangle 6"/>
+          <p:cNvSpPr/>
+          <p:nvPr/>
+        </p:nvSpPr>
+        <p:spPr>
+          <a:xfrm>
+            <a:off x="548640" y="5623560"/>
+            <a:ext cx="73152" cy="594360"/>
+          </a:xfrm>
+          <a:prstGeom prst="rect">
+            <a:avLst/>
+          </a:prstGeom>
+          <a:solidFill>
+            <a:srgbClr val="D60000"/>
+          </a:solidFill>
+          <a:ln>
+            <a:noFill/>
+          </a:ln>
+        </p:spPr>
+        <p:style>
+          <a:lnRef idx="1">
+            <a:schemeClr val="accent1"/>
+          </a:lnRef>
+          <a:fillRef idx="3">
+            <a:schemeClr val="accent1"/>
+          </a:fillRef>
+          <a:effectRef idx="2">
+            <a:schemeClr val="accent1"/>
+          </a:effectRef>
+          <a:fontRef idx="minor">
+            <a:schemeClr val="lt1"/>
+          </a:fontRef>
+        </p:style>
+        <p:txBody>
+          <a:bodyPr rtlCol="0" anchor="ctr"/>
+          <a:lstStyle/>
+          <a:p>
+            <a:pPr algn="ctr"/>
+          </a:p>
+        </p:txBody>
+      </p:sp>
+      <p:sp>
+        <p:nvSpPr>
+          <p:cNvPr id="8" name="TextBox 7"/>
+          <p:cNvSpPr txBox="1"/>
+          <p:nvPr/>
+        </p:nvSpPr>
+        <p:spPr>
+          <a:xfrm>
+            <a:off x="731520" y="5669280"/>
+            <a:ext cx="10698480" cy="502920"/>
+          </a:xfrm>
+          <a:prstGeom prst="rect">
+            <a:avLst/>
+          </a:prstGeom>
+          <a:noFill/>
+        </p:spPr>
+        <p:txBody>
+          <a:bodyPr wrap="square">
+            <a:spAutoFit/>
+          </a:bodyPr>
+          <a:lstStyle/>
+          <a:p>
+            <a:pPr>
+              <a:defRPr sz="1100" b="1">
+                <a:solidFill>
+                  <a:srgbClr val="991B1B"/>
+                </a:solidFill>
+                <a:latin typeface="Inter"/>
+              </a:defRPr>
+            </a:pPr>
+            <a:r>
+              <a:t>Strategic Takeaway: Establishing a quantitative filtering funnel prevents JBG from diluting capital and focus across too many concurrent projects.</a:t>
+            </a:r>
+          </a:p>
+        </p:txBody>
+      </p:sp>
+      <p:sp>
+        <p:nvSpPr>
+          <p:cNvPr id="9" name="Rounded Rectangle 8"/>
+          <p:cNvSpPr/>
+          <p:nvPr/>
+        </p:nvSpPr>
+        <p:spPr>
+          <a:xfrm>
+            <a:off x="548640" y="1508760"/>
             <a:ext cx="5394960" cy="3931920"/>
           </a:xfrm>
           <a:prstGeom prst="roundRect">
@@ -5070,13 +5722,13 @@
       </p:sp>
       <p:sp>
         <p:nvSpPr>
-          <p:cNvPr id="6" name="TextBox 5"/>
+          <p:cNvPr id="10" name="TextBox 9"/>
           <p:cNvSpPr txBox="1"/>
           <p:nvPr/>
         </p:nvSpPr>
         <p:spPr>
           <a:xfrm>
-            <a:off x="731520" y="1645920"/>
+            <a:off x="731520" y="1600200"/>
             <a:ext cx="5029200" cy="3749039"/>
           </a:xfrm>
           <a:prstGeom prst="rect">
@@ -5108,9 +5760,9 @@
           <a:p>
             <a:pPr>
               <a:spcAft>
-                <a:spcPts val="800"/>
+                <a:spcPts val="600"/>
               </a:spcAft>
-              <a:defRPr sz="1050">
+              <a:defRPr sz="1000">
                 <a:solidFill>
                   <a:srgbClr val="1E293B"/>
                 </a:solidFill>
@@ -5118,15 +5770,15 @@
               </a:defRPr>
             </a:pPr>
             <a:r>
-              <a:t>• Diversification vs. Dilution: Group footprints across JCS (Software), Nature Grid (Clean Energy), and Aequalis (HR) represent high-growth vectors, but decentralized allocations dilute impact.</a:t>
+              <a:t>• Group footprints across Software (JCS), Clean Energy (Nature Grid), and HR (Aequalis) represent high-growth vectors, but decentralized allocations dilute impact.</a:t>
             </a:r>
           </a:p>
           <a:p>
             <a:pPr>
               <a:spcAft>
-                <a:spcPts val="800"/>
+                <a:spcPts val="600"/>
               </a:spcAft>
-              <a:defRPr sz="1050">
+              <a:defRPr sz="1000">
                 <a:solidFill>
                   <a:srgbClr val="1E293B"/>
                 </a:solidFill>
@@ -5134,15 +5786,15 @@
               </a:defRPr>
             </a:pPr>
             <a:r>
-              <a:t>• Pipeline Saturation: Over 20+ opportunities compete for growth budgets simultaneously, causing decision paralysis.</a:t>
+              <a:t>• Over 20+ opportunities compete for growth budgets simultaneously, causing decision paralysis.</a:t>
             </a:r>
           </a:p>
           <a:p>
             <a:pPr>
               <a:spcAft>
-                <a:spcPts val="800"/>
+                <a:spcPts val="600"/>
               </a:spcAft>
-              <a:defRPr sz="1050">
+              <a:defRPr sz="1000">
                 <a:solidFill>
                   <a:srgbClr val="1E293B"/>
                 </a:solidFill>
@@ -5150,15 +5802,15 @@
               </a:defRPr>
             </a:pPr>
             <a:r>
-              <a:t>• Operating Constraints: Strict bottlenecks in software engineering headcount, capital availability, and management attention.</a:t>
+              <a:t>• Strict limits on developer pools, capital availability, and management attention.</a:t>
             </a:r>
           </a:p>
           <a:p>
             <a:pPr>
               <a:spcAft>
-                <a:spcPts val="800"/>
+                <a:spcPts val="600"/>
               </a:spcAft>
-              <a:defRPr sz="1050">
+              <a:defRPr sz="1000">
                 <a:solidFill>
                   <a:srgbClr val="1E293B"/>
                 </a:solidFill>
@@ -5166,20 +5818,20 @@
               </a:defRPr>
             </a:pPr>
             <a:r>
-              <a:t>• Subjective Bias: Legacy capital allocations influenced by subjective preference rather than quantitative criteria.</a:t>
-            </a:r>
-          </a:p>
-        </p:txBody>
-      </p:sp>
-      <p:sp>
-        <p:nvSpPr>
-          <p:cNvPr id="7" name="Rounded Rectangle 6"/>
+              <a:t>• Budget allocations influenced by subjective preference rather than quantitative criteria.</a:t>
+            </a:r>
+          </a:p>
+        </p:txBody>
+      </p:sp>
+      <p:sp>
+        <p:nvSpPr>
+          <p:cNvPr id="11" name="Rounded Rectangle 10"/>
           <p:cNvSpPr/>
           <p:nvPr/>
         </p:nvSpPr>
         <p:spPr>
           <a:xfrm>
-            <a:off x="6217920" y="1554480"/>
+            <a:off x="6248095" y="1508760"/>
             <a:ext cx="5394960" cy="3931920"/>
           </a:xfrm>
           <a:prstGeom prst="roundRect">
@@ -5218,13 +5870,13 @@
       </p:sp>
       <p:sp>
         <p:nvSpPr>
-          <p:cNvPr id="8" name="TextBox 7"/>
+          <p:cNvPr id="12" name="TextBox 11"/>
           <p:cNvSpPr txBox="1"/>
           <p:nvPr/>
         </p:nvSpPr>
         <p:spPr>
           <a:xfrm>
-            <a:off x="6400800" y="1645920"/>
+            <a:off x="6430975" y="1600200"/>
             <a:ext cx="5029200" cy="3749039"/>
           </a:xfrm>
           <a:prstGeom prst="rect">
@@ -5256,9 +5908,9 @@
           <a:p>
             <a:pPr>
               <a:spcAft>
-                <a:spcPts val="800"/>
+                <a:spcPts val="600"/>
               </a:spcAft>
-              <a:defRPr sz="1050">
+              <a:defRPr sz="1000">
                 <a:solidFill>
                   <a:srgbClr val="1E293B"/>
                 </a:solidFill>
@@ -5272,9 +5924,9 @@
           <a:p>
             <a:pPr>
               <a:spcAft>
-                <a:spcPts val="800"/>
+                <a:spcPts val="600"/>
               </a:spcAft>
-              <a:defRPr sz="1050">
+              <a:defRPr sz="1000">
                 <a:solidFill>
                   <a:srgbClr val="1E293B"/>
                 </a:solidFill>
@@ -5288,9 +5940,9 @@
           <a:p>
             <a:pPr>
               <a:spcAft>
-                <a:spcPts val="800"/>
+                <a:spcPts val="600"/>
               </a:spcAft>
-              <a:defRPr sz="1050">
+              <a:defRPr sz="1000">
                 <a:solidFill>
                   <a:srgbClr val="1E293B"/>
                 </a:solidFill>
@@ -5298,165 +5950,7 @@
               </a:defRPr>
             </a:pPr>
             <a:r>
-              <a:t>• Phase 3: Validate Pilots - Build interactive MVPs to test customer demand and willingness to pay before committing scale capex.</a:t>
-            </a:r>
-          </a:p>
-        </p:txBody>
-      </p:sp>
-      <p:sp>
-        <p:nvSpPr>
-          <p:cNvPr id="9" name="Rectangle 8"/>
-          <p:cNvSpPr/>
-          <p:nvPr/>
-        </p:nvSpPr>
-        <p:spPr>
-          <a:xfrm>
-            <a:off x="548640" y="5623560"/>
-            <a:ext cx="11094415" cy="594360"/>
-          </a:xfrm>
-          <a:prstGeom prst="rect">
-            <a:avLst/>
-          </a:prstGeom>
-          <a:solidFill>
-            <a:srgbClr val="FEE4E6"/>
-          </a:solidFill>
-          <a:ln>
-            <a:noFill/>
-          </a:ln>
-        </p:spPr>
-        <p:style>
-          <a:lnRef idx="1">
-            <a:schemeClr val="accent1"/>
-          </a:lnRef>
-          <a:fillRef idx="3">
-            <a:schemeClr val="accent1"/>
-          </a:fillRef>
-          <a:effectRef idx="2">
-            <a:schemeClr val="accent1"/>
-          </a:effectRef>
-          <a:fontRef idx="minor">
-            <a:schemeClr val="lt1"/>
-          </a:fontRef>
-        </p:style>
-        <p:txBody>
-          <a:bodyPr rtlCol="0" anchor="ctr"/>
-          <a:lstStyle/>
-          <a:p>
-            <a:pPr algn="ctr"/>
-          </a:p>
-        </p:txBody>
-      </p:sp>
-      <p:sp>
-        <p:nvSpPr>
-          <p:cNvPr id="10" name="Rectangle 9"/>
-          <p:cNvSpPr/>
-          <p:nvPr/>
-        </p:nvSpPr>
-        <p:spPr>
-          <a:xfrm>
-            <a:off x="548640" y="5623560"/>
-            <a:ext cx="73152" cy="594360"/>
-          </a:xfrm>
-          <a:prstGeom prst="rect">
-            <a:avLst/>
-          </a:prstGeom>
-          <a:solidFill>
-            <a:srgbClr val="D60000"/>
-          </a:solidFill>
-          <a:ln>
-            <a:noFill/>
-          </a:ln>
-        </p:spPr>
-        <p:style>
-          <a:lnRef idx="1">
-            <a:schemeClr val="accent1"/>
-          </a:lnRef>
-          <a:fillRef idx="3">
-            <a:schemeClr val="accent1"/>
-          </a:fillRef>
-          <a:effectRef idx="2">
-            <a:schemeClr val="accent1"/>
-          </a:effectRef>
-          <a:fontRef idx="minor">
-            <a:schemeClr val="lt1"/>
-          </a:fontRef>
-        </p:style>
-        <p:txBody>
-          <a:bodyPr rtlCol="0" anchor="ctr"/>
-          <a:lstStyle/>
-          <a:p>
-            <a:pPr algn="ctr"/>
-          </a:p>
-        </p:txBody>
-      </p:sp>
-      <p:sp>
-        <p:nvSpPr>
-          <p:cNvPr id="11" name="TextBox 10"/>
-          <p:cNvSpPr txBox="1"/>
-          <p:nvPr/>
-        </p:nvSpPr>
-        <p:spPr>
-          <a:xfrm>
-            <a:off x="731520" y="5669280"/>
-            <a:ext cx="10698480" cy="502920"/>
-          </a:xfrm>
-          <a:prstGeom prst="rect">
-            <a:avLst/>
-          </a:prstGeom>
-          <a:noFill/>
-        </p:spPr>
-        <p:txBody>
-          <a:bodyPr wrap="square">
-            <a:spAutoFit/>
-          </a:bodyPr>
-          <a:lstStyle/>
-          <a:p>
-            <a:pPr>
-              <a:defRPr sz="1100" b="1">
-                <a:solidFill>
-                  <a:srgbClr val="991B1B"/>
-                </a:solidFill>
-                <a:latin typeface="Inter"/>
-              </a:defRPr>
-            </a:pPr>
-            <a:r>
-              <a:t>Strategic Takeaway: Establishing a quantitative filtering funnel prevents JBG from diluting capital and focus across too many concurrent projects.</a:t>
-            </a:r>
-          </a:p>
-        </p:txBody>
-      </p:sp>
-      <p:sp>
-        <p:nvSpPr>
-          <p:cNvPr id="12" name="TextBox 11"/>
-          <p:cNvSpPr txBox="1"/>
-          <p:nvPr/>
-        </p:nvSpPr>
-        <p:spPr>
-          <a:xfrm>
-            <a:off x="548640" y="6309360"/>
-            <a:ext cx="11094415" cy="320040"/>
-          </a:xfrm>
-          <a:prstGeom prst="rect">
-            <a:avLst/>
-          </a:prstGeom>
-          <a:noFill/>
-        </p:spPr>
-        <p:txBody>
-          <a:bodyPr wrap="none">
-            <a:spAutoFit/>
-          </a:bodyPr>
-          <a:lstStyle/>
-          <a:p>
-            <a:pPr>
-              <a:defRPr sz="850">
-                <a:solidFill>
-                  <a:srgbClr val="64748B"/>
-                </a:solidFill>
-                <a:latin typeface="Inter"/>
-              </a:defRPr>
-            </a:pPr>
-            <a:r>
-              <a:t>Jithvar Business Group Strategy Deck  |  Confidential  |  Slide 2 of 12</a:t>
+              <a:t>• Phase 3: Validate Pilots - Build interactive B2B SaaS simulators to test client willingness to pay before committing scale capex.</a:t>
             </a:r>
           </a:p>
         </p:txBody>
@@ -5559,7 +6053,7 @@
         </p:nvSpPr>
         <p:spPr>
           <a:xfrm>
-            <a:off x="548640" y="1371600"/>
+            <a:off x="548640" y="1325880"/>
             <a:ext cx="11094415" cy="36576"/>
           </a:xfrm>
           <a:prstGeom prst="rect">
@@ -5596,14 +6090,172 @@
       </p:sp>
       <p:sp>
         <p:nvSpPr>
-          <p:cNvPr id="5" name="Rounded Rectangle 4"/>
+          <p:cNvPr id="5" name="TextBox 4"/>
+          <p:cNvSpPr txBox="1"/>
+          <p:nvPr/>
+        </p:nvSpPr>
+        <p:spPr>
+          <a:xfrm>
+            <a:off x="548640" y="6309360"/>
+            <a:ext cx="11094415" cy="320040"/>
+          </a:xfrm>
+          <a:prstGeom prst="rect">
+            <a:avLst/>
+          </a:prstGeom>
+          <a:noFill/>
+        </p:spPr>
+        <p:txBody>
+          <a:bodyPr wrap="none">
+            <a:spAutoFit/>
+          </a:bodyPr>
+          <a:lstStyle/>
+          <a:p>
+            <a:pPr>
+              <a:defRPr sz="850">
+                <a:solidFill>
+                  <a:srgbClr val="64748B"/>
+                </a:solidFill>
+                <a:latin typeface="Inter"/>
+              </a:defRPr>
+            </a:pPr>
+            <a:r>
+              <a:t>Jithvar Business Group Strategy Deck  |  Confidential  |  Slide 3 of 12</a:t>
+            </a:r>
+          </a:p>
+        </p:txBody>
+      </p:sp>
+      <p:sp>
+        <p:nvSpPr>
+          <p:cNvPr id="6" name="Rectangle 5"/>
           <p:cNvSpPr/>
           <p:nvPr/>
         </p:nvSpPr>
         <p:spPr>
           <a:xfrm>
-            <a:off x="548640" y="1554480"/>
-            <a:ext cx="5394960" cy="3931920"/>
+            <a:off x="548640" y="5623560"/>
+            <a:ext cx="11094415" cy="594360"/>
+          </a:xfrm>
+          <a:prstGeom prst="rect">
+            <a:avLst/>
+          </a:prstGeom>
+          <a:solidFill>
+            <a:srgbClr val="FEE4E6"/>
+          </a:solidFill>
+          <a:ln>
+            <a:noFill/>
+          </a:ln>
+        </p:spPr>
+        <p:style>
+          <a:lnRef idx="1">
+            <a:schemeClr val="accent1"/>
+          </a:lnRef>
+          <a:fillRef idx="3">
+            <a:schemeClr val="accent1"/>
+          </a:fillRef>
+          <a:effectRef idx="2">
+            <a:schemeClr val="accent1"/>
+          </a:effectRef>
+          <a:fontRef idx="minor">
+            <a:schemeClr val="lt1"/>
+          </a:fontRef>
+        </p:style>
+        <p:txBody>
+          <a:bodyPr rtlCol="0" anchor="ctr"/>
+          <a:lstStyle/>
+          <a:p>
+            <a:pPr algn="ctr"/>
+          </a:p>
+        </p:txBody>
+      </p:sp>
+      <p:sp>
+        <p:nvSpPr>
+          <p:cNvPr id="7" name="Rectangle 6"/>
+          <p:cNvSpPr/>
+          <p:nvPr/>
+        </p:nvSpPr>
+        <p:spPr>
+          <a:xfrm>
+            <a:off x="548640" y="5623560"/>
+            <a:ext cx="73152" cy="594360"/>
+          </a:xfrm>
+          <a:prstGeom prst="rect">
+            <a:avLst/>
+          </a:prstGeom>
+          <a:solidFill>
+            <a:srgbClr val="D60000"/>
+          </a:solidFill>
+          <a:ln>
+            <a:noFill/>
+          </a:ln>
+        </p:spPr>
+        <p:style>
+          <a:lnRef idx="1">
+            <a:schemeClr val="accent1"/>
+          </a:lnRef>
+          <a:fillRef idx="3">
+            <a:schemeClr val="accent1"/>
+          </a:fillRef>
+          <a:effectRef idx="2">
+            <a:schemeClr val="accent1"/>
+          </a:effectRef>
+          <a:fontRef idx="minor">
+            <a:schemeClr val="lt1"/>
+          </a:fontRef>
+        </p:style>
+        <p:txBody>
+          <a:bodyPr rtlCol="0" anchor="ctr"/>
+          <a:lstStyle/>
+          <a:p>
+            <a:pPr algn="ctr"/>
+          </a:p>
+        </p:txBody>
+      </p:sp>
+      <p:sp>
+        <p:nvSpPr>
+          <p:cNvPr id="8" name="TextBox 7"/>
+          <p:cNvSpPr txBox="1"/>
+          <p:nvPr/>
+        </p:nvSpPr>
+        <p:spPr>
+          <a:xfrm>
+            <a:off x="731520" y="5669280"/>
+            <a:ext cx="10698480" cy="502920"/>
+          </a:xfrm>
+          <a:prstGeom prst="rect">
+            <a:avLst/>
+          </a:prstGeom>
+          <a:noFill/>
+        </p:spPr>
+        <p:txBody>
+          <a:bodyPr wrap="square">
+            <a:spAutoFit/>
+          </a:bodyPr>
+          <a:lstStyle/>
+          <a:p>
+            <a:pPr>
+              <a:defRPr sz="1100" b="1">
+                <a:solidFill>
+                  <a:srgbClr val="991B1B"/>
+                </a:solidFill>
+                <a:latin typeface="Inter"/>
+              </a:defRPr>
+            </a:pPr>
+            <a:r>
+              <a:t>Strategic Takeaway: Maximizing Group value begins by migrating transactional services (one-off projects/hires) to recurring contract models.</a:t>
+            </a:r>
+          </a:p>
+        </p:txBody>
+      </p:sp>
+      <p:sp>
+        <p:nvSpPr>
+          <p:cNvPr id="9" name="Rounded Rectangle 8"/>
+          <p:cNvSpPr/>
+          <p:nvPr/>
+        </p:nvSpPr>
+        <p:spPr>
+          <a:xfrm>
+            <a:off x="548640" y="1508760"/>
+            <a:ext cx="3514953" cy="3931920"/>
           </a:xfrm>
           <a:prstGeom prst="roundRect">
             <a:avLst/>
@@ -5641,14 +6293,14 @@
       </p:sp>
       <p:sp>
         <p:nvSpPr>
-          <p:cNvPr id="6" name="TextBox 5"/>
+          <p:cNvPr id="10" name="TextBox 9"/>
           <p:cNvSpPr txBox="1"/>
           <p:nvPr/>
         </p:nvSpPr>
         <p:spPr>
           <a:xfrm>
-            <a:off x="731520" y="1645920"/>
-            <a:ext cx="5029200" cy="3749039"/>
+            <a:off x="685800" y="1600200"/>
+            <a:ext cx="3240633" cy="3749039"/>
           </a:xfrm>
           <a:prstGeom prst="rect">
             <a:avLst/>
@@ -5663,9 +6315,25 @@
           <a:p>
             <a:pPr>
               <a:spcAft>
+                <a:spcPts val="400"/>
+              </a:spcAft>
+              <a:defRPr sz="850" b="1">
+                <a:solidFill>
+                  <a:srgbClr val="64748B"/>
+                </a:solidFill>
+                <a:latin typeface="Inter"/>
+              </a:defRPr>
+            </a:pPr>
+            <a:r>
+              <a:t>[JCS (TECHNOLOGY)]</a:t>
+            </a:r>
+          </a:p>
+          <a:p>
+            <a:pPr>
+              <a:spcAft>
                 <a:spcPts val="1000"/>
               </a:spcAft>
-              <a:defRPr sz="1400" b="1">
+              <a:defRPr sz="1300" b="1">
                 <a:solidFill>
                   <a:srgbClr val="0F2537"/>
                 </a:solidFill>
@@ -5673,15 +6341,15 @@
               </a:defRPr>
             </a:pPr>
             <a:r>
-              <a:t>JCS (Technology Consulting)</a:t>
+              <a:t>Core: Software Consulting</a:t>
             </a:r>
           </a:p>
           <a:p>
             <a:pPr>
               <a:spcAft>
-                <a:spcPts val="800"/>
+                <a:spcPts val="600"/>
               </a:spcAft>
-              <a:defRPr sz="1050">
+              <a:defRPr sz="950">
                 <a:solidFill>
                   <a:srgbClr val="1E293B"/>
                 </a:solidFill>
@@ -5689,15 +6357,15 @@
               </a:defRPr>
             </a:pPr>
             <a:r>
-              <a:t>• Current Core: High-touch digital solutions and custom CRM/ERP integrations.</a:t>
+              <a:t>• Bespoke application dev and digital support.</a:t>
             </a:r>
           </a:p>
           <a:p>
             <a:pPr>
               <a:spcAft>
-                <a:spcPts val="800"/>
+                <a:spcPts val="600"/>
               </a:spcAft>
-              <a:defRPr sz="1050">
+              <a:defRPr sz="950">
                 <a:solidFill>
                   <a:srgbClr val="1E293B"/>
                 </a:solidFill>
@@ -5705,21 +6373,21 @@
               </a:defRPr>
             </a:pPr>
             <a:r>
-              <a:t>• Growth Pathway: Expand custom software dev contracts into high-margin, international managed service retainers to secure predictable monthly revenue.</a:t>
-            </a:r>
-          </a:p>
-        </p:txBody>
-      </p:sp>
-      <p:sp>
-        <p:nvSpPr>
-          <p:cNvPr id="7" name="Rounded Rectangle 6"/>
+              <a:t>• Adjacency: Move from custom contracts to international managed service retainers to secure stable monthly software revenue.</a:t>
+            </a:r>
+          </a:p>
+        </p:txBody>
+      </p:sp>
+      <p:sp>
+        <p:nvSpPr>
+          <p:cNvPr id="11" name="Rounded Rectangle 10"/>
           <p:cNvSpPr/>
           <p:nvPr/>
         </p:nvSpPr>
         <p:spPr>
           <a:xfrm>
-            <a:off x="6217920" y="1554480"/>
-            <a:ext cx="5394960" cy="3931920"/>
+            <a:off x="4337913" y="1508760"/>
+            <a:ext cx="3514953" cy="3931920"/>
           </a:xfrm>
           <a:prstGeom prst="roundRect">
             <a:avLst/>
@@ -5757,14 +6425,14 @@
       </p:sp>
       <p:sp>
         <p:nvSpPr>
-          <p:cNvPr id="8" name="TextBox 7"/>
+          <p:cNvPr id="12" name="TextBox 11"/>
           <p:cNvSpPr txBox="1"/>
           <p:nvPr/>
         </p:nvSpPr>
         <p:spPr>
           <a:xfrm>
-            <a:off x="6400800" y="1645920"/>
-            <a:ext cx="5029200" cy="3749039"/>
+            <a:off x="4475073" y="1600200"/>
+            <a:ext cx="3240633" cy="3749039"/>
           </a:xfrm>
           <a:prstGeom prst="rect">
             <a:avLst/>
@@ -5779,9 +6447,25 @@
           <a:p>
             <a:pPr>
               <a:spcAft>
+                <a:spcPts val="400"/>
+              </a:spcAft>
+              <a:defRPr sz="850" b="1">
+                <a:solidFill>
+                  <a:srgbClr val="0284C7"/>
+                </a:solidFill>
+                <a:latin typeface="Inter"/>
+              </a:defRPr>
+            </a:pPr>
+            <a:r>
+              <a:t>[NATURE GRID (ENERGY)]</a:t>
+            </a:r>
+          </a:p>
+          <a:p>
+            <a:pPr>
+              <a:spcAft>
                 <a:spcPts val="1000"/>
               </a:spcAft>
-              <a:defRPr sz="1400" b="1">
+              <a:defRPr sz="1300" b="1">
                 <a:solidFill>
                   <a:srgbClr val="0F2537"/>
                 </a:solidFill>
@@ -5789,15 +6473,15 @@
               </a:defRPr>
             </a:pPr>
             <a:r>
-              <a:t>Nature Grid (Renewable Energy) &amp; Aequalis (HR)</a:t>
+              <a:t>Core: Residential Solar</a:t>
             </a:r>
           </a:p>
           <a:p>
             <a:pPr>
               <a:spcAft>
-                <a:spcPts val="800"/>
+                <a:spcPts val="600"/>
               </a:spcAft>
-              <a:defRPr sz="1050">
+              <a:defRPr sz="950">
                 <a:solidFill>
                   <a:srgbClr val="1E293B"/>
                 </a:solidFill>
@@ -5805,15 +6489,15 @@
               </a:defRPr>
             </a:pPr>
             <a:r>
-              <a:t>• Nature Grid Solar: Shift from residential panels to Commercial &amp; Industrial (C&amp;I) installations and multi-year Operations &amp; Maintenance (O&amp;M) service contracts.</a:t>
+              <a:t>• Residential panel installs and setups.</a:t>
             </a:r>
           </a:p>
           <a:p>
             <a:pPr>
               <a:spcAft>
-                <a:spcPts val="800"/>
+                <a:spcPts val="600"/>
               </a:spcAft>
-              <a:defRPr sz="1050">
+              <a:defRPr sz="950">
                 <a:solidFill>
                   <a:srgbClr val="1E293B"/>
                 </a:solidFill>
@@ -5821,30 +6505,32 @@
               </a:defRPr>
             </a:pPr>
             <a:r>
-              <a:t>• Aequalis Staffing: Pivot from manual, transactional recruitment placements into high-margin, recurring contract staffing retainers.</a:t>
-            </a:r>
-          </a:p>
-        </p:txBody>
-      </p:sp>
-      <p:sp>
-        <p:nvSpPr>
-          <p:cNvPr id="9" name="Rectangle 8"/>
+              <a:t>• Adjacency: Shift focus to Commercial &amp; Industrial (C&amp;I) installations and multi-year Operations &amp; Maintenance (O&amp;M) service contracts.</a:t>
+            </a:r>
+          </a:p>
+        </p:txBody>
+      </p:sp>
+      <p:sp>
+        <p:nvSpPr>
+          <p:cNvPr id="13" name="Rounded Rectangle 12"/>
           <p:cNvSpPr/>
           <p:nvPr/>
         </p:nvSpPr>
         <p:spPr>
           <a:xfrm>
-            <a:off x="548640" y="5623560"/>
-            <a:ext cx="11094415" cy="594360"/>
-          </a:xfrm>
-          <a:prstGeom prst="rect">
+            <a:off x="8127186" y="1508760"/>
+            <a:ext cx="3514953" cy="3931920"/>
+          </a:xfrm>
+          <a:prstGeom prst="roundRect">
             <a:avLst/>
           </a:prstGeom>
           <a:solidFill>
-            <a:srgbClr val="FEE4E6"/>
+            <a:srgbClr val="F8FAFC"/>
           </a:solidFill>
           <a:ln>
-            <a:noFill/>
+            <a:solidFill>
+              <a:srgbClr val="CBD5E1"/>
+            </a:solidFill>
           </a:ln>
         </p:spPr>
         <p:style>
@@ -5871,57 +6557,14 @@
       </p:sp>
       <p:sp>
         <p:nvSpPr>
-          <p:cNvPr id="10" name="Rectangle 9"/>
-          <p:cNvSpPr/>
-          <p:nvPr/>
-        </p:nvSpPr>
-        <p:spPr>
-          <a:xfrm>
-            <a:off x="548640" y="5623560"/>
-            <a:ext cx="73152" cy="594360"/>
-          </a:xfrm>
-          <a:prstGeom prst="rect">
-            <a:avLst/>
-          </a:prstGeom>
-          <a:solidFill>
-            <a:srgbClr val="D60000"/>
-          </a:solidFill>
-          <a:ln>
-            <a:noFill/>
-          </a:ln>
-        </p:spPr>
-        <p:style>
-          <a:lnRef idx="1">
-            <a:schemeClr val="accent1"/>
-          </a:lnRef>
-          <a:fillRef idx="3">
-            <a:schemeClr val="accent1"/>
-          </a:fillRef>
-          <a:effectRef idx="2">
-            <a:schemeClr val="accent1"/>
-          </a:effectRef>
-          <a:fontRef idx="minor">
-            <a:schemeClr val="lt1"/>
-          </a:fontRef>
-        </p:style>
-        <p:txBody>
-          <a:bodyPr rtlCol="0" anchor="ctr"/>
-          <a:lstStyle/>
-          <a:p>
-            <a:pPr algn="ctr"/>
-          </a:p>
-        </p:txBody>
-      </p:sp>
-      <p:sp>
-        <p:nvSpPr>
-          <p:cNvPr id="11" name="TextBox 10"/>
+          <p:cNvPr id="14" name="TextBox 13"/>
           <p:cNvSpPr txBox="1"/>
           <p:nvPr/>
         </p:nvSpPr>
         <p:spPr>
           <a:xfrm>
-            <a:off x="731520" y="5669280"/>
-            <a:ext cx="10698480" cy="502920"/>
+            <a:off x="8264346" y="1600200"/>
+            <a:ext cx="3240633" cy="3749039"/>
           </a:xfrm>
           <a:prstGeom prst="rect">
             <a:avLst/>
@@ -5935,51 +6578,66 @@
           <a:lstStyle/>
           <a:p>
             <a:pPr>
-              <a:defRPr sz="1100" b="1">
-                <a:solidFill>
-                  <a:srgbClr val="991B1B"/>
+              <a:spcAft>
+                <a:spcPts val="400"/>
+              </a:spcAft>
+              <a:defRPr sz="850" b="1">
+                <a:solidFill>
+                  <a:srgbClr val="0284C7"/>
                 </a:solidFill>
                 <a:latin typeface="Inter"/>
               </a:defRPr>
             </a:pPr>
             <a:r>
-              <a:t>Strategic Takeaway: Maximizing Group value begins by migrating transactional services (one-off projects/hires) to recurring contract models.</a:t>
-            </a:r>
-          </a:p>
-        </p:txBody>
-      </p:sp>
-      <p:sp>
-        <p:nvSpPr>
-          <p:cNvPr id="12" name="TextBox 11"/>
-          <p:cNvSpPr txBox="1"/>
-          <p:nvPr/>
-        </p:nvSpPr>
-        <p:spPr>
-          <a:xfrm>
-            <a:off x="548640" y="6309360"/>
-            <a:ext cx="11094415" cy="320040"/>
-          </a:xfrm>
-          <a:prstGeom prst="rect">
-            <a:avLst/>
-          </a:prstGeom>
-          <a:noFill/>
-        </p:spPr>
-        <p:txBody>
-          <a:bodyPr wrap="none">
-            <a:spAutoFit/>
-          </a:bodyPr>
-          <a:lstStyle/>
-          <a:p>
-            <a:pPr>
-              <a:defRPr sz="850">
-                <a:solidFill>
-                  <a:srgbClr val="64748B"/>
+              <a:t>[AEQUALIS GLOBAL (HR)]</a:t>
+            </a:r>
+          </a:p>
+          <a:p>
+            <a:pPr>
+              <a:spcAft>
+                <a:spcPts val="1000"/>
+              </a:spcAft>
+              <a:defRPr sz="1300" b="1">
+                <a:solidFill>
+                  <a:srgbClr val="0F2537"/>
+                </a:solidFill>
+                <a:latin typeface="Outfit"/>
+              </a:defRPr>
+            </a:pPr>
+            <a:r>
+              <a:t>Core: Executive Search</a:t>
+            </a:r>
+          </a:p>
+          <a:p>
+            <a:pPr>
+              <a:spcAft>
+                <a:spcPts val="600"/>
+              </a:spcAft>
+              <a:defRPr sz="950">
+                <a:solidFill>
+                  <a:srgbClr val="1E293B"/>
                 </a:solidFill>
                 <a:latin typeface="Inter"/>
               </a:defRPr>
             </a:pPr>
             <a:r>
-              <a:t>Jithvar Business Group Strategy Deck  |  Confidential  |  Slide 3 of 12</a:t>
+              <a:t>• Transactional recruiter matching and bulk hiring.</a:t>
+            </a:r>
+          </a:p>
+          <a:p>
+            <a:pPr>
+              <a:spcAft>
+                <a:spcPts val="600"/>
+              </a:spcAft>
+              <a:defRPr sz="950">
+                <a:solidFill>
+                  <a:srgbClr val="1E293B"/>
+                </a:solidFill>
+                <a:latin typeface="Inter"/>
+              </a:defRPr>
+            </a:pPr>
+            <a:r>
+              <a:t>• Adjacency: Pivot manual search fees into predictable, high-margin contract staffing retainers.</a:t>
             </a:r>
           </a:p>
         </p:txBody>
@@ -6082,7 +6740,7 @@
         </p:nvSpPr>
         <p:spPr>
           <a:xfrm>
-            <a:off x="548640" y="1371600"/>
+            <a:off x="548640" y="1325880"/>
             <a:ext cx="11094415" cy="36576"/>
           </a:xfrm>
           <a:prstGeom prst="rect">
@@ -6119,14 +6777,1082 @@
       </p:sp>
       <p:sp>
         <p:nvSpPr>
-          <p:cNvPr id="5" name="Rounded Rectangle 4"/>
+          <p:cNvPr id="5" name="TextBox 4"/>
+          <p:cNvSpPr txBox="1"/>
+          <p:nvPr/>
+        </p:nvSpPr>
+        <p:spPr>
+          <a:xfrm>
+            <a:off x="548640" y="6309360"/>
+            <a:ext cx="11094415" cy="320040"/>
+          </a:xfrm>
+          <a:prstGeom prst="rect">
+            <a:avLst/>
+          </a:prstGeom>
+          <a:noFill/>
+        </p:spPr>
+        <p:txBody>
+          <a:bodyPr wrap="none">
+            <a:spAutoFit/>
+          </a:bodyPr>
+          <a:lstStyle/>
+          <a:p>
+            <a:pPr>
+              <a:defRPr sz="850">
+                <a:solidFill>
+                  <a:srgbClr val="64748B"/>
+                </a:solidFill>
+                <a:latin typeface="Inter"/>
+              </a:defRPr>
+            </a:pPr>
+            <a:r>
+              <a:t>Jithvar Business Group Strategy Deck  |  Confidential  |  Slide 4 of 12</a:t>
+            </a:r>
+          </a:p>
+        </p:txBody>
+      </p:sp>
+      <p:sp>
+        <p:nvSpPr>
+          <p:cNvPr id="6" name="Rectangle 5"/>
           <p:cNvSpPr/>
           <p:nvPr/>
         </p:nvSpPr>
         <p:spPr>
           <a:xfrm>
-            <a:off x="548640" y="1554480"/>
-            <a:ext cx="5394960" cy="3931920"/>
+            <a:off x="548640" y="5623560"/>
+            <a:ext cx="11094415" cy="594360"/>
+          </a:xfrm>
+          <a:prstGeom prst="rect">
+            <a:avLst/>
+          </a:prstGeom>
+          <a:solidFill>
+            <a:srgbClr val="FEE4E6"/>
+          </a:solidFill>
+          <a:ln>
+            <a:noFill/>
+          </a:ln>
+        </p:spPr>
+        <p:style>
+          <a:lnRef idx="1">
+            <a:schemeClr val="accent1"/>
+          </a:lnRef>
+          <a:fillRef idx="3">
+            <a:schemeClr val="accent1"/>
+          </a:fillRef>
+          <a:effectRef idx="2">
+            <a:schemeClr val="accent1"/>
+          </a:effectRef>
+          <a:fontRef idx="minor">
+            <a:schemeClr val="lt1"/>
+          </a:fontRef>
+        </p:style>
+        <p:txBody>
+          <a:bodyPr rtlCol="0" anchor="ctr"/>
+          <a:lstStyle/>
+          <a:p>
+            <a:pPr algn="ctr"/>
+          </a:p>
+        </p:txBody>
+      </p:sp>
+      <p:sp>
+        <p:nvSpPr>
+          <p:cNvPr id="7" name="Rectangle 6"/>
+          <p:cNvSpPr/>
+          <p:nvPr/>
+        </p:nvSpPr>
+        <p:spPr>
+          <a:xfrm>
+            <a:off x="548640" y="5623560"/>
+            <a:ext cx="73152" cy="594360"/>
+          </a:xfrm>
+          <a:prstGeom prst="rect">
+            <a:avLst/>
+          </a:prstGeom>
+          <a:solidFill>
+            <a:srgbClr val="D60000"/>
+          </a:solidFill>
+          <a:ln>
+            <a:noFill/>
+          </a:ln>
+        </p:spPr>
+        <p:style>
+          <a:lnRef idx="1">
+            <a:schemeClr val="accent1"/>
+          </a:lnRef>
+          <a:fillRef idx="3">
+            <a:schemeClr val="accent1"/>
+          </a:fillRef>
+          <a:effectRef idx="2">
+            <a:schemeClr val="accent1"/>
+          </a:effectRef>
+          <a:fontRef idx="minor">
+            <a:schemeClr val="lt1"/>
+          </a:fontRef>
+        </p:style>
+        <p:txBody>
+          <a:bodyPr rtlCol="0" anchor="ctr"/>
+          <a:lstStyle/>
+          <a:p>
+            <a:pPr algn="ctr"/>
+          </a:p>
+        </p:txBody>
+      </p:sp>
+      <p:sp>
+        <p:nvSpPr>
+          <p:cNvPr id="8" name="TextBox 7"/>
+          <p:cNvSpPr txBox="1"/>
+          <p:nvPr/>
+        </p:nvSpPr>
+        <p:spPr>
+          <a:xfrm>
+            <a:off x="731520" y="5669280"/>
+            <a:ext cx="10698480" cy="502920"/>
+          </a:xfrm>
+          <a:prstGeom prst="rect">
+            <a:avLst/>
+          </a:prstGeom>
+          <a:noFill/>
+        </p:spPr>
+        <p:txBody>
+          <a:bodyPr wrap="square">
+            <a:spAutoFit/>
+          </a:bodyPr>
+          <a:lstStyle/>
+          <a:p>
+            <a:pPr>
+              <a:defRPr sz="1100" b="1">
+                <a:solidFill>
+                  <a:srgbClr val="991B1B"/>
+                </a:solidFill>
+                <a:latin typeface="Inter"/>
+              </a:defRPr>
+            </a:pPr>
+            <a:r>
+              <a:t>Strategic Takeaway: Establishing a quantitative scorecard filters subjective opinions out of the investment process and protects capital.</a:t>
+            </a:r>
+          </a:p>
+        </p:txBody>
+      </p:sp>
+      <p:graphicFrame>
+        <p:nvGraphicFramePr>
+          <p:cNvPr id="9" name="Table 8"/>
+          <p:cNvGraphicFramePr>
+            <a:graphicFrameLocks noGrp="1"/>
+          </p:cNvGraphicFramePr>
+          <p:nvPr/>
+        </p:nvGraphicFramePr>
+        <p:xfrm>
+          <a:off x="548640" y="1508760"/>
+          <a:ext cx="6858000" cy="3931920"/>
+        </p:xfrm>
+        <a:graphic>
+          <a:graphicData uri="http://schemas.openxmlformats.org/drawingml/2006/table">
+            <a:tbl>
+              <a:tblPr firstRow="1" bandRow="1">
+                <a:tableStyleId>{5C22544A-7EE6-4342-B048-85BDC9FD1C3A}</a:tableStyleId>
+              </a:tblPr>
+              <a:tblGrid>
+                <a:gridCol w="1645920"/>
+                <a:gridCol w="1554480"/>
+                <a:gridCol w="640080"/>
+                <a:gridCol w="3017520"/>
+              </a:tblGrid>
+              <a:tr h="436880">
+                <a:tc>
+                  <a:txBody>
+                    <a:bodyPr/>
+                    <a:lstStyle/>
+                    <a:p>
+                      <a:pPr>
+                        <a:defRPr sz="850" b="1">
+                          <a:solidFill>
+                            <a:srgbClr val="FFFFFF"/>
+                          </a:solidFill>
+                          <a:latin typeface="Outfit"/>
+                        </a:defRPr>
+                      </a:pPr>
+                      <a:r>
+                        <a:t>Dimension</a:t>
+                      </a:r>
+                    </a:p>
+                  </a:txBody>
+                  <a:tcPr>
+                    <a:solidFill>
+                      <a:srgbClr val="0F2537"/>
+                    </a:solidFill>
+                  </a:tcPr>
+                </a:tc>
+                <a:tc>
+                  <a:txBody>
+                    <a:bodyPr/>
+                    <a:lstStyle/>
+                    <a:p>
+                      <a:pPr>
+                        <a:defRPr sz="850" b="1">
+                          <a:solidFill>
+                            <a:srgbClr val="FFFFFF"/>
+                          </a:solidFill>
+                          <a:latin typeface="Outfit"/>
+                        </a:defRPr>
+                      </a:pPr>
+                      <a:r>
+                        <a:t>Evaluation Factor</a:t>
+                      </a:r>
+                    </a:p>
+                  </a:txBody>
+                  <a:tcPr>
+                    <a:solidFill>
+                      <a:srgbClr val="0F2537"/>
+                    </a:solidFill>
+                  </a:tcPr>
+                </a:tc>
+                <a:tc>
+                  <a:txBody>
+                    <a:bodyPr/>
+                    <a:lstStyle/>
+                    <a:p>
+                      <a:pPr>
+                        <a:defRPr sz="850" b="1">
+                          <a:solidFill>
+                            <a:srgbClr val="FFFFFF"/>
+                          </a:solidFill>
+                          <a:latin typeface="Outfit"/>
+                        </a:defRPr>
+                      </a:pPr>
+                      <a:r>
+                        <a:t>Weight</a:t>
+                      </a:r>
+                    </a:p>
+                  </a:txBody>
+                  <a:tcPr>
+                    <a:solidFill>
+                      <a:srgbClr val="0F2537"/>
+                    </a:solidFill>
+                  </a:tcPr>
+                </a:tc>
+                <a:tc>
+                  <a:txBody>
+                    <a:bodyPr/>
+                    <a:lstStyle/>
+                    <a:p>
+                      <a:pPr>
+                        <a:defRPr sz="850" b="1">
+                          <a:solidFill>
+                            <a:srgbClr val="FFFFFF"/>
+                          </a:solidFill>
+                          <a:latin typeface="Outfit"/>
+                        </a:defRPr>
+                      </a:pPr>
+                      <a:r>
+                        <a:t>High Score Criteria (10/10)</a:t>
+                      </a:r>
+                    </a:p>
+                  </a:txBody>
+                  <a:tcPr>
+                    <a:solidFill>
+                      <a:srgbClr val="0F2537"/>
+                    </a:solidFill>
+                  </a:tcPr>
+                </a:tc>
+              </a:tr>
+              <a:tr h="436880">
+                <a:tc>
+                  <a:txBody>
+                    <a:bodyPr/>
+                    <a:lstStyle/>
+                    <a:p>
+                      <a:pPr>
+                        <a:defRPr sz="819" b="1">
+                          <a:solidFill>
+                            <a:srgbClr val="1E293B"/>
+                          </a:solidFill>
+                          <a:latin typeface="Inter"/>
+                        </a:defRPr>
+                      </a:pPr>
+                      <a:r>
+                        <a:t>Market Potential (40%)</a:t>
+                      </a:r>
+                    </a:p>
+                  </a:txBody>
+                  <a:tcPr>
+                    <a:solidFill>
+                      <a:srgbClr val="F8FAFC"/>
+                    </a:solidFill>
+                  </a:tcPr>
+                </a:tc>
+                <a:tc>
+                  <a:txBody>
+                    <a:bodyPr/>
+                    <a:lstStyle/>
+                    <a:p>
+                      <a:pPr>
+                        <a:defRPr sz="819" b="1">
+                          <a:solidFill>
+                            <a:srgbClr val="1E293B"/>
+                          </a:solidFill>
+                          <a:latin typeface="Inter"/>
+                        </a:defRPr>
+                      </a:pPr>
+                      <a:r>
+                        <a:t>Market Attractiveness</a:t>
+                      </a:r>
+                    </a:p>
+                  </a:txBody>
+                  <a:tcPr>
+                    <a:solidFill>
+                      <a:srgbClr val="F8FAFC"/>
+                    </a:solidFill>
+                  </a:tcPr>
+                </a:tc>
+                <a:tc>
+                  <a:txBody>
+                    <a:bodyPr/>
+                    <a:lstStyle/>
+                    <a:p>
+                      <a:pPr>
+                        <a:defRPr sz="819">
+                          <a:solidFill>
+                            <a:srgbClr val="1E293B"/>
+                          </a:solidFill>
+                          <a:latin typeface="Inter"/>
+                        </a:defRPr>
+                      </a:pPr>
+                      <a:r>
+                        <a:t>20%</a:t>
+                      </a:r>
+                    </a:p>
+                  </a:txBody>
+                  <a:tcPr>
+                    <a:solidFill>
+                      <a:srgbClr val="F8FAFC"/>
+                    </a:solidFill>
+                  </a:tcPr>
+                </a:tc>
+                <a:tc>
+                  <a:txBody>
+                    <a:bodyPr/>
+                    <a:lstStyle/>
+                    <a:p>
+                      <a:pPr>
+                        <a:defRPr sz="819">
+                          <a:solidFill>
+                            <a:srgbClr val="1E293B"/>
+                          </a:solidFill>
+                          <a:latin typeface="Inter"/>
+                        </a:defRPr>
+                      </a:pPr>
+                      <a:r>
+                        <a:t>Large TAM ($500M+), double-digit CAGR.</a:t>
+                      </a:r>
+                    </a:p>
+                  </a:txBody>
+                  <a:tcPr>
+                    <a:solidFill>
+                      <a:srgbClr val="F8FAFC"/>
+                    </a:solidFill>
+                  </a:tcPr>
+                </a:tc>
+              </a:tr>
+              <a:tr h="436880">
+                <a:tc>
+                  <a:txBody>
+                    <a:bodyPr/>
+                    <a:lstStyle/>
+                    <a:p>
+                      <a:pPr>
+                        <a:defRPr sz="819" b="1">
+                          <a:solidFill>
+                            <a:srgbClr val="1E293B"/>
+                          </a:solidFill>
+                          <a:latin typeface="Inter"/>
+                        </a:defRPr>
+                      </a:pPr>
+                      <a:r>
+                        <a:t>Market Potential (40%)</a:t>
+                      </a:r>
+                    </a:p>
+                  </a:txBody>
+                  <a:tcPr>
+                    <a:solidFill>
+                      <a:srgbClr val="FFFFFF"/>
+                    </a:solidFill>
+                  </a:tcPr>
+                </a:tc>
+                <a:tc>
+                  <a:txBody>
+                    <a:bodyPr/>
+                    <a:lstStyle/>
+                    <a:p>
+                      <a:pPr>
+                        <a:defRPr sz="819" b="1">
+                          <a:solidFill>
+                            <a:srgbClr val="1E293B"/>
+                          </a:solidFill>
+                          <a:latin typeface="Inter"/>
+                        </a:defRPr>
+                      </a:pPr>
+                      <a:r>
+                        <a:t>Revenue Potential</a:t>
+                      </a:r>
+                    </a:p>
+                  </a:txBody>
+                  <a:tcPr>
+                    <a:solidFill>
+                      <a:srgbClr val="FFFFFF"/>
+                    </a:solidFill>
+                  </a:tcPr>
+                </a:tc>
+                <a:tc>
+                  <a:txBody>
+                    <a:bodyPr/>
+                    <a:lstStyle/>
+                    <a:p>
+                      <a:pPr>
+                        <a:defRPr sz="819">
+                          <a:solidFill>
+                            <a:srgbClr val="1E293B"/>
+                          </a:solidFill>
+                          <a:latin typeface="Inter"/>
+                        </a:defRPr>
+                      </a:pPr>
+                      <a:r>
+                        <a:t>20%</a:t>
+                      </a:r>
+                    </a:p>
+                  </a:txBody>
+                  <a:tcPr>
+                    <a:solidFill>
+                      <a:srgbClr val="FFFFFF"/>
+                    </a:solidFill>
+                  </a:tcPr>
+                </a:tc>
+                <a:tc>
+                  <a:txBody>
+                    <a:bodyPr/>
+                    <a:lstStyle/>
+                    <a:p>
+                      <a:pPr>
+                        <a:defRPr sz="819">
+                          <a:solidFill>
+                            <a:srgbClr val="1E293B"/>
+                          </a:solidFill>
+                          <a:latin typeface="Inter"/>
+                        </a:defRPr>
+                      </a:pPr>
+                      <a:r>
+                        <a:t>Recurring SaaS subscriptions or multi-year contracts.</a:t>
+                      </a:r>
+                    </a:p>
+                  </a:txBody>
+                  <a:tcPr>
+                    <a:solidFill>
+                      <a:srgbClr val="FFFFFF"/>
+                    </a:solidFill>
+                  </a:tcPr>
+                </a:tc>
+              </a:tr>
+              <a:tr h="436880">
+                <a:tc>
+                  <a:txBody>
+                    <a:bodyPr/>
+                    <a:lstStyle/>
+                    <a:p>
+                      <a:pPr>
+                        <a:defRPr sz="819" b="1">
+                          <a:solidFill>
+                            <a:srgbClr val="1E293B"/>
+                          </a:solidFill>
+                          <a:latin typeface="Inter"/>
+                        </a:defRPr>
+                      </a:pPr>
+                      <a:r>
+                        <a:t>Strategic Fit (30%)</a:t>
+                      </a:r>
+                    </a:p>
+                  </a:txBody>
+                  <a:tcPr>
+                    <a:solidFill>
+                      <a:srgbClr val="F8FAFC"/>
+                    </a:solidFill>
+                  </a:tcPr>
+                </a:tc>
+                <a:tc>
+                  <a:txBody>
+                    <a:bodyPr/>
+                    <a:lstStyle/>
+                    <a:p>
+                      <a:pPr>
+                        <a:defRPr sz="819" b="1">
+                          <a:solidFill>
+                            <a:srgbClr val="1E293B"/>
+                          </a:solidFill>
+                          <a:latin typeface="Inter"/>
+                        </a:defRPr>
+                      </a:pPr>
+                      <a:r>
+                        <a:t>JBG Capability Fit</a:t>
+                      </a:r>
+                    </a:p>
+                  </a:txBody>
+                  <a:tcPr>
+                    <a:solidFill>
+                      <a:srgbClr val="F8FAFC"/>
+                    </a:solidFill>
+                  </a:tcPr>
+                </a:tc>
+                <a:tc>
+                  <a:txBody>
+                    <a:bodyPr/>
+                    <a:lstStyle/>
+                    <a:p>
+                      <a:pPr>
+                        <a:defRPr sz="819">
+                          <a:solidFill>
+                            <a:srgbClr val="1E293B"/>
+                          </a:solidFill>
+                          <a:latin typeface="Inter"/>
+                        </a:defRPr>
+                      </a:pPr>
+                      <a:r>
+                        <a:t>15%</a:t>
+                      </a:r>
+                    </a:p>
+                  </a:txBody>
+                  <a:tcPr>
+                    <a:solidFill>
+                      <a:srgbClr val="F8FAFC"/>
+                    </a:solidFill>
+                  </a:tcPr>
+                </a:tc>
+                <a:tc>
+                  <a:txBody>
+                    <a:bodyPr/>
+                    <a:lstStyle/>
+                    <a:p>
+                      <a:pPr>
+                        <a:defRPr sz="819">
+                          <a:solidFill>
+                            <a:srgbClr val="1E293B"/>
+                          </a:solidFill>
+                          <a:latin typeface="Inter"/>
+                        </a:defRPr>
+                      </a:pPr>
+                      <a:r>
+                        <a:t>Leverages JCS developers and current client bases.</a:t>
+                      </a:r>
+                    </a:p>
+                  </a:txBody>
+                  <a:tcPr>
+                    <a:solidFill>
+                      <a:srgbClr val="F8FAFC"/>
+                    </a:solidFill>
+                  </a:tcPr>
+                </a:tc>
+              </a:tr>
+              <a:tr h="436880">
+                <a:tc>
+                  <a:txBody>
+                    <a:bodyPr/>
+                    <a:lstStyle/>
+                    <a:p>
+                      <a:pPr>
+                        <a:defRPr sz="819" b="1">
+                          <a:solidFill>
+                            <a:srgbClr val="1E293B"/>
+                          </a:solidFill>
+                          <a:latin typeface="Inter"/>
+                        </a:defRPr>
+                      </a:pPr>
+                      <a:r>
+                        <a:t>Strategic Fit (30%)</a:t>
+                      </a:r>
+                    </a:p>
+                  </a:txBody>
+                  <a:tcPr>
+                    <a:solidFill>
+                      <a:srgbClr val="FFFFFF"/>
+                    </a:solidFill>
+                  </a:tcPr>
+                </a:tc>
+                <a:tc>
+                  <a:txBody>
+                    <a:bodyPr/>
+                    <a:lstStyle/>
+                    <a:p>
+                      <a:pPr>
+                        <a:defRPr sz="819" b="1">
+                          <a:solidFill>
+                            <a:srgbClr val="1E293B"/>
+                          </a:solidFill>
+                          <a:latin typeface="Inter"/>
+                        </a:defRPr>
+                      </a:pPr>
+                      <a:r>
+                        <a:t>Brand Synergy</a:t>
+                      </a:r>
+                    </a:p>
+                  </a:txBody>
+                  <a:tcPr>
+                    <a:solidFill>
+                      <a:srgbClr val="FFFFFF"/>
+                    </a:solidFill>
+                  </a:tcPr>
+                </a:tc>
+                <a:tc>
+                  <a:txBody>
+                    <a:bodyPr/>
+                    <a:lstStyle/>
+                    <a:p>
+                      <a:pPr>
+                        <a:defRPr sz="819">
+                          <a:solidFill>
+                            <a:srgbClr val="1E293B"/>
+                          </a:solidFill>
+                          <a:latin typeface="Inter"/>
+                        </a:defRPr>
+                      </a:pPr>
+                      <a:r>
+                        <a:t>15%</a:t>
+                      </a:r>
+                    </a:p>
+                  </a:txBody>
+                  <a:tcPr>
+                    <a:solidFill>
+                      <a:srgbClr val="FFFFFF"/>
+                    </a:solidFill>
+                  </a:tcPr>
+                </a:tc>
+                <a:tc>
+                  <a:txBody>
+                    <a:bodyPr/>
+                    <a:lstStyle/>
+                    <a:p>
+                      <a:pPr>
+                        <a:defRPr sz="819">
+                          <a:solidFill>
+                            <a:srgbClr val="1E293B"/>
+                          </a:solidFill>
+                          <a:latin typeface="Inter"/>
+                        </a:defRPr>
+                      </a:pPr>
+                      <a:r>
+                        <a:t>Fits JBG's technology and sustainability focus.</a:t>
+                      </a:r>
+                    </a:p>
+                  </a:txBody>
+                  <a:tcPr>
+                    <a:solidFill>
+                      <a:srgbClr val="FFFFFF"/>
+                    </a:solidFill>
+                  </a:tcPr>
+                </a:tc>
+              </a:tr>
+              <a:tr h="436880">
+                <a:tc>
+                  <a:txBody>
+                    <a:bodyPr/>
+                    <a:lstStyle/>
+                    <a:p>
+                      <a:pPr>
+                        <a:defRPr sz="819" b="1">
+                          <a:solidFill>
+                            <a:srgbClr val="1E293B"/>
+                          </a:solidFill>
+                          <a:latin typeface="Inter"/>
+                        </a:defRPr>
+                      </a:pPr>
+                      <a:r>
+                        <a:t>Feasibility (20%)</a:t>
+                      </a:r>
+                    </a:p>
+                  </a:txBody>
+                  <a:tcPr>
+                    <a:solidFill>
+                      <a:srgbClr val="F8FAFC"/>
+                    </a:solidFill>
+                  </a:tcPr>
+                </a:tc>
+                <a:tc>
+                  <a:txBody>
+                    <a:bodyPr/>
+                    <a:lstStyle/>
+                    <a:p>
+                      <a:pPr>
+                        <a:defRPr sz="819" b="1">
+                          <a:solidFill>
+                            <a:srgbClr val="1E293B"/>
+                          </a:solidFill>
+                          <a:latin typeface="Inter"/>
+                        </a:defRPr>
+                      </a:pPr>
+                      <a:r>
+                        <a:t>Competitive Intensity</a:t>
+                      </a:r>
+                    </a:p>
+                  </a:txBody>
+                  <a:tcPr>
+                    <a:solidFill>
+                      <a:srgbClr val="F8FAFC"/>
+                    </a:solidFill>
+                  </a:tcPr>
+                </a:tc>
+                <a:tc>
+                  <a:txBody>
+                    <a:bodyPr/>
+                    <a:lstStyle/>
+                    <a:p>
+                      <a:pPr>
+                        <a:defRPr sz="819">
+                          <a:solidFill>
+                            <a:srgbClr val="1E293B"/>
+                          </a:solidFill>
+                          <a:latin typeface="Inter"/>
+                        </a:defRPr>
+                      </a:pPr>
+                      <a:r>
+                        <a:t>10%</a:t>
+                      </a:r>
+                    </a:p>
+                  </a:txBody>
+                  <a:tcPr>
+                    <a:solidFill>
+                      <a:srgbClr val="F8FAFC"/>
+                    </a:solidFill>
+                  </a:tcPr>
+                </a:tc>
+                <a:tc>
+                  <a:txBody>
+                    <a:bodyPr/>
+                    <a:lstStyle/>
+                    <a:p>
+                      <a:pPr>
+                        <a:defRPr sz="819">
+                          <a:solidFill>
+                            <a:srgbClr val="1E293B"/>
+                          </a:solidFill>
+                          <a:latin typeface="Inter"/>
+                        </a:defRPr>
+                      </a:pPr>
+                      <a:r>
+                        <a:t>Fragmented market with low technology penetration.</a:t>
+                      </a:r>
+                    </a:p>
+                  </a:txBody>
+                  <a:tcPr>
+                    <a:solidFill>
+                      <a:srgbClr val="F8FAFC"/>
+                    </a:solidFill>
+                  </a:tcPr>
+                </a:tc>
+              </a:tr>
+              <a:tr h="436880">
+                <a:tc>
+                  <a:txBody>
+                    <a:bodyPr/>
+                    <a:lstStyle/>
+                    <a:p>
+                      <a:pPr>
+                        <a:defRPr sz="819" b="1">
+                          <a:solidFill>
+                            <a:srgbClr val="1E293B"/>
+                          </a:solidFill>
+                          <a:latin typeface="Inter"/>
+                        </a:defRPr>
+                      </a:pPr>
+                      <a:r>
+                        <a:t>Feasibility (20%)</a:t>
+                      </a:r>
+                    </a:p>
+                  </a:txBody>
+                  <a:tcPr>
+                    <a:solidFill>
+                      <a:srgbClr val="FFFFFF"/>
+                    </a:solidFill>
+                  </a:tcPr>
+                </a:tc>
+                <a:tc>
+                  <a:txBody>
+                    <a:bodyPr/>
+                    <a:lstStyle/>
+                    <a:p>
+                      <a:pPr>
+                        <a:defRPr sz="819" b="1">
+                          <a:solidFill>
+                            <a:srgbClr val="1E293B"/>
+                          </a:solidFill>
+                          <a:latin typeface="Inter"/>
+                        </a:defRPr>
+                      </a:pPr>
+                      <a:r>
+                        <a:t>Ease of Execution</a:t>
+                      </a:r>
+                    </a:p>
+                  </a:txBody>
+                  <a:tcPr>
+                    <a:solidFill>
+                      <a:srgbClr val="FFFFFF"/>
+                    </a:solidFill>
+                  </a:tcPr>
+                </a:tc>
+                <a:tc>
+                  <a:txBody>
+                    <a:bodyPr/>
+                    <a:lstStyle/>
+                    <a:p>
+                      <a:pPr>
+                        <a:defRPr sz="819">
+                          <a:solidFill>
+                            <a:srgbClr val="1E293B"/>
+                          </a:solidFill>
+                          <a:latin typeface="Inter"/>
+                        </a:defRPr>
+                      </a:pPr>
+                      <a:r>
+                        <a:t>10%</a:t>
+                      </a:r>
+                    </a:p>
+                  </a:txBody>
+                  <a:tcPr>
+                    <a:solidFill>
+                      <a:srgbClr val="FFFFFF"/>
+                    </a:solidFill>
+                  </a:tcPr>
+                </a:tc>
+                <a:tc>
+                  <a:txBody>
+                    <a:bodyPr/>
+                    <a:lstStyle/>
+                    <a:p>
+                      <a:pPr>
+                        <a:defRPr sz="819">
+                          <a:solidFill>
+                            <a:srgbClr val="1E293B"/>
+                          </a:solidFill>
+                          <a:latin typeface="Inter"/>
+                        </a:defRPr>
+                      </a:pPr>
+                      <a:r>
+                        <a:t>Low regulatory hurdles, time-to-market &lt; 6 mos.</a:t>
+                      </a:r>
+                    </a:p>
+                  </a:txBody>
+                  <a:tcPr>
+                    <a:solidFill>
+                      <a:srgbClr val="FFFFFF"/>
+                    </a:solidFill>
+                  </a:tcPr>
+                </a:tc>
+              </a:tr>
+              <a:tr h="436880">
+                <a:tc>
+                  <a:txBody>
+                    <a:bodyPr/>
+                    <a:lstStyle/>
+                    <a:p>
+                      <a:pPr>
+                        <a:defRPr sz="819" b="1">
+                          <a:solidFill>
+                            <a:srgbClr val="1E293B"/>
+                          </a:solidFill>
+                          <a:latin typeface="Inter"/>
+                        </a:defRPr>
+                      </a:pPr>
+                      <a:r>
+                        <a:t>Capital &amp; Risk (10%)</a:t>
+                      </a:r>
+                    </a:p>
+                  </a:txBody>
+                  <a:tcPr>
+                    <a:solidFill>
+                      <a:srgbClr val="F8FAFC"/>
+                    </a:solidFill>
+                  </a:tcPr>
+                </a:tc>
+                <a:tc>
+                  <a:txBody>
+                    <a:bodyPr/>
+                    <a:lstStyle/>
+                    <a:p>
+                      <a:pPr>
+                        <a:defRPr sz="819" b="1">
+                          <a:solidFill>
+                            <a:srgbClr val="1E293B"/>
+                          </a:solidFill>
+                          <a:latin typeface="Inter"/>
+                        </a:defRPr>
+                      </a:pPr>
+                      <a:r>
+                        <a:t>Capital Efficiency</a:t>
+                      </a:r>
+                    </a:p>
+                  </a:txBody>
+                  <a:tcPr>
+                    <a:solidFill>
+                      <a:srgbClr val="F8FAFC"/>
+                    </a:solidFill>
+                  </a:tcPr>
+                </a:tc>
+                <a:tc>
+                  <a:txBody>
+                    <a:bodyPr/>
+                    <a:lstStyle/>
+                    <a:p>
+                      <a:pPr>
+                        <a:defRPr sz="819">
+                          <a:solidFill>
+                            <a:srgbClr val="1E293B"/>
+                          </a:solidFill>
+                          <a:latin typeface="Inter"/>
+                        </a:defRPr>
+                      </a:pPr>
+                      <a:r>
+                        <a:t>5%</a:t>
+                      </a:r>
+                    </a:p>
+                  </a:txBody>
+                  <a:tcPr>
+                    <a:solidFill>
+                      <a:srgbClr val="F8FAFC"/>
+                    </a:solidFill>
+                  </a:tcPr>
+                </a:tc>
+                <a:tc>
+                  <a:txBody>
+                    <a:bodyPr/>
+                    <a:lstStyle/>
+                    <a:p>
+                      <a:pPr>
+                        <a:defRPr sz="819">
+                          <a:solidFill>
+                            <a:srgbClr val="1E293B"/>
+                          </a:solidFill>
+                          <a:latin typeface="Inter"/>
+                        </a:defRPr>
+                      </a:pPr>
+                      <a:r>
+                        <a:t>Asset-light software/SaaS models with low capex.</a:t>
+                      </a:r>
+                    </a:p>
+                  </a:txBody>
+                  <a:tcPr>
+                    <a:solidFill>
+                      <a:srgbClr val="F8FAFC"/>
+                    </a:solidFill>
+                  </a:tcPr>
+                </a:tc>
+              </a:tr>
+              <a:tr h="436880">
+                <a:tc>
+                  <a:txBody>
+                    <a:bodyPr/>
+                    <a:lstStyle/>
+                    <a:p>
+                      <a:pPr>
+                        <a:defRPr sz="819" b="1">
+                          <a:solidFill>
+                            <a:srgbClr val="1E293B"/>
+                          </a:solidFill>
+                          <a:latin typeface="Inter"/>
+                        </a:defRPr>
+                      </a:pPr>
+                      <a:r>
+                        <a:t>Capital &amp; Risk (10%)</a:t>
+                      </a:r>
+                    </a:p>
+                  </a:txBody>
+                  <a:tcPr>
+                    <a:solidFill>
+                      <a:srgbClr val="FFFFFF"/>
+                    </a:solidFill>
+                  </a:tcPr>
+                </a:tc>
+                <a:tc>
+                  <a:txBody>
+                    <a:bodyPr/>
+                    <a:lstStyle/>
+                    <a:p>
+                      <a:pPr>
+                        <a:defRPr sz="819" b="1">
+                          <a:solidFill>
+                            <a:srgbClr val="1E293B"/>
+                          </a:solidFill>
+                          <a:latin typeface="Inter"/>
+                        </a:defRPr>
+                      </a:pPr>
+                      <a:r>
+                        <a:t>Risk Mitigation</a:t>
+                      </a:r>
+                    </a:p>
+                  </a:txBody>
+                  <a:tcPr>
+                    <a:solidFill>
+                      <a:srgbClr val="FFFFFF"/>
+                    </a:solidFill>
+                  </a:tcPr>
+                </a:tc>
+                <a:tc>
+                  <a:txBody>
+                    <a:bodyPr/>
+                    <a:lstStyle/>
+                    <a:p>
+                      <a:pPr>
+                        <a:defRPr sz="819">
+                          <a:solidFill>
+                            <a:srgbClr val="1E293B"/>
+                          </a:solidFill>
+                          <a:latin typeface="Inter"/>
+                        </a:defRPr>
+                      </a:pPr>
+                      <a:r>
+                        <a:t>5%</a:t>
+                      </a:r>
+                    </a:p>
+                  </a:txBody>
+                  <a:tcPr>
+                    <a:solidFill>
+                      <a:srgbClr val="FFFFFF"/>
+                    </a:solidFill>
+                  </a:tcPr>
+                </a:tc>
+                <a:tc>
+                  <a:txBody>
+                    <a:bodyPr/>
+                    <a:lstStyle/>
+                    <a:p>
+                      <a:pPr>
+                        <a:defRPr sz="819">
+                          <a:solidFill>
+                            <a:srgbClr val="1E293B"/>
+                          </a:solidFill>
+                          <a:latin typeface="Inter"/>
+                        </a:defRPr>
+                      </a:pPr>
+                      <a:r>
+                        <a:t>Low regulatory, technical, or delivery liabilities.</a:t>
+                      </a:r>
+                    </a:p>
+                  </a:txBody>
+                  <a:tcPr>
+                    <a:solidFill>
+                      <a:srgbClr val="FFFFFF"/>
+                    </a:solidFill>
+                  </a:tcPr>
+                </a:tc>
+              </a:tr>
+            </a:tbl>
+          </a:graphicData>
+        </a:graphic>
+      </p:graphicFrame>
+      <p:sp>
+        <p:nvSpPr>
+          <p:cNvPr id="10" name="Rounded Rectangle 9"/>
+          <p:cNvSpPr/>
+          <p:nvPr/>
+        </p:nvSpPr>
+        <p:spPr>
+          <a:xfrm>
+            <a:off x="7589520" y="1508760"/>
+            <a:ext cx="4053535" cy="3931920"/>
           </a:xfrm>
           <a:prstGeom prst="roundRect">
             <a:avLst/>
@@ -6164,14 +7890,14 @@
       </p:sp>
       <p:sp>
         <p:nvSpPr>
-          <p:cNvPr id="6" name="TextBox 5"/>
+          <p:cNvPr id="11" name="TextBox 10"/>
           <p:cNvSpPr txBox="1"/>
           <p:nvPr/>
         </p:nvSpPr>
         <p:spPr>
           <a:xfrm>
-            <a:off x="731520" y="1645920"/>
-            <a:ext cx="5029200" cy="3749039"/>
+            <a:off x="7726679" y="1600200"/>
+            <a:ext cx="3779215" cy="3749039"/>
           </a:xfrm>
           <a:prstGeom prst="rect">
             <a:avLst/>
@@ -6186,7 +7912,7 @@
           <a:p>
             <a:pPr>
               <a:spcAft>
-                <a:spcPts val="1000"/>
+                <a:spcPts val="1200"/>
               </a:spcAft>
               <a:defRPr sz="1400" b="1">
                 <a:solidFill>
@@ -6196,163 +7922,31 @@
               </a:defRPr>
             </a:pPr>
             <a:r>
-              <a:t>Weighted Scorecard Dimensions (out of 100%)</a:t>
-            </a:r>
-          </a:p>
-          <a:p>
-            <a:pPr>
-              <a:spcAft>
-                <a:spcPts val="800"/>
-              </a:spcAft>
-              <a:defRPr sz="1050">
-                <a:solidFill>
-                  <a:srgbClr val="1E293B"/>
-                </a:solidFill>
-                <a:latin typeface="Inter"/>
-              </a:defRPr>
-            </a:pPr>
-            <a:r>
-              <a:t>• Market Potential (40%): Evaluates Market Attractiveness (TAM/SAM, CAGR) and pricing power / Customer LTV potential.</a:t>
-            </a:r>
-          </a:p>
-          <a:p>
-            <a:pPr>
-              <a:spcAft>
-                <a:spcPts val="800"/>
-              </a:spcAft>
-              <a:defRPr sz="1050">
-                <a:solidFill>
-                  <a:srgbClr val="1E293B"/>
-                </a:solidFill>
-                <a:latin typeface="Inter"/>
-              </a:defRPr>
-            </a:pPr>
-            <a:r>
-              <a:t>• Strategic Fit (30%): Measures JBG Capability Fit (developer leverage) and Brand Alignment (technology &amp; sustainability).</a:t>
-            </a:r>
-          </a:p>
-          <a:p>
-            <a:pPr>
-              <a:spcAft>
-                <a:spcPts val="800"/>
-              </a:spcAft>
-              <a:defRPr sz="1050">
-                <a:solidFill>
-                  <a:srgbClr val="1E293B"/>
-                </a:solidFill>
-                <a:latin typeface="Inter"/>
-              </a:defRPr>
-            </a:pPr>
-            <a:r>
-              <a:t>• Feasibility (20%): Assesses Competitive Intensity (barriers to entry) and Ease of Execution (regulatory, timelines).</a:t>
-            </a:r>
-          </a:p>
-          <a:p>
-            <a:pPr>
-              <a:spcAft>
-                <a:spcPts val="800"/>
-              </a:spcAft>
-              <a:defRPr sz="1050">
-                <a:solidFill>
-                  <a:srgbClr val="1E293B"/>
-                </a:solidFill>
-                <a:latin typeface="Inter"/>
-              </a:defRPr>
-            </a:pPr>
-            <a:r>
-              <a:t>• Capital &amp; Risk (10%): Evaluates Capital Efficiency (asset-light models) and operational/liability Risk Mitigation.</a:t>
-            </a:r>
-          </a:p>
-        </p:txBody>
-      </p:sp>
-      <p:sp>
-        <p:nvSpPr>
-          <p:cNvPr id="7" name="Rounded Rectangle 6"/>
-          <p:cNvSpPr/>
-          <p:nvPr/>
-        </p:nvSpPr>
-        <p:spPr>
-          <a:xfrm>
-            <a:off x="6217920" y="1554480"/>
-            <a:ext cx="5394960" cy="3931920"/>
-          </a:xfrm>
-          <a:prstGeom prst="roundRect">
-            <a:avLst/>
-          </a:prstGeom>
-          <a:solidFill>
-            <a:srgbClr val="F8FAFC"/>
-          </a:solidFill>
-          <a:ln>
-            <a:solidFill>
-              <a:srgbClr val="CBD5E1"/>
-            </a:solidFill>
-          </a:ln>
-        </p:spPr>
-        <p:style>
-          <a:lnRef idx="1">
-            <a:schemeClr val="accent1"/>
-          </a:lnRef>
-          <a:fillRef idx="3">
-            <a:schemeClr val="accent1"/>
-          </a:fillRef>
-          <a:effectRef idx="2">
-            <a:schemeClr val="accent1"/>
-          </a:effectRef>
-          <a:fontRef idx="minor">
-            <a:schemeClr val="lt1"/>
-          </a:fontRef>
-        </p:style>
-        <p:txBody>
-          <a:bodyPr rtlCol="0" anchor="ctr"/>
-          <a:lstStyle/>
-          <a:p>
-            <a:pPr algn="ctr"/>
-          </a:p>
-        </p:txBody>
-      </p:sp>
-      <p:sp>
-        <p:nvSpPr>
-          <p:cNvPr id="8" name="TextBox 7"/>
-          <p:cNvSpPr txBox="1"/>
-          <p:nvPr/>
-        </p:nvSpPr>
-        <p:spPr>
-          <a:xfrm>
-            <a:off x="6400800" y="1645920"/>
-            <a:ext cx="5029200" cy="3749039"/>
-          </a:xfrm>
-          <a:prstGeom prst="rect">
-            <a:avLst/>
-          </a:prstGeom>
-          <a:noFill/>
-        </p:spPr>
-        <p:txBody>
-          <a:bodyPr wrap="square">
-            <a:spAutoFit/>
-          </a:bodyPr>
-          <a:lstStyle/>
+              <a:t>Evaluation Protocol</a:t>
+            </a:r>
+          </a:p>
           <a:p>
             <a:pPr>
               <a:spcAft>
                 <a:spcPts val="1000"/>
               </a:spcAft>
-              <a:defRPr sz="1400" b="1">
-                <a:solidFill>
-                  <a:srgbClr val="0F2537"/>
-                </a:solidFill>
-                <a:latin typeface="Outfit"/>
-              </a:defRPr>
-            </a:pPr>
-            <a:r>
-              <a:t>Evaluation Protocol &amp; Gates</a:t>
+              <a:defRPr sz="950">
+                <a:solidFill>
+                  <a:srgbClr val="1E293B"/>
+                </a:solidFill>
+                <a:latin typeface="Inter"/>
+              </a:defRPr>
+            </a:pPr>
+            <a:r>
+              <a:t>• Opportunities are rated 1 to 10 across these 8 factors, resulting in a weighted score out of 100.</a:t>
             </a:r>
           </a:p>
           <a:p>
             <a:pPr>
               <a:spcAft>
-                <a:spcPts val="800"/>
+                <a:spcPts val="1000"/>
               </a:spcAft>
-              <a:defRPr sz="1050">
+              <a:defRPr sz="950">
                 <a:solidFill>
                   <a:srgbClr val="1E293B"/>
                 </a:solidFill>
@@ -6360,15 +7954,15 @@
               </a:defRPr>
             </a:pPr>
             <a:r>
-              <a:t>• Unified Score: Opportunities rated 1–10 across the 8 dimensions. Score is calculated as a weighted sum of factors.</a:t>
+              <a:t>• A threshold score of &gt;= 65/100 is required to allocate seed MVP validation funding.</a:t>
             </a:r>
           </a:p>
           <a:p>
             <a:pPr>
               <a:spcAft>
-                <a:spcPts val="800"/>
+                <a:spcPts val="1000"/>
               </a:spcAft>
-              <a:defRPr sz="1050">
+              <a:defRPr sz="950">
                 <a:solidFill>
                   <a:srgbClr val="1E293B"/>
                 </a:solidFill>
@@ -6376,181 +7970,7 @@
               </a:defRPr>
             </a:pPr>
             <a:r>
-              <a:t>• Pilot Threshold: Initiatives must score &gt;= 65/100 to qualify for MVP validation funding.</a:t>
-            </a:r>
-          </a:p>
-          <a:p>
-            <a:pPr>
-              <a:spcAft>
-                <a:spcPts val="800"/>
-              </a:spcAft>
-              <a:defRPr sz="1050">
-                <a:solidFill>
-                  <a:srgbClr val="1E293B"/>
-                </a:solidFill>
-                <a:latin typeface="Inter"/>
-              </a:defRPr>
-            </a:pPr>
-            <a:r>
-              <a:t>• Objective Focus: Replaces subjective internal budgeting arguments with quantitative strategic alignment data.</a:t>
-            </a:r>
-          </a:p>
-        </p:txBody>
-      </p:sp>
-      <p:sp>
-        <p:nvSpPr>
-          <p:cNvPr id="9" name="Rectangle 8"/>
-          <p:cNvSpPr/>
-          <p:nvPr/>
-        </p:nvSpPr>
-        <p:spPr>
-          <a:xfrm>
-            <a:off x="548640" y="5623560"/>
-            <a:ext cx="11094415" cy="594360"/>
-          </a:xfrm>
-          <a:prstGeom prst="rect">
-            <a:avLst/>
-          </a:prstGeom>
-          <a:solidFill>
-            <a:srgbClr val="FEE4E6"/>
-          </a:solidFill>
-          <a:ln>
-            <a:noFill/>
-          </a:ln>
-        </p:spPr>
-        <p:style>
-          <a:lnRef idx="1">
-            <a:schemeClr val="accent1"/>
-          </a:lnRef>
-          <a:fillRef idx="3">
-            <a:schemeClr val="accent1"/>
-          </a:fillRef>
-          <a:effectRef idx="2">
-            <a:schemeClr val="accent1"/>
-          </a:effectRef>
-          <a:fontRef idx="minor">
-            <a:schemeClr val="lt1"/>
-          </a:fontRef>
-        </p:style>
-        <p:txBody>
-          <a:bodyPr rtlCol="0" anchor="ctr"/>
-          <a:lstStyle/>
-          <a:p>
-            <a:pPr algn="ctr"/>
-          </a:p>
-        </p:txBody>
-      </p:sp>
-      <p:sp>
-        <p:nvSpPr>
-          <p:cNvPr id="10" name="Rectangle 9"/>
-          <p:cNvSpPr/>
-          <p:nvPr/>
-        </p:nvSpPr>
-        <p:spPr>
-          <a:xfrm>
-            <a:off x="548640" y="5623560"/>
-            <a:ext cx="73152" cy="594360"/>
-          </a:xfrm>
-          <a:prstGeom prst="rect">
-            <a:avLst/>
-          </a:prstGeom>
-          <a:solidFill>
-            <a:srgbClr val="D60000"/>
-          </a:solidFill>
-          <a:ln>
-            <a:noFill/>
-          </a:ln>
-        </p:spPr>
-        <p:style>
-          <a:lnRef idx="1">
-            <a:schemeClr val="accent1"/>
-          </a:lnRef>
-          <a:fillRef idx="3">
-            <a:schemeClr val="accent1"/>
-          </a:fillRef>
-          <a:effectRef idx="2">
-            <a:schemeClr val="accent1"/>
-          </a:effectRef>
-          <a:fontRef idx="minor">
-            <a:schemeClr val="lt1"/>
-          </a:fontRef>
-        </p:style>
-        <p:txBody>
-          <a:bodyPr rtlCol="0" anchor="ctr"/>
-          <a:lstStyle/>
-          <a:p>
-            <a:pPr algn="ctr"/>
-          </a:p>
-        </p:txBody>
-      </p:sp>
-      <p:sp>
-        <p:nvSpPr>
-          <p:cNvPr id="11" name="TextBox 10"/>
-          <p:cNvSpPr txBox="1"/>
-          <p:nvPr/>
-        </p:nvSpPr>
-        <p:spPr>
-          <a:xfrm>
-            <a:off x="731520" y="5669280"/>
-            <a:ext cx="10698480" cy="502920"/>
-          </a:xfrm>
-          <a:prstGeom prst="rect">
-            <a:avLst/>
-          </a:prstGeom>
-          <a:noFill/>
-        </p:spPr>
-        <p:txBody>
-          <a:bodyPr wrap="square">
-            <a:spAutoFit/>
-          </a:bodyPr>
-          <a:lstStyle/>
-          <a:p>
-            <a:pPr>
-              <a:defRPr sz="1100" b="1">
-                <a:solidFill>
-                  <a:srgbClr val="991B1B"/>
-                </a:solidFill>
-                <a:latin typeface="Inter"/>
-              </a:defRPr>
-            </a:pPr>
-            <a:r>
-              <a:t>Strategic Takeaway: Establishing a quantitative scorecard filters subjective opinions out of the investment process and protects capital.</a:t>
-            </a:r>
-          </a:p>
-        </p:txBody>
-      </p:sp>
-      <p:sp>
-        <p:nvSpPr>
-          <p:cNvPr id="12" name="TextBox 11"/>
-          <p:cNvSpPr txBox="1"/>
-          <p:nvPr/>
-        </p:nvSpPr>
-        <p:spPr>
-          <a:xfrm>
-            <a:off x="548640" y="6309360"/>
-            <a:ext cx="11094415" cy="320040"/>
-          </a:xfrm>
-          <a:prstGeom prst="rect">
-            <a:avLst/>
-          </a:prstGeom>
-          <a:noFill/>
-        </p:spPr>
-        <p:txBody>
-          <a:bodyPr wrap="none">
-            <a:spAutoFit/>
-          </a:bodyPr>
-          <a:lstStyle/>
-          <a:p>
-            <a:pPr>
-              <a:defRPr sz="850">
-                <a:solidFill>
-                  <a:srgbClr val="64748B"/>
-                </a:solidFill>
-                <a:latin typeface="Inter"/>
-              </a:defRPr>
-            </a:pPr>
-            <a:r>
-              <a:t>Jithvar Business Group Strategy Deck  |  Confidential  |  Slide 4 of 12</a:t>
+              <a:t>• Replaces subjective internal budgeting arguments with structured, quantitative capability fit data.</a:t>
             </a:r>
           </a:p>
         </p:txBody>
@@ -6653,7 +8073,7 @@
         </p:nvSpPr>
         <p:spPr>
           <a:xfrm>
-            <a:off x="548640" y="1371600"/>
+            <a:off x="548640" y="1325880"/>
             <a:ext cx="11094415" cy="36576"/>
           </a:xfrm>
           <a:prstGeom prst="rect">
@@ -6690,14 +8110,689 @@
       </p:sp>
       <p:sp>
         <p:nvSpPr>
-          <p:cNvPr id="5" name="Rounded Rectangle 4"/>
+          <p:cNvPr id="5" name="TextBox 4"/>
+          <p:cNvSpPr txBox="1"/>
+          <p:nvPr/>
+        </p:nvSpPr>
+        <p:spPr>
+          <a:xfrm>
+            <a:off x="548640" y="6309360"/>
+            <a:ext cx="11094415" cy="320040"/>
+          </a:xfrm>
+          <a:prstGeom prst="rect">
+            <a:avLst/>
+          </a:prstGeom>
+          <a:noFill/>
+        </p:spPr>
+        <p:txBody>
+          <a:bodyPr wrap="none">
+            <a:spAutoFit/>
+          </a:bodyPr>
+          <a:lstStyle/>
+          <a:p>
+            <a:pPr>
+              <a:defRPr sz="850">
+                <a:solidFill>
+                  <a:srgbClr val="64748B"/>
+                </a:solidFill>
+                <a:latin typeface="Inter"/>
+              </a:defRPr>
+            </a:pPr>
+            <a:r>
+              <a:t>Jithvar Business Group Strategy Deck  |  Confidential  |  Slide 5 of 12</a:t>
+            </a:r>
+          </a:p>
+        </p:txBody>
+      </p:sp>
+      <p:sp>
+        <p:nvSpPr>
+          <p:cNvPr id="6" name="Rectangle 5"/>
           <p:cNvSpPr/>
           <p:nvPr/>
         </p:nvSpPr>
         <p:spPr>
           <a:xfrm>
-            <a:off x="548640" y="1554480"/>
-            <a:ext cx="5394960" cy="3931920"/>
+            <a:off x="548640" y="5623560"/>
+            <a:ext cx="11094415" cy="594360"/>
+          </a:xfrm>
+          <a:prstGeom prst="rect">
+            <a:avLst/>
+          </a:prstGeom>
+          <a:solidFill>
+            <a:srgbClr val="FEE4E6"/>
+          </a:solidFill>
+          <a:ln>
+            <a:noFill/>
+          </a:ln>
+        </p:spPr>
+        <p:style>
+          <a:lnRef idx="1">
+            <a:schemeClr val="accent1"/>
+          </a:lnRef>
+          <a:fillRef idx="3">
+            <a:schemeClr val="accent1"/>
+          </a:fillRef>
+          <a:effectRef idx="2">
+            <a:schemeClr val="accent1"/>
+          </a:effectRef>
+          <a:fontRef idx="minor">
+            <a:schemeClr val="lt1"/>
+          </a:fontRef>
+        </p:style>
+        <p:txBody>
+          <a:bodyPr rtlCol="0" anchor="ctr"/>
+          <a:lstStyle/>
+          <a:p>
+            <a:pPr algn="ctr"/>
+          </a:p>
+        </p:txBody>
+      </p:sp>
+      <p:sp>
+        <p:nvSpPr>
+          <p:cNvPr id="7" name="Rectangle 6"/>
+          <p:cNvSpPr/>
+          <p:nvPr/>
+        </p:nvSpPr>
+        <p:spPr>
+          <a:xfrm>
+            <a:off x="548640" y="5623560"/>
+            <a:ext cx="73152" cy="594360"/>
+          </a:xfrm>
+          <a:prstGeom prst="rect">
+            <a:avLst/>
+          </a:prstGeom>
+          <a:solidFill>
+            <a:srgbClr val="D60000"/>
+          </a:solidFill>
+          <a:ln>
+            <a:noFill/>
+          </a:ln>
+        </p:spPr>
+        <p:style>
+          <a:lnRef idx="1">
+            <a:schemeClr val="accent1"/>
+          </a:lnRef>
+          <a:fillRef idx="3">
+            <a:schemeClr val="accent1"/>
+          </a:fillRef>
+          <a:effectRef idx="2">
+            <a:schemeClr val="accent1"/>
+          </a:effectRef>
+          <a:fontRef idx="minor">
+            <a:schemeClr val="lt1"/>
+          </a:fontRef>
+        </p:style>
+        <p:txBody>
+          <a:bodyPr rtlCol="0" anchor="ctr"/>
+          <a:lstStyle/>
+          <a:p>
+            <a:pPr algn="ctr"/>
+          </a:p>
+        </p:txBody>
+      </p:sp>
+      <p:sp>
+        <p:nvSpPr>
+          <p:cNvPr id="8" name="TextBox 7"/>
+          <p:cNvSpPr txBox="1"/>
+          <p:nvPr/>
+        </p:nvSpPr>
+        <p:spPr>
+          <a:xfrm>
+            <a:off x="731520" y="5669280"/>
+            <a:ext cx="10698480" cy="502920"/>
+          </a:xfrm>
+          <a:prstGeom prst="rect">
+            <a:avLst/>
+          </a:prstGeom>
+          <a:noFill/>
+        </p:spPr>
+        <p:txBody>
+          <a:bodyPr wrap="square">
+            <a:spAutoFit/>
+          </a:bodyPr>
+          <a:lstStyle/>
+          <a:p>
+            <a:pPr>
+              <a:defRPr sz="1100" b="1">
+                <a:solidFill>
+                  <a:srgbClr val="991B1B"/>
+                </a:solidFill>
+                <a:latin typeface="Inter"/>
+              </a:defRPr>
+            </a:pPr>
+            <a:r>
+              <a:t>Strategic Takeaway: Prioritizing B2B SaaS models allows JBG to capture recurring licensing fees without linear headcount growth.</a:t>
+            </a:r>
+          </a:p>
+        </p:txBody>
+      </p:sp>
+      <p:graphicFrame>
+        <p:nvGraphicFramePr>
+          <p:cNvPr id="9" name="Table 8"/>
+          <p:cNvGraphicFramePr>
+            <a:graphicFrameLocks noGrp="1"/>
+          </p:cNvGraphicFramePr>
+          <p:nvPr/>
+        </p:nvGraphicFramePr>
+        <p:xfrm>
+          <a:off x="548640" y="1508760"/>
+          <a:ext cx="6858000" cy="3931920"/>
+        </p:xfrm>
+        <a:graphic>
+          <a:graphicData uri="http://schemas.openxmlformats.org/drawingml/2006/table">
+            <a:tbl>
+              <a:tblPr firstRow="1" bandRow="1">
+                <a:tableStyleId>{5C22544A-7EE6-4342-B048-85BDC9FD1C3A}</a:tableStyleId>
+              </a:tblPr>
+              <a:tblGrid>
+                <a:gridCol w="548640"/>
+                <a:gridCol w="2011680"/>
+                <a:gridCol w="640080"/>
+                <a:gridCol w="2468880"/>
+                <a:gridCol w="1188720"/>
+              </a:tblGrid>
+              <a:tr h="982980">
+                <a:tc>
+                  <a:txBody>
+                    <a:bodyPr/>
+                    <a:lstStyle/>
+                    <a:p>
+                      <a:pPr>
+                        <a:defRPr sz="850" b="1">
+                          <a:solidFill>
+                            <a:srgbClr val="FFFFFF"/>
+                          </a:solidFill>
+                          <a:latin typeface="Outfit"/>
+                        </a:defRPr>
+                      </a:pPr>
+                      <a:r>
+                        <a:t>Rank</a:t>
+                      </a:r>
+                    </a:p>
+                  </a:txBody>
+                  <a:tcPr>
+                    <a:solidFill>
+                      <a:srgbClr val="0F2537"/>
+                    </a:solidFill>
+                  </a:tcPr>
+                </a:tc>
+                <a:tc>
+                  <a:txBody>
+                    <a:bodyPr/>
+                    <a:lstStyle/>
+                    <a:p>
+                      <a:pPr>
+                        <a:defRPr sz="850" b="1">
+                          <a:solidFill>
+                            <a:srgbClr val="FFFFFF"/>
+                          </a:solidFill>
+                          <a:latin typeface="Outfit"/>
+                        </a:defRPr>
+                      </a:pPr>
+                      <a:r>
+                        <a:t>Strategic Opportunity</a:t>
+                      </a:r>
+                    </a:p>
+                  </a:txBody>
+                  <a:tcPr>
+                    <a:solidFill>
+                      <a:srgbClr val="0F2537"/>
+                    </a:solidFill>
+                  </a:tcPr>
+                </a:tc>
+                <a:tc>
+                  <a:txBody>
+                    <a:bodyPr/>
+                    <a:lstStyle/>
+                    <a:p>
+                      <a:pPr>
+                        <a:defRPr sz="850" b="1">
+                          <a:solidFill>
+                            <a:srgbClr val="FFFFFF"/>
+                          </a:solidFill>
+                          <a:latin typeface="Outfit"/>
+                        </a:defRPr>
+                      </a:pPr>
+                      <a:r>
+                        <a:t>Score</a:t>
+                      </a:r>
+                    </a:p>
+                  </a:txBody>
+                  <a:tcPr>
+                    <a:solidFill>
+                      <a:srgbClr val="0F2537"/>
+                    </a:solidFill>
+                  </a:tcPr>
+                </a:tc>
+                <a:tc>
+                  <a:txBody>
+                    <a:bodyPr/>
+                    <a:lstStyle/>
+                    <a:p>
+                      <a:pPr>
+                        <a:defRPr sz="850" b="1">
+                          <a:solidFill>
+                            <a:srgbClr val="FFFFFF"/>
+                          </a:solidFill>
+                          <a:latin typeface="Outfit"/>
+                        </a:defRPr>
+                      </a:pPr>
+                      <a:r>
+                        <a:t>Synergy Mechanics</a:t>
+                      </a:r>
+                    </a:p>
+                  </a:txBody>
+                  <a:tcPr>
+                    <a:solidFill>
+                      <a:srgbClr val="0F2537"/>
+                    </a:solidFill>
+                  </a:tcPr>
+                </a:tc>
+                <a:tc>
+                  <a:txBody>
+                    <a:bodyPr/>
+                    <a:lstStyle/>
+                    <a:p>
+                      <a:pPr>
+                        <a:defRPr sz="850" b="1">
+                          <a:solidFill>
+                            <a:srgbClr val="FFFFFF"/>
+                          </a:solidFill>
+                          <a:latin typeface="Outfit"/>
+                        </a:defRPr>
+                      </a:pPr>
+                      <a:r>
+                        <a:t>Business Model</a:t>
+                      </a:r>
+                    </a:p>
+                  </a:txBody>
+                  <a:tcPr>
+                    <a:solidFill>
+                      <a:srgbClr val="0F2537"/>
+                    </a:solidFill>
+                  </a:tcPr>
+                </a:tc>
+              </a:tr>
+              <a:tr h="982980">
+                <a:tc>
+                  <a:txBody>
+                    <a:bodyPr/>
+                    <a:lstStyle/>
+                    <a:p>
+                      <a:pPr>
+                        <a:defRPr sz="819" b="1">
+                          <a:solidFill>
+                            <a:srgbClr val="D60000"/>
+                          </a:solidFill>
+                          <a:latin typeface="Inter"/>
+                        </a:defRPr>
+                      </a:pPr>
+                      <a:r>
+                        <a:t>1</a:t>
+                      </a:r>
+                    </a:p>
+                  </a:txBody>
+                  <a:tcPr>
+                    <a:solidFill>
+                      <a:srgbClr val="FEE4E6"/>
+                    </a:solidFill>
+                  </a:tcPr>
+                </a:tc>
+                <a:tc>
+                  <a:txBody>
+                    <a:bodyPr/>
+                    <a:lstStyle/>
+                    <a:p>
+                      <a:pPr>
+                        <a:defRPr sz="819" b="1">
+                          <a:solidFill>
+                            <a:srgbClr val="1E293B"/>
+                          </a:solidFill>
+                          <a:latin typeface="Inter"/>
+                        </a:defRPr>
+                      </a:pPr>
+                      <a:r>
+                        <a:t>B2B Recruitment Automation SaaS</a:t>
+                      </a:r>
+                    </a:p>
+                  </a:txBody>
+                  <a:tcPr>
+                    <a:solidFill>
+                      <a:srgbClr val="FEE4E6"/>
+                    </a:solidFill>
+                  </a:tcPr>
+                </a:tc>
+                <a:tc>
+                  <a:txBody>
+                    <a:bodyPr/>
+                    <a:lstStyle/>
+                    <a:p>
+                      <a:pPr>
+                        <a:defRPr sz="819">
+                          <a:solidFill>
+                            <a:srgbClr val="1E293B"/>
+                          </a:solidFill>
+                          <a:latin typeface="Inter"/>
+                        </a:defRPr>
+                      </a:pPr>
+                      <a:r>
+                        <a:t>84/100</a:t>
+                      </a:r>
+                    </a:p>
+                  </a:txBody>
+                  <a:tcPr>
+                    <a:solidFill>
+                      <a:srgbClr val="FEE4E6"/>
+                    </a:solidFill>
+                  </a:tcPr>
+                </a:tc>
+                <a:tc>
+                  <a:txBody>
+                    <a:bodyPr/>
+                    <a:lstStyle/>
+                    <a:p>
+                      <a:pPr>
+                        <a:defRPr sz="819">
+                          <a:solidFill>
+                            <a:srgbClr val="1E293B"/>
+                          </a:solidFill>
+                          <a:latin typeface="Inter"/>
+                        </a:defRPr>
+                      </a:pPr>
+                      <a:r>
+                        <a:t>JCS engineering + Aequalis staffing network</a:t>
+                      </a:r>
+                    </a:p>
+                  </a:txBody>
+                  <a:tcPr>
+                    <a:solidFill>
+                      <a:srgbClr val="FEE4E6"/>
+                    </a:solidFill>
+                  </a:tcPr>
+                </a:tc>
+                <a:tc>
+                  <a:txBody>
+                    <a:bodyPr/>
+                    <a:lstStyle/>
+                    <a:p>
+                      <a:pPr>
+                        <a:defRPr sz="819">
+                          <a:solidFill>
+                            <a:srgbClr val="1E293B"/>
+                          </a:solidFill>
+                          <a:latin typeface="Inter"/>
+                        </a:defRPr>
+                      </a:pPr>
+                      <a:r>
+                        <a:t>Subscription SaaS</a:t>
+                      </a:r>
+                    </a:p>
+                  </a:txBody>
+                  <a:tcPr>
+                    <a:solidFill>
+                      <a:srgbClr val="FEE4E6"/>
+                    </a:solidFill>
+                  </a:tcPr>
+                </a:tc>
+              </a:tr>
+              <a:tr h="982980">
+                <a:tc>
+                  <a:txBody>
+                    <a:bodyPr/>
+                    <a:lstStyle/>
+                    <a:p>
+                      <a:pPr>
+                        <a:defRPr sz="819" b="1">
+                          <a:solidFill>
+                            <a:srgbClr val="1E293B"/>
+                          </a:solidFill>
+                          <a:latin typeface="Inter"/>
+                        </a:defRPr>
+                      </a:pPr>
+                      <a:r>
+                        <a:t>2</a:t>
+                      </a:r>
+                    </a:p>
+                  </a:txBody>
+                  <a:tcPr>
+                    <a:solidFill>
+                      <a:srgbClr val="FFFFFF"/>
+                    </a:solidFill>
+                  </a:tcPr>
+                </a:tc>
+                <a:tc>
+                  <a:txBody>
+                    <a:bodyPr/>
+                    <a:lstStyle/>
+                    <a:p>
+                      <a:pPr>
+                        <a:defRPr sz="819" b="1">
+                          <a:solidFill>
+                            <a:srgbClr val="1E293B"/>
+                          </a:solidFill>
+                          <a:latin typeface="Inter"/>
+                        </a:defRPr>
+                      </a:pPr>
+                      <a:r>
+                        <a:t>Solar Telemetry &amp; Predictive O&amp;M</a:t>
+                      </a:r>
+                    </a:p>
+                  </a:txBody>
+                  <a:tcPr>
+                    <a:solidFill>
+                      <a:srgbClr val="FFFFFF"/>
+                    </a:solidFill>
+                  </a:tcPr>
+                </a:tc>
+                <a:tc>
+                  <a:txBody>
+                    <a:bodyPr/>
+                    <a:lstStyle/>
+                    <a:p>
+                      <a:pPr>
+                        <a:defRPr sz="819">
+                          <a:solidFill>
+                            <a:srgbClr val="1E293B"/>
+                          </a:solidFill>
+                          <a:latin typeface="Inter"/>
+                        </a:defRPr>
+                      </a:pPr>
+                      <a:r>
+                        <a:t>78/100</a:t>
+                      </a:r>
+                    </a:p>
+                  </a:txBody>
+                  <a:tcPr>
+                    <a:solidFill>
+                      <a:srgbClr val="FFFFFF"/>
+                    </a:solidFill>
+                  </a:tcPr>
+                </a:tc>
+                <a:tc>
+                  <a:txBody>
+                    <a:bodyPr/>
+                    <a:lstStyle/>
+                    <a:p>
+                      <a:pPr>
+                        <a:defRPr sz="819">
+                          <a:solidFill>
+                            <a:srgbClr val="1E293B"/>
+                          </a:solidFill>
+                          <a:latin typeface="Inter"/>
+                        </a:defRPr>
+                      </a:pPr>
+                      <a:r>
+                        <a:t>JCS IoT cloud platforms + Nature Grid engineers</a:t>
+                      </a:r>
+                    </a:p>
+                  </a:txBody>
+                  <a:tcPr>
+                    <a:solidFill>
+                      <a:srgbClr val="FFFFFF"/>
+                    </a:solidFill>
+                  </a:tcPr>
+                </a:tc>
+                <a:tc>
+                  <a:txBody>
+                    <a:bodyPr/>
+                    <a:lstStyle/>
+                    <a:p>
+                      <a:pPr>
+                        <a:defRPr sz="819">
+                          <a:solidFill>
+                            <a:srgbClr val="1E293B"/>
+                          </a:solidFill>
+                          <a:latin typeface="Inter"/>
+                        </a:defRPr>
+                      </a:pPr>
+                      <a:r>
+                        <a:t>Telemetry + O&amp;M</a:t>
+                      </a:r>
+                    </a:p>
+                  </a:txBody>
+                  <a:tcPr>
+                    <a:solidFill>
+                      <a:srgbClr val="FFFFFF"/>
+                    </a:solidFill>
+                  </a:tcPr>
+                </a:tc>
+              </a:tr>
+              <a:tr h="982980">
+                <a:tc>
+                  <a:txBody>
+                    <a:bodyPr/>
+                    <a:lstStyle/>
+                    <a:p>
+                      <a:pPr>
+                        <a:defRPr sz="819" b="1">
+                          <a:solidFill>
+                            <a:srgbClr val="1E293B"/>
+                          </a:solidFill>
+                          <a:latin typeface="Inter"/>
+                        </a:defRPr>
+                      </a:pPr>
+                      <a:r>
+                        <a:t>3</a:t>
+                      </a:r>
+                    </a:p>
+                  </a:txBody>
+                  <a:tcPr>
+                    <a:solidFill>
+                      <a:srgbClr val="F8FAFC"/>
+                    </a:solidFill>
+                  </a:tcPr>
+                </a:tc>
+                <a:tc>
+                  <a:txBody>
+                    <a:bodyPr/>
+                    <a:lstStyle/>
+                    <a:p>
+                      <a:pPr>
+                        <a:defRPr sz="819" b="1">
+                          <a:solidFill>
+                            <a:srgbClr val="1E293B"/>
+                          </a:solidFill>
+                          <a:latin typeface="Inter"/>
+                        </a:defRPr>
+                      </a:pPr>
+                      <a:r>
+                        <a:t>JCS Template &amp; Connector Marketplace</a:t>
+                      </a:r>
+                    </a:p>
+                  </a:txBody>
+                  <a:tcPr>
+                    <a:solidFill>
+                      <a:srgbClr val="F8FAFC"/>
+                    </a:solidFill>
+                  </a:tcPr>
+                </a:tc>
+                <a:tc>
+                  <a:txBody>
+                    <a:bodyPr/>
+                    <a:lstStyle/>
+                    <a:p>
+                      <a:pPr>
+                        <a:defRPr sz="819">
+                          <a:solidFill>
+                            <a:srgbClr val="1E293B"/>
+                          </a:solidFill>
+                          <a:latin typeface="Inter"/>
+                        </a:defRPr>
+                      </a:pPr>
+                      <a:r>
+                        <a:t>72/100</a:t>
+                      </a:r>
+                    </a:p>
+                  </a:txBody>
+                  <a:tcPr>
+                    <a:solidFill>
+                      <a:srgbClr val="F8FAFC"/>
+                    </a:solidFill>
+                  </a:tcPr>
+                </a:tc>
+                <a:tc>
+                  <a:txBody>
+                    <a:bodyPr/>
+                    <a:lstStyle/>
+                    <a:p>
+                      <a:pPr>
+                        <a:defRPr sz="819">
+                          <a:solidFill>
+                            <a:srgbClr val="1E293B"/>
+                          </a:solidFill>
+                          <a:latin typeface="Inter"/>
+                        </a:defRPr>
+                      </a:pPr>
+                      <a:r>
+                        <a:t>Productizing custom CRM/ERP integrations</a:t>
+                      </a:r>
+                    </a:p>
+                  </a:txBody>
+                  <a:tcPr>
+                    <a:solidFill>
+                      <a:srgbClr val="F8FAFC"/>
+                    </a:solidFill>
+                  </a:tcPr>
+                </a:tc>
+                <a:tc>
+                  <a:txBody>
+                    <a:bodyPr/>
+                    <a:lstStyle/>
+                    <a:p>
+                      <a:pPr>
+                        <a:defRPr sz="819">
+                          <a:solidFill>
+                            <a:srgbClr val="1E293B"/>
+                          </a:solidFill>
+                          <a:latin typeface="Inter"/>
+                        </a:defRPr>
+                      </a:pPr>
+                      <a:r>
+                        <a:t>Reusable API</a:t>
+                      </a:r>
+                    </a:p>
+                  </a:txBody>
+                  <a:tcPr>
+                    <a:solidFill>
+                      <a:srgbClr val="F8FAFC"/>
+                    </a:solidFill>
+                  </a:tcPr>
+                </a:tc>
+              </a:tr>
+            </a:tbl>
+          </a:graphicData>
+        </a:graphic>
+      </p:graphicFrame>
+      <p:sp>
+        <p:nvSpPr>
+          <p:cNvPr id="10" name="Rounded Rectangle 9"/>
+          <p:cNvSpPr/>
+          <p:nvPr/>
+        </p:nvSpPr>
+        <p:spPr>
+          <a:xfrm>
+            <a:off x="7589520" y="1508760"/>
+            <a:ext cx="4053535" cy="3931920"/>
           </a:xfrm>
           <a:prstGeom prst="roundRect">
             <a:avLst/>
@@ -6735,14 +8830,14 @@
       </p:sp>
       <p:sp>
         <p:nvSpPr>
-          <p:cNvPr id="6" name="TextBox 5"/>
+          <p:cNvPr id="11" name="TextBox 10"/>
           <p:cNvSpPr txBox="1"/>
           <p:nvPr/>
         </p:nvSpPr>
         <p:spPr>
           <a:xfrm>
-            <a:off x="731520" y="1645920"/>
-            <a:ext cx="5029200" cy="3749039"/>
+            <a:off x="7726679" y="1600200"/>
+            <a:ext cx="3779215" cy="3749039"/>
           </a:xfrm>
           <a:prstGeom prst="rect">
             <a:avLst/>
@@ -6757,7 +8852,7 @@
           <a:p>
             <a:pPr>
               <a:spcAft>
-                <a:spcPts val="1000"/>
+                <a:spcPts val="1200"/>
               </a:spcAft>
               <a:defRPr sz="1400" b="1">
                 <a:solidFill>
@@ -6767,147 +8862,31 @@
               </a:defRPr>
             </a:pPr>
             <a:r>
-              <a:t>The Prioritized Roadmap</a:t>
-            </a:r>
-          </a:p>
-          <a:p>
-            <a:pPr>
-              <a:spcAft>
-                <a:spcPts val="800"/>
-              </a:spcAft>
-              <a:defRPr sz="1050">
-                <a:solidFill>
-                  <a:srgbClr val="1E293B"/>
-                </a:solidFill>
-                <a:latin typeface="Inter"/>
-              </a:defRPr>
-            </a:pPr>
-            <a:r>
-              <a:t>• Rank 1: B2B Recruitment Automation SaaS (Score: 84/100). Synergy: JCS engineering capability + Aequalis client networks.</a:t>
-            </a:r>
-          </a:p>
-          <a:p>
-            <a:pPr>
-              <a:spcAft>
-                <a:spcPts val="800"/>
-              </a:spcAft>
-              <a:defRPr sz="1050">
-                <a:solidFill>
-                  <a:srgbClr val="1E293B"/>
-                </a:solidFill>
-                <a:latin typeface="Inter"/>
-              </a:defRPr>
-            </a:pPr>
-            <a:r>
-              <a:t>• Rank 2: Solar Telemetry &amp; Predictive O&amp;M SaaS (Score: 78/100). Synergy: JCS IoT cloud platforms + Nature Grid field engineers.</a:t>
-            </a:r>
-          </a:p>
-          <a:p>
-            <a:pPr>
-              <a:spcAft>
-                <a:spcPts val="800"/>
-              </a:spcAft>
-              <a:defRPr sz="1050">
-                <a:solidFill>
-                  <a:srgbClr val="1E293B"/>
-                </a:solidFill>
-                <a:latin typeface="Inter"/>
-              </a:defRPr>
-            </a:pPr>
-            <a:r>
-              <a:t>• Rank 3: JCS Template &amp; Connector Marketplace (Score: 72/100). Synergy: Productizing custom CRM/ERP integration scripts.</a:t>
-            </a:r>
-          </a:p>
-        </p:txBody>
-      </p:sp>
-      <p:sp>
-        <p:nvSpPr>
-          <p:cNvPr id="7" name="Rounded Rectangle 6"/>
-          <p:cNvSpPr/>
-          <p:nvPr/>
-        </p:nvSpPr>
-        <p:spPr>
-          <a:xfrm>
-            <a:off x="6217920" y="1554480"/>
-            <a:ext cx="5394960" cy="3931920"/>
-          </a:xfrm>
-          <a:prstGeom prst="roundRect">
-            <a:avLst/>
-          </a:prstGeom>
-          <a:solidFill>
-            <a:srgbClr val="F8FAFC"/>
-          </a:solidFill>
-          <a:ln>
-            <a:solidFill>
-              <a:srgbClr val="CBD5E1"/>
-            </a:solidFill>
-          </a:ln>
-        </p:spPr>
-        <p:style>
-          <a:lnRef idx="1">
-            <a:schemeClr val="accent1"/>
-          </a:lnRef>
-          <a:fillRef idx="3">
-            <a:schemeClr val="accent1"/>
-          </a:fillRef>
-          <a:effectRef idx="2">
-            <a:schemeClr val="accent1"/>
-          </a:effectRef>
-          <a:fontRef idx="minor">
-            <a:schemeClr val="lt1"/>
-          </a:fontRef>
-        </p:style>
-        <p:txBody>
-          <a:bodyPr rtlCol="0" anchor="ctr"/>
-          <a:lstStyle/>
-          <a:p>
-            <a:pPr algn="ctr"/>
-          </a:p>
-        </p:txBody>
-      </p:sp>
-      <p:sp>
-        <p:nvSpPr>
-          <p:cNvPr id="8" name="TextBox 7"/>
-          <p:cNvSpPr txBox="1"/>
-          <p:nvPr/>
-        </p:nvSpPr>
-        <p:spPr>
-          <a:xfrm>
-            <a:off x="6400800" y="1645920"/>
-            <a:ext cx="5029200" cy="3749039"/>
-          </a:xfrm>
-          <a:prstGeom prst="rect">
-            <a:avLst/>
-          </a:prstGeom>
-          <a:noFill/>
-        </p:spPr>
-        <p:txBody>
-          <a:bodyPr wrap="square">
-            <a:spAutoFit/>
-          </a:bodyPr>
-          <a:lstStyle/>
+              <a:t>Strategic Synergy Logic</a:t>
+            </a:r>
+          </a:p>
           <a:p>
             <a:pPr>
               <a:spcAft>
                 <a:spcPts val="1000"/>
               </a:spcAft>
-              <a:defRPr sz="1400" b="1">
-                <a:solidFill>
-                  <a:srgbClr val="0F2537"/>
-                </a:solidFill>
-                <a:latin typeface="Outfit"/>
-              </a:defRPr>
-            </a:pPr>
-            <a:r>
-              <a:t>Synergy &amp; Scalability Rationale</a:t>
+              <a:defRPr sz="950">
+                <a:solidFill>
+                  <a:srgbClr val="1E293B"/>
+                </a:solidFill>
+                <a:latin typeface="Inter"/>
+              </a:defRPr>
+            </a:pPr>
+            <a:r>
+              <a:t>• Prioritize cross-business synergies where one unit's tech capability (JCS) scales another unit's distribution network (Aequalis, Nature Grid).</a:t>
             </a:r>
           </a:p>
           <a:p>
             <a:pPr>
               <a:spcAft>
-                <a:spcPts val="800"/>
+                <a:spcPts val="1000"/>
               </a:spcAft>
-              <a:defRPr sz="1050">
+              <a:defRPr sz="950">
                 <a:solidFill>
                   <a:srgbClr val="1E293B"/>
                 </a:solidFill>
@@ -6915,15 +8894,15 @@
               </a:defRPr>
             </a:pPr>
             <a:r>
-              <a:t>• Capital Efficiency: Focuses on software/SaaS models that scale revenue without a linear increase in developer headcount.</a:t>
+              <a:t>• SaaS product models scale revenues exponentially without adding linear headcount or developer pools.</a:t>
             </a:r>
           </a:p>
           <a:p>
             <a:pPr>
               <a:spcAft>
-                <a:spcPts val="800"/>
+                <a:spcPts val="1000"/>
               </a:spcAft>
-              <a:defRPr sz="1050">
+              <a:defRPr sz="950">
                 <a:solidFill>
                   <a:srgbClr val="1E293B"/>
                 </a:solidFill>
@@ -6931,181 +8910,7 @@
               </a:defRPr>
             </a:pPr>
             <a:r>
-              <a:t>• Low-CAC Advantage: Leverages existing client relationships within Aequalis and Nature Grid as distribution channels, bypassing high marketing CAC.</a:t>
-            </a:r>
-          </a:p>
-          <a:p>
-            <a:pPr>
-              <a:spcAft>
-                <a:spcPts val="800"/>
-              </a:spcAft>
-              <a:defRPr sz="1050">
-                <a:solidFill>
-                  <a:srgbClr val="1E293B"/>
-                </a:solidFill>
-                <a:latin typeface="Inter"/>
-              </a:defRPr>
-            </a:pPr>
-            <a:r>
-              <a:t>• Proprietary IP: Pivots the group from service brokers to owners of valuable software assets.</a:t>
-            </a:r>
-          </a:p>
-        </p:txBody>
-      </p:sp>
-      <p:sp>
-        <p:nvSpPr>
-          <p:cNvPr id="9" name="Rectangle 8"/>
-          <p:cNvSpPr/>
-          <p:nvPr/>
-        </p:nvSpPr>
-        <p:spPr>
-          <a:xfrm>
-            <a:off x="548640" y="5623560"/>
-            <a:ext cx="11094415" cy="594360"/>
-          </a:xfrm>
-          <a:prstGeom prst="rect">
-            <a:avLst/>
-          </a:prstGeom>
-          <a:solidFill>
-            <a:srgbClr val="FEE4E6"/>
-          </a:solidFill>
-          <a:ln>
-            <a:noFill/>
-          </a:ln>
-        </p:spPr>
-        <p:style>
-          <a:lnRef idx="1">
-            <a:schemeClr val="accent1"/>
-          </a:lnRef>
-          <a:fillRef idx="3">
-            <a:schemeClr val="accent1"/>
-          </a:fillRef>
-          <a:effectRef idx="2">
-            <a:schemeClr val="accent1"/>
-          </a:effectRef>
-          <a:fontRef idx="minor">
-            <a:schemeClr val="lt1"/>
-          </a:fontRef>
-        </p:style>
-        <p:txBody>
-          <a:bodyPr rtlCol="0" anchor="ctr"/>
-          <a:lstStyle/>
-          <a:p>
-            <a:pPr algn="ctr"/>
-          </a:p>
-        </p:txBody>
-      </p:sp>
-      <p:sp>
-        <p:nvSpPr>
-          <p:cNvPr id="10" name="Rectangle 9"/>
-          <p:cNvSpPr/>
-          <p:nvPr/>
-        </p:nvSpPr>
-        <p:spPr>
-          <a:xfrm>
-            <a:off x="548640" y="5623560"/>
-            <a:ext cx="73152" cy="594360"/>
-          </a:xfrm>
-          <a:prstGeom prst="rect">
-            <a:avLst/>
-          </a:prstGeom>
-          <a:solidFill>
-            <a:srgbClr val="D60000"/>
-          </a:solidFill>
-          <a:ln>
-            <a:noFill/>
-          </a:ln>
-        </p:spPr>
-        <p:style>
-          <a:lnRef idx="1">
-            <a:schemeClr val="accent1"/>
-          </a:lnRef>
-          <a:fillRef idx="3">
-            <a:schemeClr val="accent1"/>
-          </a:fillRef>
-          <a:effectRef idx="2">
-            <a:schemeClr val="accent1"/>
-          </a:effectRef>
-          <a:fontRef idx="minor">
-            <a:schemeClr val="lt1"/>
-          </a:fontRef>
-        </p:style>
-        <p:txBody>
-          <a:bodyPr rtlCol="0" anchor="ctr"/>
-          <a:lstStyle/>
-          <a:p>
-            <a:pPr algn="ctr"/>
-          </a:p>
-        </p:txBody>
-      </p:sp>
-      <p:sp>
-        <p:nvSpPr>
-          <p:cNvPr id="11" name="TextBox 10"/>
-          <p:cNvSpPr txBox="1"/>
-          <p:nvPr/>
-        </p:nvSpPr>
-        <p:spPr>
-          <a:xfrm>
-            <a:off x="731520" y="5669280"/>
-            <a:ext cx="10698480" cy="502920"/>
-          </a:xfrm>
-          <a:prstGeom prst="rect">
-            <a:avLst/>
-          </a:prstGeom>
-          <a:noFill/>
-        </p:spPr>
-        <p:txBody>
-          <a:bodyPr wrap="square">
-            <a:spAutoFit/>
-          </a:bodyPr>
-          <a:lstStyle/>
-          <a:p>
-            <a:pPr>
-              <a:defRPr sz="1100" b="1">
-                <a:solidFill>
-                  <a:srgbClr val="991B1B"/>
-                </a:solidFill>
-                <a:latin typeface="Inter"/>
-              </a:defRPr>
-            </a:pPr>
-            <a:r>
-              <a:t>Strategic Takeaway: Prioritizing B2B SaaS models allows JBG to capture recurring licensing fees without linear headcount growth.</a:t>
-            </a:r>
-          </a:p>
-        </p:txBody>
-      </p:sp>
-      <p:sp>
-        <p:nvSpPr>
-          <p:cNvPr id="12" name="TextBox 11"/>
-          <p:cNvSpPr txBox="1"/>
-          <p:nvPr/>
-        </p:nvSpPr>
-        <p:spPr>
-          <a:xfrm>
-            <a:off x="548640" y="6309360"/>
-            <a:ext cx="11094415" cy="320040"/>
-          </a:xfrm>
-          <a:prstGeom prst="rect">
-            <a:avLst/>
-          </a:prstGeom>
-          <a:noFill/>
-        </p:spPr>
-        <p:txBody>
-          <a:bodyPr wrap="none">
-            <a:spAutoFit/>
-          </a:bodyPr>
-          <a:lstStyle/>
-          <a:p>
-            <a:pPr>
-              <a:defRPr sz="850">
-                <a:solidFill>
-                  <a:srgbClr val="64748B"/>
-                </a:solidFill>
-                <a:latin typeface="Inter"/>
-              </a:defRPr>
-            </a:pPr>
-            <a:r>
-              <a:t>Jithvar Business Group Strategy Deck  |  Confidential  |  Slide 5 of 12</a:t>
+              <a:t>• Capturing existing client accounts provides near-zero marketing customer acquisition costs.</a:t>
             </a:r>
           </a:p>
         </p:txBody>
@@ -7208,7 +9013,7 @@
         </p:nvSpPr>
         <p:spPr>
           <a:xfrm>
-            <a:off x="548640" y="1371600"/>
+            <a:off x="548640" y="1325880"/>
             <a:ext cx="11094415" cy="36576"/>
           </a:xfrm>
           <a:prstGeom prst="rect">
@@ -7245,14 +9050,172 @@
       </p:sp>
       <p:sp>
         <p:nvSpPr>
-          <p:cNvPr id="5" name="Rounded Rectangle 4"/>
+          <p:cNvPr id="5" name="TextBox 4"/>
+          <p:cNvSpPr txBox="1"/>
+          <p:nvPr/>
+        </p:nvSpPr>
+        <p:spPr>
+          <a:xfrm>
+            <a:off x="548640" y="6309360"/>
+            <a:ext cx="11094415" cy="320040"/>
+          </a:xfrm>
+          <a:prstGeom prst="rect">
+            <a:avLst/>
+          </a:prstGeom>
+          <a:noFill/>
+        </p:spPr>
+        <p:txBody>
+          <a:bodyPr wrap="none">
+            <a:spAutoFit/>
+          </a:bodyPr>
+          <a:lstStyle/>
+          <a:p>
+            <a:pPr>
+              <a:defRPr sz="850">
+                <a:solidFill>
+                  <a:srgbClr val="64748B"/>
+                </a:solidFill>
+                <a:latin typeface="Inter"/>
+              </a:defRPr>
+            </a:pPr>
+            <a:r>
+              <a:t>Jithvar Business Group Strategy Deck  |  Confidential  |  Slide 6 of 12</a:t>
+            </a:r>
+          </a:p>
+        </p:txBody>
+      </p:sp>
+      <p:sp>
+        <p:nvSpPr>
+          <p:cNvPr id="6" name="Rectangle 5"/>
           <p:cNvSpPr/>
           <p:nvPr/>
         </p:nvSpPr>
         <p:spPr>
           <a:xfrm>
-            <a:off x="548640" y="1554480"/>
-            <a:ext cx="5394960" cy="3931920"/>
+            <a:off x="548640" y="5623560"/>
+            <a:ext cx="11094415" cy="594360"/>
+          </a:xfrm>
+          <a:prstGeom prst="rect">
+            <a:avLst/>
+          </a:prstGeom>
+          <a:solidFill>
+            <a:srgbClr val="FEE4E6"/>
+          </a:solidFill>
+          <a:ln>
+            <a:noFill/>
+          </a:ln>
+        </p:spPr>
+        <p:style>
+          <a:lnRef idx="1">
+            <a:schemeClr val="accent1"/>
+          </a:lnRef>
+          <a:fillRef idx="3">
+            <a:schemeClr val="accent1"/>
+          </a:fillRef>
+          <a:effectRef idx="2">
+            <a:schemeClr val="accent1"/>
+          </a:effectRef>
+          <a:fontRef idx="minor">
+            <a:schemeClr val="lt1"/>
+          </a:fontRef>
+        </p:style>
+        <p:txBody>
+          <a:bodyPr rtlCol="0" anchor="ctr"/>
+          <a:lstStyle/>
+          <a:p>
+            <a:pPr algn="ctr"/>
+          </a:p>
+        </p:txBody>
+      </p:sp>
+      <p:sp>
+        <p:nvSpPr>
+          <p:cNvPr id="7" name="Rectangle 6"/>
+          <p:cNvSpPr/>
+          <p:nvPr/>
+        </p:nvSpPr>
+        <p:spPr>
+          <a:xfrm>
+            <a:off x="548640" y="5623560"/>
+            <a:ext cx="73152" cy="594360"/>
+          </a:xfrm>
+          <a:prstGeom prst="rect">
+            <a:avLst/>
+          </a:prstGeom>
+          <a:solidFill>
+            <a:srgbClr val="D60000"/>
+          </a:solidFill>
+          <a:ln>
+            <a:noFill/>
+          </a:ln>
+        </p:spPr>
+        <p:style>
+          <a:lnRef idx="1">
+            <a:schemeClr val="accent1"/>
+          </a:lnRef>
+          <a:fillRef idx="3">
+            <a:schemeClr val="accent1"/>
+          </a:fillRef>
+          <a:effectRef idx="2">
+            <a:schemeClr val="accent1"/>
+          </a:effectRef>
+          <a:fontRef idx="minor">
+            <a:schemeClr val="lt1"/>
+          </a:fontRef>
+        </p:style>
+        <p:txBody>
+          <a:bodyPr rtlCol="0" anchor="ctr"/>
+          <a:lstStyle/>
+          <a:p>
+            <a:pPr algn="ctr"/>
+          </a:p>
+        </p:txBody>
+      </p:sp>
+      <p:sp>
+        <p:nvSpPr>
+          <p:cNvPr id="8" name="TextBox 7"/>
+          <p:cNvSpPr txBox="1"/>
+          <p:nvPr/>
+        </p:nvSpPr>
+        <p:spPr>
+          <a:xfrm>
+            <a:off x="731520" y="5669280"/>
+            <a:ext cx="10698480" cy="502920"/>
+          </a:xfrm>
+          <a:prstGeom prst="rect">
+            <a:avLst/>
+          </a:prstGeom>
+          <a:noFill/>
+        </p:spPr>
+        <p:txBody>
+          <a:bodyPr wrap="square">
+            <a:spAutoFit/>
+          </a:bodyPr>
+          <a:lstStyle/>
+          <a:p>
+            <a:pPr>
+              <a:defRPr sz="1100" b="1">
+                <a:solidFill>
+                  <a:srgbClr val="991B1B"/>
+                </a:solidFill>
+                <a:latin typeface="Inter"/>
+              </a:defRPr>
+            </a:pPr>
+            <a:r>
+              <a:t>Strategic Takeaway: Cross-selling proprietary software to Aequalis's client base bypasses early customer acquisition costs (CAC).</a:t>
+            </a:r>
+          </a:p>
+        </p:txBody>
+      </p:sp>
+      <p:sp>
+        <p:nvSpPr>
+          <p:cNvPr id="9" name="Rounded Rectangle 8"/>
+          <p:cNvSpPr/>
+          <p:nvPr/>
+        </p:nvSpPr>
+        <p:spPr>
+          <a:xfrm>
+            <a:off x="548640" y="1508760"/>
+            <a:ext cx="3332073" cy="3931920"/>
           </a:xfrm>
           <a:prstGeom prst="roundRect">
             <a:avLst/>
@@ -7290,14 +9253,14 @@
       </p:sp>
       <p:sp>
         <p:nvSpPr>
-          <p:cNvPr id="6" name="TextBox 5"/>
+          <p:cNvPr id="10" name="TextBox 9"/>
           <p:cNvSpPr txBox="1"/>
           <p:nvPr/>
         </p:nvSpPr>
         <p:spPr>
           <a:xfrm>
-            <a:off x="731520" y="1645920"/>
-            <a:ext cx="5029200" cy="3749039"/>
+            <a:off x="685800" y="1600200"/>
+            <a:ext cx="3057753" cy="3749039"/>
           </a:xfrm>
           <a:prstGeom prst="rect">
             <a:avLst/>
@@ -7312,9 +9275,9 @@
           <a:p>
             <a:pPr>
               <a:spcAft>
-                <a:spcPts val="1000"/>
+                <a:spcPts val="1400"/>
               </a:spcAft>
-              <a:defRPr sz="1400" b="1">
+              <a:defRPr sz="1300" b="1">
                 <a:solidFill>
                   <a:srgbClr val="0F2537"/>
                 </a:solidFill>
@@ -7322,13 +9285,13 @@
               </a:defRPr>
             </a:pPr>
             <a:r>
-              <a:t>Synergy Mechanics: JCS + Aequalis</a:t>
+              <a:t>1. Core Capability &amp; Pain</a:t>
             </a:r>
           </a:p>
           <a:p>
             <a:pPr>
               <a:spcAft>
-                <a:spcPts val="800"/>
+                <a:spcPts val="1200"/>
               </a:spcAft>
               <a:defRPr sz="1050">
                 <a:solidFill>
@@ -7338,53 +9301,64 @@
               </a:defRPr>
             </a:pPr>
             <a:r>
-              <a:t>• The Problem: Mid-market clients struggle with manual resume matching, resulting in high time-to-hire and talent drop-offs.</a:t>
-            </a:r>
-          </a:p>
-          <a:p>
-            <a:pPr>
-              <a:spcAft>
-                <a:spcPts val="800"/>
-              </a:spcAft>
-              <a:defRPr sz="1050">
-                <a:solidFill>
-                  <a:srgbClr val="1E293B"/>
-                </a:solidFill>
-                <a:latin typeface="Inter"/>
-              </a:defRPr>
-            </a:pPr>
-            <a:r>
-              <a:t>• The Synergy: JCS engineers build a custom AI matching and resume screening parser. Aequalis provides the domain validation and test database.</a:t>
-            </a:r>
-          </a:p>
-          <a:p>
-            <a:pPr>
-              <a:spcAft>
-                <a:spcPts val="800"/>
-              </a:spcAft>
-              <a:defRPr sz="1050">
-                <a:solidFill>
-                  <a:srgbClr val="1E293B"/>
-                </a:solidFill>
-                <a:latin typeface="Inter"/>
-              </a:defRPr>
-            </a:pPr>
-            <a:r>
-              <a:t>• Value Capture: Aequalis cross-sells the software to their existing corporate client base, securing subscription licensing fees.</a:t>
-            </a:r>
-          </a:p>
-        </p:txBody>
-      </p:sp>
-      <p:sp>
-        <p:nvSpPr>
-          <p:cNvPr id="7" name="Rounded Rectangle 6"/>
+              <a:t>Aequalis human recruiters manually read resumes, call candidates, and match profiles. Extremely slow, resource-heavy process. JCS has software engineers capable of automating screening pipelines.</a:t>
+            </a:r>
+          </a:p>
+        </p:txBody>
+      </p:sp>
+      <p:sp>
+        <p:nvSpPr>
+          <p:cNvPr id="11" name="Right Arrow 10"/>
           <p:cNvSpPr/>
           <p:nvPr/>
         </p:nvSpPr>
         <p:spPr>
           <a:xfrm>
-            <a:off x="6217920" y="1554480"/>
-            <a:ext cx="5394960" cy="3931920"/>
+            <a:off x="4017873" y="3291840"/>
+            <a:ext cx="274320" cy="182880"/>
+          </a:xfrm>
+          <a:prstGeom prst="rightArrow">
+            <a:avLst/>
+          </a:prstGeom>
+          <a:solidFill>
+            <a:srgbClr val="D60000"/>
+          </a:solidFill>
+          <a:ln>
+            <a:noFill/>
+          </a:ln>
+        </p:spPr>
+        <p:style>
+          <a:lnRef idx="1">
+            <a:schemeClr val="accent1"/>
+          </a:lnRef>
+          <a:fillRef idx="3">
+            <a:schemeClr val="accent1"/>
+          </a:fillRef>
+          <a:effectRef idx="2">
+            <a:schemeClr val="accent1"/>
+          </a:effectRef>
+          <a:fontRef idx="minor">
+            <a:schemeClr val="lt1"/>
+          </a:fontRef>
+        </p:style>
+        <p:txBody>
+          <a:bodyPr rtlCol="0" anchor="ctr"/>
+          <a:lstStyle/>
+          <a:p>
+            <a:pPr algn="ctr"/>
+          </a:p>
+        </p:txBody>
+      </p:sp>
+      <p:sp>
+        <p:nvSpPr>
+          <p:cNvPr id="12" name="Rounded Rectangle 11"/>
+          <p:cNvSpPr/>
+          <p:nvPr/>
+        </p:nvSpPr>
+        <p:spPr>
+          <a:xfrm>
+            <a:off x="4429353" y="1508760"/>
+            <a:ext cx="3332073" cy="3931920"/>
           </a:xfrm>
           <a:prstGeom prst="roundRect">
             <a:avLst/>
@@ -7422,14 +9396,14 @@
       </p:sp>
       <p:sp>
         <p:nvSpPr>
-          <p:cNvPr id="8" name="TextBox 7"/>
+          <p:cNvPr id="13" name="TextBox 12"/>
           <p:cNvSpPr txBox="1"/>
           <p:nvPr/>
         </p:nvSpPr>
         <p:spPr>
           <a:xfrm>
-            <a:off x="6400800" y="1645920"/>
-            <a:ext cx="5029200" cy="3749039"/>
+            <a:off x="4566513" y="1600200"/>
+            <a:ext cx="3057753" cy="3749039"/>
           </a:xfrm>
           <a:prstGeom prst="rect">
             <a:avLst/>
@@ -7444,9 +9418,9 @@
           <a:p>
             <a:pPr>
               <a:spcAft>
-                <a:spcPts val="1000"/>
+                <a:spcPts val="1400"/>
               </a:spcAft>
-              <a:defRPr sz="1400" b="1">
+              <a:defRPr sz="1300" b="1">
                 <a:solidFill>
                   <a:srgbClr val="0F2537"/>
                 </a:solidFill>
@@ -7454,13 +9428,13 @@
               </a:defRPr>
             </a:pPr>
             <a:r>
-              <a:t>Target Economics</a:t>
+              <a:t>2. The SaaS Solution</a:t>
             </a:r>
           </a:p>
           <a:p>
             <a:pPr>
               <a:spcAft>
-                <a:spcPts val="800"/>
+                <a:spcPts val="1200"/>
               </a:spcAft>
               <a:defRPr sz="1050">
                 <a:solidFill>
@@ -7470,98 +9444,23 @@
               </a:defRPr>
             </a:pPr>
             <a:r>
-              <a:t>• Operational Velocity: Automates the sourcing and screening process, saving recruiters 70% of manual effort.</a:t>
-            </a:r>
-          </a:p>
-          <a:p>
-            <a:pPr>
-              <a:spcAft>
-                <a:spcPts val="800"/>
-              </a:spcAft>
-              <a:defRPr sz="1050">
-                <a:solidFill>
-                  <a:srgbClr val="1E293B"/>
-                </a:solidFill>
-                <a:latin typeface="Inter"/>
-              </a:defRPr>
-            </a:pPr>
-            <a:r>
-              <a:t>• Zero Marketing CAC: Sold directly to current recruiting clients during the launch phase.</a:t>
-            </a:r>
-          </a:p>
-          <a:p>
-            <a:pPr>
-              <a:spcAft>
-                <a:spcPts val="800"/>
-              </a:spcAft>
-              <a:defRPr sz="1050">
-                <a:solidFill>
-                  <a:srgbClr val="1E293B"/>
-                </a:solidFill>
-                <a:latin typeface="Inter"/>
-              </a:defRPr>
-            </a:pPr>
-            <a:r>
-              <a:t>• High-Margin Stream: Captures $2,000+ monthly ARPU per enterprise client.</a:t>
-            </a:r>
-          </a:p>
-        </p:txBody>
-      </p:sp>
-      <p:sp>
-        <p:nvSpPr>
-          <p:cNvPr id="9" name="Rectangle 8"/>
+              <a:t>An automated applicant sourcing, screening, and matching platform. Integrates CV-matching algorithms to score candidates instantly. Aequalis cross-sells the platform to its corporate base.</a:t>
+            </a:r>
+          </a:p>
+        </p:txBody>
+      </p:sp>
+      <p:sp>
+        <p:nvSpPr>
+          <p:cNvPr id="14" name="Right Arrow 13"/>
           <p:cNvSpPr/>
           <p:nvPr/>
         </p:nvSpPr>
         <p:spPr>
           <a:xfrm>
-            <a:off x="548640" y="5623560"/>
-            <a:ext cx="11094415" cy="594360"/>
-          </a:xfrm>
-          <a:prstGeom prst="rect">
-            <a:avLst/>
-          </a:prstGeom>
-          <a:solidFill>
-            <a:srgbClr val="FEE4E6"/>
-          </a:solidFill>
-          <a:ln>
-            <a:noFill/>
-          </a:ln>
-        </p:spPr>
-        <p:style>
-          <a:lnRef idx="1">
-            <a:schemeClr val="accent1"/>
-          </a:lnRef>
-          <a:fillRef idx="3">
-            <a:schemeClr val="accent1"/>
-          </a:fillRef>
-          <a:effectRef idx="2">
-            <a:schemeClr val="accent1"/>
-          </a:effectRef>
-          <a:fontRef idx="minor">
-            <a:schemeClr val="lt1"/>
-          </a:fontRef>
-        </p:style>
-        <p:txBody>
-          <a:bodyPr rtlCol="0" anchor="ctr"/>
-          <a:lstStyle/>
-          <a:p>
-            <a:pPr algn="ctr"/>
-          </a:p>
-        </p:txBody>
-      </p:sp>
-      <p:sp>
-        <p:nvSpPr>
-          <p:cNvPr id="10" name="Rectangle 9"/>
-          <p:cNvSpPr/>
-          <p:nvPr/>
-        </p:nvSpPr>
-        <p:spPr>
-          <a:xfrm>
-            <a:off x="548640" y="5623560"/>
-            <a:ext cx="73152" cy="594360"/>
-          </a:xfrm>
-          <a:prstGeom prst="rect">
+            <a:off x="7898586" y="3291840"/>
+            <a:ext cx="274320" cy="182880"/>
+          </a:xfrm>
+          <a:prstGeom prst="rightArrow">
             <a:avLst/>
           </a:prstGeom>
           <a:solidFill>
@@ -7595,14 +9494,59 @@
       </p:sp>
       <p:sp>
         <p:nvSpPr>
-          <p:cNvPr id="11" name="TextBox 10"/>
+          <p:cNvPr id="15" name="Rounded Rectangle 14"/>
+          <p:cNvSpPr/>
+          <p:nvPr/>
+        </p:nvSpPr>
+        <p:spPr>
+          <a:xfrm>
+            <a:off x="8310066" y="1508760"/>
+            <a:ext cx="3332073" cy="3931920"/>
+          </a:xfrm>
+          <a:prstGeom prst="roundRect">
+            <a:avLst/>
+          </a:prstGeom>
+          <a:solidFill>
+            <a:srgbClr val="F8FAFC"/>
+          </a:solidFill>
+          <a:ln>
+            <a:solidFill>
+              <a:srgbClr val="0284C7"/>
+            </a:solidFill>
+          </a:ln>
+        </p:spPr>
+        <p:style>
+          <a:lnRef idx="1">
+            <a:schemeClr val="accent1"/>
+          </a:lnRef>
+          <a:fillRef idx="3">
+            <a:schemeClr val="accent1"/>
+          </a:fillRef>
+          <a:effectRef idx="2">
+            <a:schemeClr val="accent1"/>
+          </a:effectRef>
+          <a:fontRef idx="minor">
+            <a:schemeClr val="lt1"/>
+          </a:fontRef>
+        </p:style>
+        <p:txBody>
+          <a:bodyPr rtlCol="0" anchor="ctr"/>
+          <a:lstStyle/>
+          <a:p>
+            <a:pPr algn="ctr"/>
+          </a:p>
+        </p:txBody>
+      </p:sp>
+      <p:sp>
+        <p:nvSpPr>
+          <p:cNvPr id="16" name="TextBox 15"/>
           <p:cNvSpPr txBox="1"/>
           <p:nvPr/>
         </p:nvSpPr>
         <p:spPr>
           <a:xfrm>
-            <a:off x="731520" y="5669280"/>
-            <a:ext cx="10698480" cy="502920"/>
+            <a:off x="8447226" y="1600200"/>
+            <a:ext cx="3057753" cy="3749039"/>
           </a:xfrm>
           <a:prstGeom prst="rect">
             <a:avLst/>
@@ -7616,51 +9560,34 @@
           <a:lstStyle/>
           <a:p>
             <a:pPr>
-              <a:defRPr sz="1100" b="1">
-                <a:solidFill>
-                  <a:srgbClr val="991B1B"/>
+              <a:spcAft>
+                <a:spcPts val="1400"/>
+              </a:spcAft>
+              <a:defRPr sz="1300" b="1">
+                <a:solidFill>
+                  <a:srgbClr val="0284C7"/>
+                </a:solidFill>
+                <a:latin typeface="Outfit"/>
+              </a:defRPr>
+            </a:pPr>
+            <a:r>
+              <a:t>3. Target Economics</a:t>
+            </a:r>
+          </a:p>
+          <a:p>
+            <a:pPr>
+              <a:spcAft>
+                <a:spcPts val="1200"/>
+              </a:spcAft>
+              <a:defRPr sz="1050">
+                <a:solidFill>
+                  <a:srgbClr val="1E293B"/>
                 </a:solidFill>
                 <a:latin typeface="Inter"/>
               </a:defRPr>
             </a:pPr>
             <a:r>
-              <a:t>Strategic Takeaway: Cross-selling proprietary software to Aequalis's client base bypasses early customer acquisition costs (CAC).</a:t>
-            </a:r>
-          </a:p>
-        </p:txBody>
-      </p:sp>
-      <p:sp>
-        <p:nvSpPr>
-          <p:cNvPr id="12" name="TextBox 11"/>
-          <p:cNvSpPr txBox="1"/>
-          <p:nvPr/>
-        </p:nvSpPr>
-        <p:spPr>
-          <a:xfrm>
-            <a:off x="548640" y="6309360"/>
-            <a:ext cx="11094415" cy="320040"/>
-          </a:xfrm>
-          <a:prstGeom prst="rect">
-            <a:avLst/>
-          </a:prstGeom>
-          <a:noFill/>
-        </p:spPr>
-        <p:txBody>
-          <a:bodyPr wrap="none">
-            <a:spAutoFit/>
-          </a:bodyPr>
-          <a:lstStyle/>
-          <a:p>
-            <a:pPr>
-              <a:defRPr sz="850">
-                <a:solidFill>
-                  <a:srgbClr val="64748B"/>
-                </a:solidFill>
-                <a:latin typeface="Inter"/>
-              </a:defRPr>
-            </a:pPr>
-            <a:r>
-              <a:t>Jithvar Business Group Strategy Deck  |  Confidential  |  Slide 6 of 12</a:t>
+              <a:t>Saves recruiters 70% of manual effort. Warm cross-selling eliminates marketing CAC. Standard monthly subscription contract captures $2,000+ monthly ARPU per enterprise client.</a:t>
             </a:r>
           </a:p>
         </p:txBody>
@@ -7763,7 +9690,7 @@
         </p:nvSpPr>
         <p:spPr>
           <a:xfrm>
-            <a:off x="548640" y="1371600"/>
+            <a:off x="548640" y="1325880"/>
             <a:ext cx="11094415" cy="36576"/>
           </a:xfrm>
           <a:prstGeom prst="rect">
@@ -7800,14 +9727,172 @@
       </p:sp>
       <p:sp>
         <p:nvSpPr>
-          <p:cNvPr id="5" name="Rounded Rectangle 4"/>
+          <p:cNvPr id="5" name="TextBox 4"/>
+          <p:cNvSpPr txBox="1"/>
+          <p:nvPr/>
+        </p:nvSpPr>
+        <p:spPr>
+          <a:xfrm>
+            <a:off x="548640" y="6309360"/>
+            <a:ext cx="11094415" cy="320040"/>
+          </a:xfrm>
+          <a:prstGeom prst="rect">
+            <a:avLst/>
+          </a:prstGeom>
+          <a:noFill/>
+        </p:spPr>
+        <p:txBody>
+          <a:bodyPr wrap="none">
+            <a:spAutoFit/>
+          </a:bodyPr>
+          <a:lstStyle/>
+          <a:p>
+            <a:pPr>
+              <a:defRPr sz="850">
+                <a:solidFill>
+                  <a:srgbClr val="64748B"/>
+                </a:solidFill>
+                <a:latin typeface="Inter"/>
+              </a:defRPr>
+            </a:pPr>
+            <a:r>
+              <a:t>Jithvar Business Group Strategy Deck  |  Confidential  |  Slide 7 of 12</a:t>
+            </a:r>
+          </a:p>
+        </p:txBody>
+      </p:sp>
+      <p:sp>
+        <p:nvSpPr>
+          <p:cNvPr id="6" name="Rectangle 5"/>
           <p:cNvSpPr/>
           <p:nvPr/>
         </p:nvSpPr>
         <p:spPr>
           <a:xfrm>
-            <a:off x="548640" y="1554480"/>
-            <a:ext cx="5394960" cy="3931920"/>
+            <a:off x="548640" y="5623560"/>
+            <a:ext cx="11094415" cy="594360"/>
+          </a:xfrm>
+          <a:prstGeom prst="rect">
+            <a:avLst/>
+          </a:prstGeom>
+          <a:solidFill>
+            <a:srgbClr val="FEE4E6"/>
+          </a:solidFill>
+          <a:ln>
+            <a:noFill/>
+          </a:ln>
+        </p:spPr>
+        <p:style>
+          <a:lnRef idx="1">
+            <a:schemeClr val="accent1"/>
+          </a:lnRef>
+          <a:fillRef idx="3">
+            <a:schemeClr val="accent1"/>
+          </a:fillRef>
+          <a:effectRef idx="2">
+            <a:schemeClr val="accent1"/>
+          </a:effectRef>
+          <a:fontRef idx="minor">
+            <a:schemeClr val="lt1"/>
+          </a:fontRef>
+        </p:style>
+        <p:txBody>
+          <a:bodyPr rtlCol="0" anchor="ctr"/>
+          <a:lstStyle/>
+          <a:p>
+            <a:pPr algn="ctr"/>
+          </a:p>
+        </p:txBody>
+      </p:sp>
+      <p:sp>
+        <p:nvSpPr>
+          <p:cNvPr id="7" name="Rectangle 6"/>
+          <p:cNvSpPr/>
+          <p:nvPr/>
+        </p:nvSpPr>
+        <p:spPr>
+          <a:xfrm>
+            <a:off x="548640" y="5623560"/>
+            <a:ext cx="73152" cy="594360"/>
+          </a:xfrm>
+          <a:prstGeom prst="rect">
+            <a:avLst/>
+          </a:prstGeom>
+          <a:solidFill>
+            <a:srgbClr val="D60000"/>
+          </a:solidFill>
+          <a:ln>
+            <a:noFill/>
+          </a:ln>
+        </p:spPr>
+        <p:style>
+          <a:lnRef idx="1">
+            <a:schemeClr val="accent1"/>
+          </a:lnRef>
+          <a:fillRef idx="3">
+            <a:schemeClr val="accent1"/>
+          </a:fillRef>
+          <a:effectRef idx="2">
+            <a:schemeClr val="accent1"/>
+          </a:effectRef>
+          <a:fontRef idx="minor">
+            <a:schemeClr val="lt1"/>
+          </a:fontRef>
+        </p:style>
+        <p:txBody>
+          <a:bodyPr rtlCol="0" anchor="ctr"/>
+          <a:lstStyle/>
+          <a:p>
+            <a:pPr algn="ctr"/>
+          </a:p>
+        </p:txBody>
+      </p:sp>
+      <p:sp>
+        <p:nvSpPr>
+          <p:cNvPr id="8" name="TextBox 7"/>
+          <p:cNvSpPr txBox="1"/>
+          <p:nvPr/>
+        </p:nvSpPr>
+        <p:spPr>
+          <a:xfrm>
+            <a:off x="731520" y="5669280"/>
+            <a:ext cx="10698480" cy="502920"/>
+          </a:xfrm>
+          <a:prstGeom prst="rect">
+            <a:avLst/>
+          </a:prstGeom>
+          <a:noFill/>
+        </p:spPr>
+        <p:txBody>
+          <a:bodyPr wrap="square">
+            <a:spAutoFit/>
+          </a:bodyPr>
+          <a:lstStyle/>
+          <a:p>
+            <a:pPr>
+              <a:defRPr sz="1100" b="1">
+                <a:solidFill>
+                  <a:srgbClr val="991B1B"/>
+                </a:solidFill>
+                <a:latin typeface="Inter"/>
+              </a:defRPr>
+            </a:pPr>
+            <a:r>
+              <a:t>Strategic Takeaway: Bundling solar telemetry software turns Nature Grid's hardware sales into predictable recurring service revenue.</a:t>
+            </a:r>
+          </a:p>
+        </p:txBody>
+      </p:sp>
+      <p:sp>
+        <p:nvSpPr>
+          <p:cNvPr id="9" name="Rounded Rectangle 8"/>
+          <p:cNvSpPr/>
+          <p:nvPr/>
+        </p:nvSpPr>
+        <p:spPr>
+          <a:xfrm>
+            <a:off x="548640" y="1508760"/>
+            <a:ext cx="3332073" cy="3931920"/>
           </a:xfrm>
           <a:prstGeom prst="roundRect">
             <a:avLst/>
@@ -7845,14 +9930,14 @@
       </p:sp>
       <p:sp>
         <p:nvSpPr>
-          <p:cNvPr id="6" name="TextBox 5"/>
+          <p:cNvPr id="10" name="TextBox 9"/>
           <p:cNvSpPr txBox="1"/>
           <p:nvPr/>
         </p:nvSpPr>
         <p:spPr>
           <a:xfrm>
-            <a:off x="731520" y="1645920"/>
-            <a:ext cx="5029200" cy="3749039"/>
+            <a:off x="685800" y="1600200"/>
+            <a:ext cx="3057753" cy="3749039"/>
           </a:xfrm>
           <a:prstGeom prst="rect">
             <a:avLst/>
@@ -7867,9 +9952,9 @@
           <a:p>
             <a:pPr>
               <a:spcAft>
-                <a:spcPts val="1000"/>
+                <a:spcPts val="1400"/>
               </a:spcAft>
-              <a:defRPr sz="1400" b="1">
+              <a:defRPr sz="1300" b="1">
                 <a:solidFill>
                   <a:srgbClr val="0F2537"/>
                 </a:solidFill>
@@ -7877,13 +9962,13 @@
               </a:defRPr>
             </a:pPr>
             <a:r>
-              <a:t>Synergy Mechanics: JCS + Nature Grid</a:t>
+              <a:t>1. Core Capability &amp; Pain</a:t>
             </a:r>
           </a:p>
           <a:p>
             <a:pPr>
               <a:spcAft>
-                <a:spcPts val="800"/>
+                <a:spcPts val="1200"/>
               </a:spcAft>
               <a:defRPr sz="1050">
                 <a:solidFill>
@@ -7893,53 +9978,64 @@
               </a:defRPr>
             </a:pPr>
             <a:r>
-              <a:t>• The Problem: Commercial solar clients lack transparency into active panel degradation, energy yields, and system ROI.</a:t>
-            </a:r>
-          </a:p>
-          <a:p>
-            <a:pPr>
-              <a:spcAft>
-                <a:spcPts val="800"/>
-              </a:spcAft>
-              <a:defRPr sz="1050">
-                <a:solidFill>
-                  <a:srgbClr val="1E293B"/>
-                </a:solidFill>
-                <a:latin typeface="Inter"/>
-              </a:defRPr>
-            </a:pPr>
-            <a:r>
-              <a:t>• The Synergy: JCS builds a cloud-connected IoT telemetry platform. Nature Grid installs sensors and embeds the software.</a:t>
-            </a:r>
-          </a:p>
-          <a:p>
-            <a:pPr>
-              <a:spcAft>
-                <a:spcPts val="800"/>
-              </a:spcAft>
-              <a:defRPr sz="1050">
-                <a:solidFill>
-                  <a:srgbClr val="1E293B"/>
-                </a:solidFill>
-                <a:latin typeface="Inter"/>
-              </a:defRPr>
-            </a:pPr>
-            <a:r>
-              <a:t>• Value Capture: Bundles live monitoring and predictive maintenance services with all commercial solar panel installations.</a:t>
-            </a:r>
-          </a:p>
-        </p:txBody>
-      </p:sp>
-      <p:sp>
-        <p:nvSpPr>
-          <p:cNvPr id="7" name="Rounded Rectangle 6"/>
+              <a:t>Nature Grid solar panel installation contracts are one-time capital purchases. Customers lack transparency into active energy yields and degradation. JCS can design IoT analytics dashboards.</a:t>
+            </a:r>
+          </a:p>
+        </p:txBody>
+      </p:sp>
+      <p:sp>
+        <p:nvSpPr>
+          <p:cNvPr id="11" name="Right Arrow 10"/>
           <p:cNvSpPr/>
           <p:nvPr/>
         </p:nvSpPr>
         <p:spPr>
           <a:xfrm>
-            <a:off x="6217920" y="1554480"/>
-            <a:ext cx="5394960" cy="3931920"/>
+            <a:off x="4017873" y="3291840"/>
+            <a:ext cx="274320" cy="182880"/>
+          </a:xfrm>
+          <a:prstGeom prst="rightArrow">
+            <a:avLst/>
+          </a:prstGeom>
+          <a:solidFill>
+            <a:srgbClr val="D60000"/>
+          </a:solidFill>
+          <a:ln>
+            <a:noFill/>
+          </a:ln>
+        </p:spPr>
+        <p:style>
+          <a:lnRef idx="1">
+            <a:schemeClr val="accent1"/>
+          </a:lnRef>
+          <a:fillRef idx="3">
+            <a:schemeClr val="accent1"/>
+          </a:fillRef>
+          <a:effectRef idx="2">
+            <a:schemeClr val="accent1"/>
+          </a:effectRef>
+          <a:fontRef idx="minor">
+            <a:schemeClr val="lt1"/>
+          </a:fontRef>
+        </p:style>
+        <p:txBody>
+          <a:bodyPr rtlCol="0" anchor="ctr"/>
+          <a:lstStyle/>
+          <a:p>
+            <a:pPr algn="ctr"/>
+          </a:p>
+        </p:txBody>
+      </p:sp>
+      <p:sp>
+        <p:nvSpPr>
+          <p:cNvPr id="12" name="Rounded Rectangle 11"/>
+          <p:cNvSpPr/>
+          <p:nvPr/>
+        </p:nvSpPr>
+        <p:spPr>
+          <a:xfrm>
+            <a:off x="4429353" y="1508760"/>
+            <a:ext cx="3332073" cy="3931920"/>
           </a:xfrm>
           <a:prstGeom prst="roundRect">
             <a:avLst/>
@@ -7977,14 +10073,14 @@
       </p:sp>
       <p:sp>
         <p:nvSpPr>
-          <p:cNvPr id="8" name="TextBox 7"/>
+          <p:cNvPr id="13" name="TextBox 12"/>
           <p:cNvSpPr txBox="1"/>
           <p:nvPr/>
         </p:nvSpPr>
         <p:spPr>
           <a:xfrm>
-            <a:off x="6400800" y="1645920"/>
-            <a:ext cx="5029200" cy="3749039"/>
+            <a:off x="4566513" y="1600200"/>
+            <a:ext cx="3057753" cy="3749039"/>
           </a:xfrm>
           <a:prstGeom prst="rect">
             <a:avLst/>
@@ -7999,9 +10095,9 @@
           <a:p>
             <a:pPr>
               <a:spcAft>
-                <a:spcPts val="1000"/>
+                <a:spcPts val="1400"/>
               </a:spcAft>
-              <a:defRPr sz="1400" b="1">
+              <a:defRPr sz="1300" b="1">
                 <a:solidFill>
                   <a:srgbClr val="0F2537"/>
                 </a:solidFill>
@@ -8009,13 +10105,13 @@
               </a:defRPr>
             </a:pPr>
             <a:r>
-              <a:t>Commercial Impact</a:t>
+              <a:t>2. The SaaS Solution</a:t>
             </a:r>
           </a:p>
           <a:p>
             <a:pPr>
               <a:spcAft>
-                <a:spcPts val="800"/>
+                <a:spcPts val="1200"/>
               </a:spcAft>
               <a:defRPr sz="1050">
                 <a:solidFill>
@@ -8025,98 +10121,23 @@
               </a:defRPr>
             </a:pPr>
             <a:r>
-              <a:t>• Stable O&amp;M Retainers: Alerts auto-detect dust and panel issues, allowing Nature Grid to dispatch O&amp;M cleaning crews.</a:t>
-            </a:r>
-          </a:p>
-          <a:p>
-            <a:pPr>
-              <a:spcAft>
-                <a:spcPts val="800"/>
-              </a:spcAft>
-              <a:defRPr sz="1050">
-                <a:solidFill>
-                  <a:srgbClr val="1E293B"/>
-                </a:solidFill>
-                <a:latin typeface="Inter"/>
-              </a:defRPr>
-            </a:pPr>
-            <a:r>
-              <a:t>• Performance Yields: Increases solar output by up to 15% through predictive servicing.</a:t>
-            </a:r>
-          </a:p>
-          <a:p>
-            <a:pPr>
-              <a:spcAft>
-                <a:spcPts val="800"/>
-              </a:spcAft>
-              <a:defRPr sz="1050">
-                <a:solidFill>
-                  <a:srgbClr val="1E293B"/>
-                </a:solidFill>
-                <a:latin typeface="Inter"/>
-              </a:defRPr>
-            </a:pPr>
-            <a:r>
-              <a:t>• Recurring Revenue: Turns transactional hardware sales into multi-year software-supported service agreements.</a:t>
-            </a:r>
-          </a:p>
-        </p:txBody>
-      </p:sp>
-      <p:sp>
-        <p:nvSpPr>
-          <p:cNvPr id="9" name="Rectangle 8"/>
+              <a:t>An IoT monitoring panel telemetry software. Tracks active output (kW) and daily counts (kWh). Automatically detects dust, triggering cleanings and scheduling maintenance dispatches.</a:t>
+            </a:r>
+          </a:p>
+        </p:txBody>
+      </p:sp>
+      <p:sp>
+        <p:nvSpPr>
+          <p:cNvPr id="14" name="Right Arrow 13"/>
           <p:cNvSpPr/>
           <p:nvPr/>
         </p:nvSpPr>
         <p:spPr>
           <a:xfrm>
-            <a:off x="548640" y="5623560"/>
-            <a:ext cx="11094415" cy="594360"/>
-          </a:xfrm>
-          <a:prstGeom prst="rect">
-            <a:avLst/>
-          </a:prstGeom>
-          <a:solidFill>
-            <a:srgbClr val="FEE4E6"/>
-          </a:solidFill>
-          <a:ln>
-            <a:noFill/>
-          </a:ln>
-        </p:spPr>
-        <p:style>
-          <a:lnRef idx="1">
-            <a:schemeClr val="accent1"/>
-          </a:lnRef>
-          <a:fillRef idx="3">
-            <a:schemeClr val="accent1"/>
-          </a:fillRef>
-          <a:effectRef idx="2">
-            <a:schemeClr val="accent1"/>
-          </a:effectRef>
-          <a:fontRef idx="minor">
-            <a:schemeClr val="lt1"/>
-          </a:fontRef>
-        </p:style>
-        <p:txBody>
-          <a:bodyPr rtlCol="0" anchor="ctr"/>
-          <a:lstStyle/>
-          <a:p>
-            <a:pPr algn="ctr"/>
-          </a:p>
-        </p:txBody>
-      </p:sp>
-      <p:sp>
-        <p:nvSpPr>
-          <p:cNvPr id="10" name="Rectangle 9"/>
-          <p:cNvSpPr/>
-          <p:nvPr/>
-        </p:nvSpPr>
-        <p:spPr>
-          <a:xfrm>
-            <a:off x="548640" y="5623560"/>
-            <a:ext cx="73152" cy="594360"/>
-          </a:xfrm>
-          <a:prstGeom prst="rect">
+            <a:off x="7898586" y="3291840"/>
+            <a:ext cx="274320" cy="182880"/>
+          </a:xfrm>
+          <a:prstGeom prst="rightArrow">
             <a:avLst/>
           </a:prstGeom>
           <a:solidFill>
@@ -8150,14 +10171,59 @@
       </p:sp>
       <p:sp>
         <p:nvSpPr>
-          <p:cNvPr id="11" name="TextBox 10"/>
+          <p:cNvPr id="15" name="Rounded Rectangle 14"/>
+          <p:cNvSpPr/>
+          <p:nvPr/>
+        </p:nvSpPr>
+        <p:spPr>
+          <a:xfrm>
+            <a:off x="8310066" y="1508760"/>
+            <a:ext cx="3332073" cy="3931920"/>
+          </a:xfrm>
+          <a:prstGeom prst="roundRect">
+            <a:avLst/>
+          </a:prstGeom>
+          <a:solidFill>
+            <a:srgbClr val="F8FAFC"/>
+          </a:solidFill>
+          <a:ln>
+            <a:solidFill>
+              <a:srgbClr val="0284C7"/>
+            </a:solidFill>
+          </a:ln>
+        </p:spPr>
+        <p:style>
+          <a:lnRef idx="1">
+            <a:schemeClr val="accent1"/>
+          </a:lnRef>
+          <a:fillRef idx="3">
+            <a:schemeClr val="accent1"/>
+          </a:fillRef>
+          <a:effectRef idx="2">
+            <a:schemeClr val="accent1"/>
+          </a:effectRef>
+          <a:fontRef idx="minor">
+            <a:schemeClr val="lt1"/>
+          </a:fontRef>
+        </p:style>
+        <p:txBody>
+          <a:bodyPr rtlCol="0" anchor="ctr"/>
+          <a:lstStyle/>
+          <a:p>
+            <a:pPr algn="ctr"/>
+          </a:p>
+        </p:txBody>
+      </p:sp>
+      <p:sp>
+        <p:nvSpPr>
+          <p:cNvPr id="16" name="TextBox 15"/>
           <p:cNvSpPr txBox="1"/>
           <p:nvPr/>
         </p:nvSpPr>
         <p:spPr>
           <a:xfrm>
-            <a:off x="731520" y="5669280"/>
-            <a:ext cx="10698480" cy="502920"/>
+            <a:off x="8447226" y="1600200"/>
+            <a:ext cx="3057753" cy="3749039"/>
           </a:xfrm>
           <a:prstGeom prst="rect">
             <a:avLst/>
@@ -8171,51 +10237,34 @@
           <a:lstStyle/>
           <a:p>
             <a:pPr>
-              <a:defRPr sz="1100" b="1">
-                <a:solidFill>
-                  <a:srgbClr val="991B1B"/>
+              <a:spcAft>
+                <a:spcPts val="1400"/>
+              </a:spcAft>
+              <a:defRPr sz="1300" b="1">
+                <a:solidFill>
+                  <a:srgbClr val="0284C7"/>
+                </a:solidFill>
+                <a:latin typeface="Outfit"/>
+              </a:defRPr>
+            </a:pPr>
+            <a:r>
+              <a:t>3. Target Economics</a:t>
+            </a:r>
+          </a:p>
+          <a:p>
+            <a:pPr>
+              <a:spcAft>
+                <a:spcPts val="1200"/>
+              </a:spcAft>
+              <a:defRPr sz="1050">
+                <a:solidFill>
+                  <a:srgbClr val="1E293B"/>
                 </a:solidFill>
                 <a:latin typeface="Inter"/>
               </a:defRPr>
             </a:pPr>
             <a:r>
-              <a:t>Strategic Takeaway: Bundling solar telemetry software turns Nature Grid's hardware sales into predictable recurring service revenue.</a:t>
-            </a:r>
-          </a:p>
-        </p:txBody>
-      </p:sp>
-      <p:sp>
-        <p:nvSpPr>
-          <p:cNvPr id="12" name="TextBox 11"/>
-          <p:cNvSpPr txBox="1"/>
-          <p:nvPr/>
-        </p:nvSpPr>
-        <p:spPr>
-          <a:xfrm>
-            <a:off x="548640" y="6309360"/>
-            <a:ext cx="11094415" cy="320040"/>
-          </a:xfrm>
-          <a:prstGeom prst="rect">
-            <a:avLst/>
-          </a:prstGeom>
-          <a:noFill/>
-        </p:spPr>
-        <p:txBody>
-          <a:bodyPr wrap="none">
-            <a:spAutoFit/>
-          </a:bodyPr>
-          <a:lstStyle/>
-          <a:p>
-            <a:pPr>
-              <a:defRPr sz="850">
-                <a:solidFill>
-                  <a:srgbClr val="64748B"/>
-                </a:solidFill>
-                <a:latin typeface="Inter"/>
-              </a:defRPr>
-            </a:pPr>
-            <a:r>
-              <a:t>Jithvar Business Group Strategy Deck  |  Confidential  |  Slide 7 of 12</a:t>
+              <a:t>Secures multi-year predictive maintenance agreements. Boosts panel yields by 15%, transforming transactional sales into high-margin recurring retainers.</a:t>
             </a:r>
           </a:p>
         </p:txBody>
@@ -8318,7 +10367,7 @@
         </p:nvSpPr>
         <p:spPr>
           <a:xfrm>
-            <a:off x="548640" y="1371600"/>
+            <a:off x="548640" y="1325880"/>
             <a:ext cx="11094415" cy="36576"/>
           </a:xfrm>
           <a:prstGeom prst="rect">
@@ -8355,13 +10404,171 @@
       </p:sp>
       <p:sp>
         <p:nvSpPr>
-          <p:cNvPr id="5" name="Rounded Rectangle 4"/>
+          <p:cNvPr id="5" name="TextBox 4"/>
+          <p:cNvSpPr txBox="1"/>
+          <p:nvPr/>
+        </p:nvSpPr>
+        <p:spPr>
+          <a:xfrm>
+            <a:off x="548640" y="6309360"/>
+            <a:ext cx="11094415" cy="320040"/>
+          </a:xfrm>
+          <a:prstGeom prst="rect">
+            <a:avLst/>
+          </a:prstGeom>
+          <a:noFill/>
+        </p:spPr>
+        <p:txBody>
+          <a:bodyPr wrap="none">
+            <a:spAutoFit/>
+          </a:bodyPr>
+          <a:lstStyle/>
+          <a:p>
+            <a:pPr>
+              <a:defRPr sz="850">
+                <a:solidFill>
+                  <a:srgbClr val="64748B"/>
+                </a:solidFill>
+                <a:latin typeface="Inter"/>
+              </a:defRPr>
+            </a:pPr>
+            <a:r>
+              <a:t>Jithvar Business Group Strategy Deck  |  Confidential  |  Slide 8 of 12</a:t>
+            </a:r>
+          </a:p>
+        </p:txBody>
+      </p:sp>
+      <p:sp>
+        <p:nvSpPr>
+          <p:cNvPr id="6" name="Rectangle 5"/>
           <p:cNvSpPr/>
           <p:nvPr/>
         </p:nvSpPr>
         <p:spPr>
           <a:xfrm>
-            <a:off x="548640" y="1554480"/>
+            <a:off x="548640" y="5623560"/>
+            <a:ext cx="11094415" cy="594360"/>
+          </a:xfrm>
+          <a:prstGeom prst="rect">
+            <a:avLst/>
+          </a:prstGeom>
+          <a:solidFill>
+            <a:srgbClr val="FEE4E6"/>
+          </a:solidFill>
+          <a:ln>
+            <a:noFill/>
+          </a:ln>
+        </p:spPr>
+        <p:style>
+          <a:lnRef idx="1">
+            <a:schemeClr val="accent1"/>
+          </a:lnRef>
+          <a:fillRef idx="3">
+            <a:schemeClr val="accent1"/>
+          </a:fillRef>
+          <a:effectRef idx="2">
+            <a:schemeClr val="accent1"/>
+          </a:effectRef>
+          <a:fontRef idx="minor">
+            <a:schemeClr val="lt1"/>
+          </a:fontRef>
+        </p:style>
+        <p:txBody>
+          <a:bodyPr rtlCol="0" anchor="ctr"/>
+          <a:lstStyle/>
+          <a:p>
+            <a:pPr algn="ctr"/>
+          </a:p>
+        </p:txBody>
+      </p:sp>
+      <p:sp>
+        <p:nvSpPr>
+          <p:cNvPr id="7" name="Rectangle 6"/>
+          <p:cNvSpPr/>
+          <p:nvPr/>
+        </p:nvSpPr>
+        <p:spPr>
+          <a:xfrm>
+            <a:off x="548640" y="5623560"/>
+            <a:ext cx="73152" cy="594360"/>
+          </a:xfrm>
+          <a:prstGeom prst="rect">
+            <a:avLst/>
+          </a:prstGeom>
+          <a:solidFill>
+            <a:srgbClr val="D60000"/>
+          </a:solidFill>
+          <a:ln>
+            <a:noFill/>
+          </a:ln>
+        </p:spPr>
+        <p:style>
+          <a:lnRef idx="1">
+            <a:schemeClr val="accent1"/>
+          </a:lnRef>
+          <a:fillRef idx="3">
+            <a:schemeClr val="accent1"/>
+          </a:fillRef>
+          <a:effectRef idx="2">
+            <a:schemeClr val="accent1"/>
+          </a:effectRef>
+          <a:fontRef idx="minor">
+            <a:schemeClr val="lt1"/>
+          </a:fontRef>
+        </p:style>
+        <p:txBody>
+          <a:bodyPr rtlCol="0" anchor="ctr"/>
+          <a:lstStyle/>
+          <a:p>
+            <a:pPr algn="ctr"/>
+          </a:p>
+        </p:txBody>
+      </p:sp>
+      <p:sp>
+        <p:nvSpPr>
+          <p:cNvPr id="8" name="TextBox 7"/>
+          <p:cNvSpPr txBox="1"/>
+          <p:nvPr/>
+        </p:nvSpPr>
+        <p:spPr>
+          <a:xfrm>
+            <a:off x="731520" y="5669280"/>
+            <a:ext cx="10698480" cy="502920"/>
+          </a:xfrm>
+          <a:prstGeom prst="rect">
+            <a:avLst/>
+          </a:prstGeom>
+          <a:noFill/>
+        </p:spPr>
+        <p:txBody>
+          <a:bodyPr wrap="square">
+            <a:spAutoFit/>
+          </a:bodyPr>
+          <a:lstStyle/>
+          <a:p>
+            <a:pPr>
+              <a:defRPr sz="1100" b="1">
+                <a:solidFill>
+                  <a:srgbClr val="991B1B"/>
+                </a:solidFill>
+                <a:latin typeface="Inter"/>
+              </a:defRPr>
+            </a:pPr>
+            <a:r>
+              <a:t>Strategic Takeaway: Productizing integration components scales JCS revenues without a linear increase in developer headcount.</a:t>
+            </a:r>
+          </a:p>
+        </p:txBody>
+      </p:sp>
+      <p:sp>
+        <p:nvSpPr>
+          <p:cNvPr id="9" name="Rounded Rectangle 8"/>
+          <p:cNvSpPr/>
+          <p:nvPr/>
+        </p:nvSpPr>
+        <p:spPr>
+          <a:xfrm>
+            <a:off x="548640" y="1508760"/>
             <a:ext cx="5394960" cy="3931920"/>
           </a:xfrm>
           <a:prstGeom prst="roundRect">
@@ -8400,13 +10607,13 @@
       </p:sp>
       <p:sp>
         <p:nvSpPr>
-          <p:cNvPr id="6" name="TextBox 5"/>
+          <p:cNvPr id="10" name="TextBox 9"/>
           <p:cNvSpPr txBox="1"/>
           <p:nvPr/>
         </p:nvSpPr>
         <p:spPr>
           <a:xfrm>
-            <a:off x="731520" y="1645920"/>
+            <a:off x="731520" y="1600200"/>
             <a:ext cx="5029200" cy="3749039"/>
           </a:xfrm>
           <a:prstGeom prst="rect">
@@ -8422,7 +10629,23 @@
           <a:p>
             <a:pPr>
               <a:spcAft>
-                <a:spcPts val="1000"/>
+                <a:spcPts val="400"/>
+              </a:spcAft>
+              <a:defRPr sz="850" b="1">
+                <a:solidFill>
+                  <a:srgbClr val="64748B"/>
+                </a:solidFill>
+                <a:latin typeface="Inter"/>
+              </a:defRPr>
+            </a:pPr>
+            <a:r>
+              <a:t>[LEGACY SERVICES MODEL]</a:t>
+            </a:r>
+          </a:p>
+          <a:p>
+            <a:pPr>
+              <a:spcAft>
+                <a:spcPts val="1200"/>
               </a:spcAft>
               <a:defRPr sz="1400" b="1">
                 <a:solidFill>
@@ -8432,7 +10655,7 @@
               </a:defRPr>
             </a:pPr>
             <a:r>
-              <a:t>The Productization Shift</a:t>
+              <a:t>Custom IT Development Projects</a:t>
             </a:r>
           </a:p>
           <a:p>
@@ -8440,7 +10663,7 @@
               <a:spcAft>
                 <a:spcPts val="800"/>
               </a:spcAft>
-              <a:defRPr sz="1050">
+              <a:defRPr sz="1000">
                 <a:solidFill>
                   <a:srgbClr val="1E293B"/>
                 </a:solidFill>
@@ -8448,7 +10671,7 @@
               </a:defRPr>
             </a:pPr>
             <a:r>
-              <a:t>• Custom Dev Limits: Traditional software consulting requires bespoke builds for every client, bounding revenues to developer headcount.</a:t>
+              <a:t>• Every software client contract requires custom coding from scratch.</a:t>
             </a:r>
           </a:p>
           <a:p>
@@ -8456,7 +10679,7 @@
               <a:spcAft>
                 <a:spcPts val="800"/>
               </a:spcAft>
-              <a:defRPr sz="1050">
+              <a:defRPr sz="1000">
                 <a:solidFill>
                   <a:srgbClr val="1E293B"/>
                 </a:solidFill>
@@ -8464,7 +10687,7 @@
               </a:defRPr>
             </a:pPr>
             <a:r>
-              <a:t>• The Strategy: Package common ERP-to-CRM connectors, database layers, and automation workflows into a marketplace.</a:t>
+              <a:t>• Requires linear developer hiring to grow group consulting revenues.</a:t>
             </a:r>
           </a:p>
           <a:p>
@@ -8472,7 +10695,7 @@
               <a:spcAft>
                 <a:spcPts val="800"/>
               </a:spcAft>
-              <a:defRPr sz="1050">
+              <a:defRPr sz="1000">
                 <a:solidFill>
                   <a:srgbClr val="1E293B"/>
                 </a:solidFill>
@@ -8480,31 +10703,31 @@
               </a:defRPr>
             </a:pPr>
             <a:r>
-              <a:t>• Enterprise Licensing: License templates to mid-market developers, securing high-margin digital asset revenue.</a:t>
-            </a:r>
-          </a:p>
-        </p:txBody>
-      </p:sp>
-      <p:sp>
-        <p:nvSpPr>
-          <p:cNvPr id="7" name="Rounded Rectangle 6"/>
+              <a:t>• Low overall operational margin due to labor-intensive deployment scripts.</a:t>
+            </a:r>
+          </a:p>
+        </p:txBody>
+      </p:sp>
+      <p:sp>
+        <p:nvSpPr>
+          <p:cNvPr id="11" name="Rounded Rectangle 10"/>
           <p:cNvSpPr/>
           <p:nvPr/>
         </p:nvSpPr>
         <p:spPr>
           <a:xfrm>
-            <a:off x="6217920" y="1554480"/>
+            <a:off x="6248095" y="1508760"/>
             <a:ext cx="5394960" cy="3931920"/>
           </a:xfrm>
           <a:prstGeom prst="roundRect">
             <a:avLst/>
           </a:prstGeom>
           <a:solidFill>
-            <a:srgbClr val="F8FAFC"/>
+            <a:srgbClr val="FEE4E6"/>
           </a:solidFill>
           <a:ln>
             <a:solidFill>
-              <a:srgbClr val="CBD5E1"/>
+              <a:srgbClr val="D60000"/>
             </a:solidFill>
           </a:ln>
         </p:spPr>
@@ -8532,13 +10755,13 @@
       </p:sp>
       <p:sp>
         <p:nvSpPr>
-          <p:cNvPr id="8" name="TextBox 7"/>
+          <p:cNvPr id="12" name="TextBox 11"/>
           <p:cNvSpPr txBox="1"/>
           <p:nvPr/>
         </p:nvSpPr>
         <p:spPr>
           <a:xfrm>
-            <a:off x="6400800" y="1645920"/>
+            <a:off x="6430975" y="1600200"/>
             <a:ext cx="5029200" cy="3749039"/>
           </a:xfrm>
           <a:prstGeom prst="rect">
@@ -8554,7 +10777,23 @@
           <a:p>
             <a:pPr>
               <a:spcAft>
-                <a:spcPts val="1000"/>
+                <a:spcPts val="400"/>
+              </a:spcAft>
+              <a:defRPr sz="850" b="1">
+                <a:solidFill>
+                  <a:srgbClr val="D60000"/>
+                </a:solidFill>
+                <a:latin typeface="Inter"/>
+              </a:defRPr>
+            </a:pPr>
+            <a:r>
+              <a:t>[PRODUCTIZED PLATFORM STRATEGY]</a:t>
+            </a:r>
+          </a:p>
+          <a:p>
+            <a:pPr>
+              <a:spcAft>
+                <a:spcPts val="1200"/>
               </a:spcAft>
               <a:defRPr sz="1400" b="1">
                 <a:solidFill>
@@ -8564,7 +10803,7 @@
               </a:defRPr>
             </a:pPr>
             <a:r>
-              <a:t>Operational Benefits</a:t>
+              <a:t>Reusable API Connector Marketplace</a:t>
             </a:r>
           </a:p>
           <a:p>
@@ -8572,7 +10811,7 @@
               <a:spcAft>
                 <a:spcPts val="800"/>
               </a:spcAft>
-              <a:defRPr sz="1050">
+              <a:defRPr sz="1000">
                 <a:solidFill>
                   <a:srgbClr val="1E293B"/>
                 </a:solidFill>
@@ -8580,7 +10819,7 @@
               </a:defRPr>
             </a:pPr>
             <a:r>
-              <a:t>• Delivery Velocity: Shrinks client customization delivery times by 50%.</a:t>
+              <a:t>• Package CRM/ERP connector configurations into standard enterprise templates.</a:t>
             </a:r>
           </a:p>
           <a:p>
@@ -8588,7 +10827,7 @@
               <a:spcAft>
                 <a:spcPts val="800"/>
               </a:spcAft>
-              <a:defRPr sz="1050">
+              <a:defRPr sz="1000">
                 <a:solidFill>
                   <a:srgbClr val="1E293B"/>
                 </a:solidFill>
@@ -8596,7 +10835,7 @@
               </a:defRPr>
             </a:pPr>
             <a:r>
-              <a:t>• Developer Leverage: Developer capacity doubles as engineers reuse pre-packaged scripts rather than rewriting code.</a:t>
+              <a:t>• Shrinks client custom integration delivery times by 50%.</a:t>
             </a:r>
           </a:p>
           <a:p>
@@ -8604,7 +10843,7 @@
               <a:spcAft>
                 <a:spcPts val="800"/>
               </a:spcAft>
-              <a:defRPr sz="1050">
+              <a:defRPr sz="1000">
                 <a:solidFill>
                   <a:srgbClr val="1E293B"/>
                 </a:solidFill>
@@ -8612,165 +10851,7 @@
               </a:defRPr>
             </a:pPr>
             <a:r>
-              <a:t>• Scale: Allows JCS to bid on larger contracts without needing immediate hiring.</a:t>
-            </a:r>
-          </a:p>
-        </p:txBody>
-      </p:sp>
-      <p:sp>
-        <p:nvSpPr>
-          <p:cNvPr id="9" name="Rectangle 8"/>
-          <p:cNvSpPr/>
-          <p:nvPr/>
-        </p:nvSpPr>
-        <p:spPr>
-          <a:xfrm>
-            <a:off x="548640" y="5623560"/>
-            <a:ext cx="11094415" cy="594360"/>
-          </a:xfrm>
-          <a:prstGeom prst="rect">
-            <a:avLst/>
-          </a:prstGeom>
-          <a:solidFill>
-            <a:srgbClr val="FEE4E6"/>
-          </a:solidFill>
-          <a:ln>
-            <a:noFill/>
-          </a:ln>
-        </p:spPr>
-        <p:style>
-          <a:lnRef idx="1">
-            <a:schemeClr val="accent1"/>
-          </a:lnRef>
-          <a:fillRef idx="3">
-            <a:schemeClr val="accent1"/>
-          </a:fillRef>
-          <a:effectRef idx="2">
-            <a:schemeClr val="accent1"/>
-          </a:effectRef>
-          <a:fontRef idx="minor">
-            <a:schemeClr val="lt1"/>
-          </a:fontRef>
-        </p:style>
-        <p:txBody>
-          <a:bodyPr rtlCol="0" anchor="ctr"/>
-          <a:lstStyle/>
-          <a:p>
-            <a:pPr algn="ctr"/>
-          </a:p>
-        </p:txBody>
-      </p:sp>
-      <p:sp>
-        <p:nvSpPr>
-          <p:cNvPr id="10" name="Rectangle 9"/>
-          <p:cNvSpPr/>
-          <p:nvPr/>
-        </p:nvSpPr>
-        <p:spPr>
-          <a:xfrm>
-            <a:off x="548640" y="5623560"/>
-            <a:ext cx="73152" cy="594360"/>
-          </a:xfrm>
-          <a:prstGeom prst="rect">
-            <a:avLst/>
-          </a:prstGeom>
-          <a:solidFill>
-            <a:srgbClr val="D60000"/>
-          </a:solidFill>
-          <a:ln>
-            <a:noFill/>
-          </a:ln>
-        </p:spPr>
-        <p:style>
-          <a:lnRef idx="1">
-            <a:schemeClr val="accent1"/>
-          </a:lnRef>
-          <a:fillRef idx="3">
-            <a:schemeClr val="accent1"/>
-          </a:fillRef>
-          <a:effectRef idx="2">
-            <a:schemeClr val="accent1"/>
-          </a:effectRef>
-          <a:fontRef idx="minor">
-            <a:schemeClr val="lt1"/>
-          </a:fontRef>
-        </p:style>
-        <p:txBody>
-          <a:bodyPr rtlCol="0" anchor="ctr"/>
-          <a:lstStyle/>
-          <a:p>
-            <a:pPr algn="ctr"/>
-          </a:p>
-        </p:txBody>
-      </p:sp>
-      <p:sp>
-        <p:nvSpPr>
-          <p:cNvPr id="11" name="TextBox 10"/>
-          <p:cNvSpPr txBox="1"/>
-          <p:nvPr/>
-        </p:nvSpPr>
-        <p:spPr>
-          <a:xfrm>
-            <a:off x="731520" y="5669280"/>
-            <a:ext cx="10698480" cy="502920"/>
-          </a:xfrm>
-          <a:prstGeom prst="rect">
-            <a:avLst/>
-          </a:prstGeom>
-          <a:noFill/>
-        </p:spPr>
-        <p:txBody>
-          <a:bodyPr wrap="square">
-            <a:spAutoFit/>
-          </a:bodyPr>
-          <a:lstStyle/>
-          <a:p>
-            <a:pPr>
-              <a:defRPr sz="1100" b="1">
-                <a:solidFill>
-                  <a:srgbClr val="991B1B"/>
-                </a:solidFill>
-                <a:latin typeface="Inter"/>
-              </a:defRPr>
-            </a:pPr>
-            <a:r>
-              <a:t>Strategic Takeaway: Productizing integration components scales JCS revenues without a linear increase in developer headcount.</a:t>
-            </a:r>
-          </a:p>
-        </p:txBody>
-      </p:sp>
-      <p:sp>
-        <p:nvSpPr>
-          <p:cNvPr id="12" name="TextBox 11"/>
-          <p:cNvSpPr txBox="1"/>
-          <p:nvPr/>
-        </p:nvSpPr>
-        <p:spPr>
-          <a:xfrm>
-            <a:off x="548640" y="6309360"/>
-            <a:ext cx="11094415" cy="320040"/>
-          </a:xfrm>
-          <a:prstGeom prst="rect">
-            <a:avLst/>
-          </a:prstGeom>
-          <a:noFill/>
-        </p:spPr>
-        <p:txBody>
-          <a:bodyPr wrap="none">
-            <a:spAutoFit/>
-          </a:bodyPr>
-          <a:lstStyle/>
-          <a:p>
-            <a:pPr>
-              <a:defRPr sz="850">
-                <a:solidFill>
-                  <a:srgbClr val="64748B"/>
-                </a:solidFill>
-                <a:latin typeface="Inter"/>
-              </a:defRPr>
-            </a:pPr>
-            <a:r>
-              <a:t>Jithvar Business Group Strategy Deck  |  Confidential  |  Slide 8 of 12</a:t>
+              <a:t>• Developer capacity doubles as engineers reuse pre-built API marketplace scripts.</a:t>
             </a:r>
           </a:p>
         </p:txBody>
@@ -8873,7 +10954,7 @@
         </p:nvSpPr>
         <p:spPr>
           <a:xfrm>
-            <a:off x="548640" y="1371600"/>
+            <a:off x="548640" y="1325880"/>
             <a:ext cx="11094415" cy="36576"/>
           </a:xfrm>
           <a:prstGeom prst="rect">
@@ -8910,14 +10991,172 @@
       </p:sp>
       <p:sp>
         <p:nvSpPr>
-          <p:cNvPr id="5" name="Rounded Rectangle 4"/>
+          <p:cNvPr id="5" name="TextBox 4"/>
+          <p:cNvSpPr txBox="1"/>
+          <p:nvPr/>
+        </p:nvSpPr>
+        <p:spPr>
+          <a:xfrm>
+            <a:off x="548640" y="6309360"/>
+            <a:ext cx="11094415" cy="320040"/>
+          </a:xfrm>
+          <a:prstGeom prst="rect">
+            <a:avLst/>
+          </a:prstGeom>
+          <a:noFill/>
+        </p:spPr>
+        <p:txBody>
+          <a:bodyPr wrap="none">
+            <a:spAutoFit/>
+          </a:bodyPr>
+          <a:lstStyle/>
+          <a:p>
+            <a:pPr>
+              <a:defRPr sz="850">
+                <a:solidFill>
+                  <a:srgbClr val="64748B"/>
+                </a:solidFill>
+                <a:latin typeface="Inter"/>
+              </a:defRPr>
+            </a:pPr>
+            <a:r>
+              <a:t>Jithvar Business Group Strategy Deck  |  Confidential  |  Slide 9 of 12</a:t>
+            </a:r>
+          </a:p>
+        </p:txBody>
+      </p:sp>
+      <p:sp>
+        <p:nvSpPr>
+          <p:cNvPr id="6" name="Rectangle 5"/>
           <p:cNvSpPr/>
           <p:nvPr/>
         </p:nvSpPr>
         <p:spPr>
           <a:xfrm>
-            <a:off x="548640" y="1554480"/>
-            <a:ext cx="5394960" cy="3931920"/>
+            <a:off x="548640" y="5623560"/>
+            <a:ext cx="11094415" cy="594360"/>
+          </a:xfrm>
+          <a:prstGeom prst="rect">
+            <a:avLst/>
+          </a:prstGeom>
+          <a:solidFill>
+            <a:srgbClr val="FEE4E6"/>
+          </a:solidFill>
+          <a:ln>
+            <a:noFill/>
+          </a:ln>
+        </p:spPr>
+        <p:style>
+          <a:lnRef idx="1">
+            <a:schemeClr val="accent1"/>
+          </a:lnRef>
+          <a:fillRef idx="3">
+            <a:schemeClr val="accent1"/>
+          </a:fillRef>
+          <a:effectRef idx="2">
+            <a:schemeClr val="accent1"/>
+          </a:effectRef>
+          <a:fontRef idx="minor">
+            <a:schemeClr val="lt1"/>
+          </a:fontRef>
+        </p:style>
+        <p:txBody>
+          <a:bodyPr rtlCol="0" anchor="ctr"/>
+          <a:lstStyle/>
+          <a:p>
+            <a:pPr algn="ctr"/>
+          </a:p>
+        </p:txBody>
+      </p:sp>
+      <p:sp>
+        <p:nvSpPr>
+          <p:cNvPr id="7" name="Rectangle 6"/>
+          <p:cNvSpPr/>
+          <p:nvPr/>
+        </p:nvSpPr>
+        <p:spPr>
+          <a:xfrm>
+            <a:off x="548640" y="5623560"/>
+            <a:ext cx="73152" cy="594360"/>
+          </a:xfrm>
+          <a:prstGeom prst="rect">
+            <a:avLst/>
+          </a:prstGeom>
+          <a:solidFill>
+            <a:srgbClr val="D60000"/>
+          </a:solidFill>
+          <a:ln>
+            <a:noFill/>
+          </a:ln>
+        </p:spPr>
+        <p:style>
+          <a:lnRef idx="1">
+            <a:schemeClr val="accent1"/>
+          </a:lnRef>
+          <a:fillRef idx="3">
+            <a:schemeClr val="accent1"/>
+          </a:fillRef>
+          <a:effectRef idx="2">
+            <a:schemeClr val="accent1"/>
+          </a:effectRef>
+          <a:fontRef idx="minor">
+            <a:schemeClr val="lt1"/>
+          </a:fontRef>
+        </p:style>
+        <p:txBody>
+          <a:bodyPr rtlCol="0" anchor="ctr"/>
+          <a:lstStyle/>
+          <a:p>
+            <a:pPr algn="ctr"/>
+          </a:p>
+        </p:txBody>
+      </p:sp>
+      <p:sp>
+        <p:nvSpPr>
+          <p:cNvPr id="8" name="TextBox 7"/>
+          <p:cNvSpPr txBox="1"/>
+          <p:nvPr/>
+        </p:nvSpPr>
+        <p:spPr>
+          <a:xfrm>
+            <a:off x="731520" y="5669280"/>
+            <a:ext cx="10698480" cy="502920"/>
+          </a:xfrm>
+          <a:prstGeom prst="rect">
+            <a:avLst/>
+          </a:prstGeom>
+          <a:noFill/>
+        </p:spPr>
+        <p:txBody>
+          <a:bodyPr wrap="square">
+            <a:spAutoFit/>
+          </a:bodyPr>
+          <a:lstStyle/>
+          <a:p>
+            <a:pPr>
+              <a:defRPr sz="1100" b="1">
+                <a:solidFill>
+                  <a:srgbClr val="991B1B"/>
+                </a:solidFill>
+                <a:latin typeface="Inter"/>
+              </a:defRPr>
+            </a:pPr>
+            <a:r>
+              <a:t>Strategic Takeaway: Integrating sales networks across business units turns JBG's portfolio into a unified client acquisition machine.</a:t>
+            </a:r>
+          </a:p>
+        </p:txBody>
+      </p:sp>
+      <p:sp>
+        <p:nvSpPr>
+          <p:cNvPr id="9" name="Rounded Rectangle 8"/>
+          <p:cNvSpPr/>
+          <p:nvPr/>
+        </p:nvSpPr>
+        <p:spPr>
+          <a:xfrm>
+            <a:off x="548640" y="1508760"/>
+            <a:ext cx="3514953" cy="3931920"/>
           </a:xfrm>
           <a:prstGeom prst="roundRect">
             <a:avLst/>
@@ -8955,14 +11194,14 @@
       </p:sp>
       <p:sp>
         <p:nvSpPr>
-          <p:cNvPr id="6" name="TextBox 5"/>
+          <p:cNvPr id="10" name="TextBox 9"/>
           <p:cNvSpPr txBox="1"/>
           <p:nvPr/>
         </p:nvSpPr>
         <p:spPr>
           <a:xfrm>
-            <a:off x="731520" y="1645920"/>
-            <a:ext cx="5029200" cy="3749039"/>
+            <a:off x="685800" y="1600200"/>
+            <a:ext cx="3240633" cy="3749039"/>
           </a:xfrm>
           <a:prstGeom prst="rect">
             <a:avLst/>
@@ -8977,9 +11216,25 @@
           <a:p>
             <a:pPr>
               <a:spcAft>
+                <a:spcPts val="400"/>
+              </a:spcAft>
+              <a:defRPr sz="850" b="1">
+                <a:solidFill>
+                  <a:srgbClr val="64748B"/>
+                </a:solidFill>
+                <a:latin typeface="Inter"/>
+              </a:defRPr>
+            </a:pPr>
+            <a:r>
+              <a:t>[INBOUND MARKETING]</a:t>
+            </a:r>
+          </a:p>
+          <a:p>
+            <a:pPr>
+              <a:spcAft>
                 <a:spcPts val="1000"/>
               </a:spcAft>
-              <a:defRPr sz="1400" b="1">
+              <a:defRPr sz="1300" b="1">
                 <a:solidFill>
                   <a:srgbClr val="0F2537"/>
                 </a:solidFill>
@@ -8987,15 +11242,15 @@
               </a:defRPr>
             </a:pPr>
             <a:r>
-              <a:t>Digital Lead Generation Engine</a:t>
+              <a:t>Lead Generation Engine</a:t>
             </a:r>
           </a:p>
           <a:p>
             <a:pPr>
               <a:spcAft>
-                <a:spcPts val="800"/>
+                <a:spcPts val="600"/>
               </a:spcAft>
-              <a:defRPr sz="1050">
+              <a:defRPr sz="950">
                 <a:solidFill>
                   <a:srgbClr val="1E293B"/>
                 </a:solidFill>
@@ -9003,15 +11258,15 @@
               </a:defRPr>
             </a:pPr>
             <a:r>
-              <a:t>• Inbound Pipeline: Establish a strong digital presence via target SEO, technical case studies, and corporate webinars.</a:t>
+              <a:t>• Establish online authority via technical case studies and SEO.</a:t>
             </a:r>
           </a:p>
           <a:p>
             <a:pPr>
               <a:spcAft>
-                <a:spcPts val="800"/>
+                <a:spcPts val="600"/>
               </a:spcAft>
-              <a:defRPr sz="1050">
+              <a:defRPr sz="950">
                 <a:solidFill>
                   <a:srgbClr val="1E293B"/>
                 </a:solidFill>
@@ -9019,21 +11274,21 @@
               </a:defRPr>
             </a:pPr>
             <a:r>
-              <a:t>• Interactive Web Tools: Host free automated calculators (e.g. Solar yield and HR savings ROI calculators) to capture B2B buyer leads.</a:t>
-            </a:r>
-          </a:p>
-        </p:txBody>
-      </p:sp>
-      <p:sp>
-        <p:nvSpPr>
-          <p:cNvPr id="7" name="Rounded Rectangle 6"/>
+              <a:t>• Deploy free interactive tools (e.g. solar yield and matching ROI calculators) to capture corporate leads.</a:t>
+            </a:r>
+          </a:p>
+        </p:txBody>
+      </p:sp>
+      <p:sp>
+        <p:nvSpPr>
+          <p:cNvPr id="11" name="Rounded Rectangle 10"/>
           <p:cNvSpPr/>
           <p:nvPr/>
         </p:nvSpPr>
         <p:spPr>
           <a:xfrm>
-            <a:off x="6217920" y="1554480"/>
-            <a:ext cx="5394960" cy="3931920"/>
+            <a:off x="4337913" y="1508760"/>
+            <a:ext cx="3514953" cy="3931920"/>
           </a:xfrm>
           <a:prstGeom prst="roundRect">
             <a:avLst/>
@@ -9071,14 +11326,14 @@
       </p:sp>
       <p:sp>
         <p:nvSpPr>
-          <p:cNvPr id="8" name="TextBox 7"/>
+          <p:cNvPr id="12" name="TextBox 11"/>
           <p:cNvSpPr txBox="1"/>
           <p:nvPr/>
         </p:nvSpPr>
         <p:spPr>
           <a:xfrm>
-            <a:off x="6400800" y="1645920"/>
-            <a:ext cx="5029200" cy="3749039"/>
+            <a:off x="4475073" y="1600200"/>
+            <a:ext cx="3240633" cy="3749039"/>
           </a:xfrm>
           <a:prstGeom prst="rect">
             <a:avLst/>
@@ -9093,9 +11348,25 @@
           <a:p>
             <a:pPr>
               <a:spcAft>
+                <a:spcPts val="400"/>
+              </a:spcAft>
+              <a:defRPr sz="850" b="1">
+                <a:solidFill>
+                  <a:srgbClr val="0284C7"/>
+                </a:solidFill>
+                <a:latin typeface="Inter"/>
+              </a:defRPr>
+            </a:pPr>
+            <a:r>
+              <a:t>[SALES INTEGRATION]</a:t>
+            </a:r>
+          </a:p>
+          <a:p>
+            <a:pPr>
+              <a:spcAft>
                 <a:spcPts val="1000"/>
               </a:spcAft>
-              <a:defRPr sz="1400" b="1">
+              <a:defRPr sz="1300" b="1">
                 <a:solidFill>
                   <a:srgbClr val="0F2537"/>
                 </a:solidFill>
@@ -9103,15 +11374,15 @@
               </a:defRPr>
             </a:pPr>
             <a:r>
-              <a:t>Sales Integration &amp; Incentives</a:t>
+              <a:t>Cross-Training &amp; Bundles</a:t>
             </a:r>
           </a:p>
           <a:p>
             <a:pPr>
               <a:spcAft>
-                <a:spcPts val="800"/>
+                <a:spcPts val="600"/>
               </a:spcAft>
-              <a:defRPr sz="1050">
+              <a:defRPr sz="950">
                 <a:solidFill>
                   <a:srgbClr val="1E293B"/>
                 </a:solidFill>
@@ -9119,15 +11390,15 @@
               </a:defRPr>
             </a:pPr>
             <a:r>
-              <a:t>• Account Rep Cross-Training: Train Aequalis reps to bundle JCS developers, and solar reps to bundle telemetry platforms.</a:t>
+              <a:t>• Cross-train account reps across business units.</a:t>
             </a:r>
           </a:p>
           <a:p>
             <a:pPr>
               <a:spcAft>
-                <a:spcPts val="800"/>
+                <a:spcPts val="600"/>
               </a:spcAft>
-              <a:defRPr sz="1050">
+              <a:defRPr sz="950">
                 <a:solidFill>
                   <a:srgbClr val="1E293B"/>
                 </a:solidFill>
@@ -9135,30 +11406,32 @@
               </a:defRPr>
             </a:pPr>
             <a:r>
-              <a:t>• Commission Alignment: Establish inter-group commissions. Reward recruiting and solar reps for converting clients to recurring SaaS.</a:t>
-            </a:r>
-          </a:p>
-        </p:txBody>
-      </p:sp>
-      <p:sp>
-        <p:nvSpPr>
-          <p:cNvPr id="9" name="Rectangle 8"/>
+              <a:t>• Bundle JCS devs with staffing contracts, and telemetry software with commercial solar panel hardware.</a:t>
+            </a:r>
+          </a:p>
+        </p:txBody>
+      </p:sp>
+      <p:sp>
+        <p:nvSpPr>
+          <p:cNvPr id="13" name="Rounded Rectangle 12"/>
           <p:cNvSpPr/>
           <p:nvPr/>
         </p:nvSpPr>
         <p:spPr>
           <a:xfrm>
-            <a:off x="548640" y="5623560"/>
-            <a:ext cx="11094415" cy="594360"/>
-          </a:xfrm>
-          <a:prstGeom prst="rect">
+            <a:off x="8127186" y="1508760"/>
+            <a:ext cx="3514953" cy="3931920"/>
+          </a:xfrm>
+          <a:prstGeom prst="roundRect">
             <a:avLst/>
           </a:prstGeom>
           <a:solidFill>
-            <a:srgbClr val="FEE4E6"/>
+            <a:srgbClr val="F8FAFC"/>
           </a:solidFill>
           <a:ln>
-            <a:noFill/>
+            <a:solidFill>
+              <a:srgbClr val="CBD5E1"/>
+            </a:solidFill>
           </a:ln>
         </p:spPr>
         <p:style>
@@ -9185,57 +11458,14 @@
       </p:sp>
       <p:sp>
         <p:nvSpPr>
-          <p:cNvPr id="10" name="Rectangle 9"/>
-          <p:cNvSpPr/>
-          <p:nvPr/>
-        </p:nvSpPr>
-        <p:spPr>
-          <a:xfrm>
-            <a:off x="548640" y="5623560"/>
-            <a:ext cx="73152" cy="594360"/>
-          </a:xfrm>
-          <a:prstGeom prst="rect">
-            <a:avLst/>
-          </a:prstGeom>
-          <a:solidFill>
-            <a:srgbClr val="D60000"/>
-          </a:solidFill>
-          <a:ln>
-            <a:noFill/>
-          </a:ln>
-        </p:spPr>
-        <p:style>
-          <a:lnRef idx="1">
-            <a:schemeClr val="accent1"/>
-          </a:lnRef>
-          <a:fillRef idx="3">
-            <a:schemeClr val="accent1"/>
-          </a:fillRef>
-          <a:effectRef idx="2">
-            <a:schemeClr val="accent1"/>
-          </a:effectRef>
-          <a:fontRef idx="minor">
-            <a:schemeClr val="lt1"/>
-          </a:fontRef>
-        </p:style>
-        <p:txBody>
-          <a:bodyPr rtlCol="0" anchor="ctr"/>
-          <a:lstStyle/>
-          <a:p>
-            <a:pPr algn="ctr"/>
-          </a:p>
-        </p:txBody>
-      </p:sp>
-      <p:sp>
-        <p:nvSpPr>
-          <p:cNvPr id="11" name="TextBox 10"/>
+          <p:cNvPr id="14" name="TextBox 13"/>
           <p:cNvSpPr txBox="1"/>
           <p:nvPr/>
         </p:nvSpPr>
         <p:spPr>
           <a:xfrm>
-            <a:off x="731520" y="5669280"/>
-            <a:ext cx="10698480" cy="502920"/>
+            <a:off x="8264346" y="1600200"/>
+            <a:ext cx="3240633" cy="3749039"/>
           </a:xfrm>
           <a:prstGeom prst="rect">
             <a:avLst/>
@@ -9249,51 +11479,66 @@
           <a:lstStyle/>
           <a:p>
             <a:pPr>
-              <a:defRPr sz="1100" b="1">
-                <a:solidFill>
-                  <a:srgbClr val="991B1B"/>
+              <a:spcAft>
+                <a:spcPts val="400"/>
+              </a:spcAft>
+              <a:defRPr sz="850" b="1">
+                <a:solidFill>
+                  <a:srgbClr val="0284C7"/>
                 </a:solidFill>
                 <a:latin typeface="Inter"/>
               </a:defRPr>
             </a:pPr>
             <a:r>
-              <a:t>Strategic Takeaway: Integrating sales networks across business units turns JBG's portfolio into a unified client acquisition machine.</a:t>
-            </a:r>
-          </a:p>
-        </p:txBody>
-      </p:sp>
-      <p:sp>
-        <p:nvSpPr>
-          <p:cNvPr id="12" name="TextBox 11"/>
-          <p:cNvSpPr txBox="1"/>
-          <p:nvPr/>
-        </p:nvSpPr>
-        <p:spPr>
-          <a:xfrm>
-            <a:off x="548640" y="6309360"/>
-            <a:ext cx="11094415" cy="320040"/>
-          </a:xfrm>
-          <a:prstGeom prst="rect">
-            <a:avLst/>
-          </a:prstGeom>
-          <a:noFill/>
-        </p:spPr>
-        <p:txBody>
-          <a:bodyPr wrap="none">
-            <a:spAutoFit/>
-          </a:bodyPr>
-          <a:lstStyle/>
-          <a:p>
-            <a:pPr>
-              <a:defRPr sz="850">
-                <a:solidFill>
-                  <a:srgbClr val="64748B"/>
+              <a:t>[INCENTIVE ALIGNMENT]</a:t>
+            </a:r>
+          </a:p>
+          <a:p>
+            <a:pPr>
+              <a:spcAft>
+                <a:spcPts val="1000"/>
+              </a:spcAft>
+              <a:defRPr sz="1300" b="1">
+                <a:solidFill>
+                  <a:srgbClr val="0F2537"/>
+                </a:solidFill>
+                <a:latin typeface="Outfit"/>
+              </a:defRPr>
+            </a:pPr>
+            <a:r>
+              <a:t>Commission Models</a:t>
+            </a:r>
+          </a:p>
+          <a:p>
+            <a:pPr>
+              <a:spcAft>
+                <a:spcPts val="600"/>
+              </a:spcAft>
+              <a:defRPr sz="950">
+                <a:solidFill>
+                  <a:srgbClr val="1E293B"/>
                 </a:solidFill>
                 <a:latin typeface="Inter"/>
               </a:defRPr>
             </a:pPr>
             <a:r>
-              <a:t>Jithvar Business Group Strategy Deck  |  Confidential  |  Slide 9 of 12</a:t>
+              <a:t>• Reward recruiters and solar sales reps for cross-selling SaaS subscriptions.</a:t>
+            </a:r>
+          </a:p>
+          <a:p>
+            <a:pPr>
+              <a:spcAft>
+                <a:spcPts val="600"/>
+              </a:spcAft>
+              <a:defRPr sz="950">
+                <a:solidFill>
+                  <a:srgbClr val="1E293B"/>
+                </a:solidFill>
+                <a:latin typeface="Inter"/>
+              </a:defRPr>
+            </a:pPr>
+            <a:r>
+              <a:t>• Share recurring SaaS value across divisions to build a unified GTM machine.</a:t>
             </a:r>
           </a:p>
         </p:txBody>

--- a/documents/1_pitch_deck.pptx
+++ b/documents/1_pitch_deck.pptx
@@ -3466,7 +3466,7 @@
         </p:nvSpPr>
         <p:spPr>
           <a:xfrm>
-            <a:off x="548640" y="5623560"/>
+            <a:off x="548640" y="5577840"/>
             <a:ext cx="11094415" cy="594360"/>
           </a:xfrm>
           <a:prstGeom prst="rect">
@@ -3509,7 +3509,7 @@
         </p:nvSpPr>
         <p:spPr>
           <a:xfrm>
-            <a:off x="548640" y="5623560"/>
+            <a:off x="548640" y="5577840"/>
             <a:ext cx="73152" cy="594360"/>
           </a:xfrm>
           <a:prstGeom prst="rect">
@@ -3552,7 +3552,7 @@
         </p:nvSpPr>
         <p:spPr>
           <a:xfrm>
-            <a:off x="731520" y="5669280"/>
+            <a:off x="731520" y="5623560"/>
             <a:ext cx="10698480" cy="502920"/>
           </a:xfrm>
           <a:prstGeom prst="rect">
@@ -3707,7 +3707,7 @@
               </a:defRPr>
             </a:pPr>
             <a:r>
-              <a:t>• Regulatory Compliance: Audit state-level net metering, solar tax credits, and candidate data privacy regulations (GDPR).</a:t>
+              <a:t>• Regulatory Compliance: Audit state-level solar net metering policies and candidate data privacy compliance (GDPR).</a:t>
             </a:r>
           </a:p>
         </p:txBody>
@@ -4005,7 +4005,7 @@
         </p:nvSpPr>
         <p:spPr>
           <a:xfrm>
-            <a:off x="548640" y="5623560"/>
+            <a:off x="548640" y="5577840"/>
             <a:ext cx="11094415" cy="594360"/>
           </a:xfrm>
           <a:prstGeom prst="rect">
@@ -4048,7 +4048,7 @@
         </p:nvSpPr>
         <p:spPr>
           <a:xfrm>
-            <a:off x="548640" y="5623560"/>
+            <a:off x="548640" y="5577840"/>
             <a:ext cx="73152" cy="594360"/>
           </a:xfrm>
           <a:prstGeom prst="rect">
@@ -4091,7 +4091,7 @@
         </p:nvSpPr>
         <p:spPr>
           <a:xfrm>
-            <a:off x="731520" y="5669280"/>
+            <a:off x="731520" y="5623560"/>
             <a:ext cx="10698480" cy="502920"/>
           </a:xfrm>
           <a:prstGeom prst="rect">
@@ -4128,7 +4128,7 @@
         <p:spPr>
           <a:xfrm>
             <a:off x="548640" y="1508760"/>
-            <a:ext cx="3514953" cy="3931920"/>
+            <a:ext cx="3332073" cy="3931920"/>
           </a:xfrm>
           <a:prstGeom prst="roundRect">
             <a:avLst/>
@@ -4166,14 +4166,67 @@
       </p:sp>
       <p:sp>
         <p:nvSpPr>
-          <p:cNvPr id="10" name="TextBox 9"/>
+          <p:cNvPr id="10" name="Oval 9"/>
+          <p:cNvSpPr/>
+          <p:nvPr/>
+        </p:nvSpPr>
+        <p:spPr>
+          <a:xfrm>
+            <a:off x="1920240" y="1691640"/>
+            <a:ext cx="588873" cy="588873"/>
+          </a:xfrm>
+          <a:prstGeom prst="ellipse">
+            <a:avLst/>
+          </a:prstGeom>
+          <a:solidFill>
+            <a:srgbClr val="D60000"/>
+          </a:solidFill>
+          <a:ln>
+            <a:noFill/>
+          </a:ln>
+        </p:spPr>
+        <p:style>
+          <a:lnRef idx="1">
+            <a:schemeClr val="accent1"/>
+          </a:lnRef>
+          <a:fillRef idx="3">
+            <a:schemeClr val="accent1"/>
+          </a:fillRef>
+          <a:effectRef idx="2">
+            <a:schemeClr val="accent1"/>
+          </a:effectRef>
+          <a:fontRef idx="minor">
+            <a:schemeClr val="lt1"/>
+          </a:fontRef>
+        </p:style>
+        <p:txBody>
+          <a:bodyPr rtlCol="0" anchor="ctr"/>
+          <a:lstStyle/>
+          <a:p>
+            <a:pPr algn="ctr">
+              <a:defRPr sz="1300" b="1">
+                <a:solidFill>
+                  <a:srgbClr val="FFFFFF"/>
+                </a:solidFill>
+                <a:latin typeface="Outfit"/>
+              </a:defRPr>
+            </a:pPr>
+            <a:r>
+              <a:t>M1</a:t>
+            </a:r>
+          </a:p>
+        </p:txBody>
+      </p:sp>
+      <p:sp>
+        <p:nvSpPr>
+          <p:cNvPr id="11" name="TextBox 10"/>
           <p:cNvSpPr txBox="1"/>
           <p:nvPr/>
         </p:nvSpPr>
         <p:spPr>
           <a:xfrm>
-            <a:off x="685800" y="1600200"/>
-            <a:ext cx="3240633" cy="3749039"/>
+            <a:off x="685800" y="2377440"/>
+            <a:ext cx="3057753" cy="2926080"/>
           </a:xfrm>
           <a:prstGeom prst="rect">
             <a:avLst/>
@@ -4186,7 +4239,7 @@
           </a:bodyPr>
           <a:lstStyle/>
           <a:p>
-            <a:pPr>
+            <a:pPr algn="ctr">
               <a:spcAft>
                 <a:spcPts val="400"/>
               </a:spcAft>
@@ -4202,7 +4255,7 @@
             </a:r>
           </a:p>
           <a:p>
-            <a:pPr>
+            <a:pPr algn="ctr">
               <a:spcAft>
                 <a:spcPts val="1000"/>
               </a:spcAft>
@@ -4218,10 +4271,7 @@
             </a:r>
           </a:p>
           <a:p>
-            <a:pPr>
-              <a:spcAft>
-                <a:spcPts val="600"/>
-              </a:spcAft>
+            <a:pPr algn="ctr">
               <a:defRPr sz="950">
                 <a:solidFill>
                   <a:srgbClr val="1E293B"/>
@@ -4230,53 +4280,21 @@
               </a:defRPr>
             </a:pPr>
             <a:r>
-              <a:t>• Audit developer utilization rates.</a:t>
-            </a:r>
-          </a:p>
-          <a:p>
-            <a:pPr>
-              <a:spcAft>
-                <a:spcPts val="600"/>
-              </a:spcAft>
-              <a:defRPr sz="950">
-                <a:solidFill>
-                  <a:srgbClr val="1E293B"/>
-                </a:solidFill>
-                <a:latin typeface="Inter"/>
-              </a:defRPr>
-            </a:pPr>
-            <a:r>
-              <a:t>• Analyze Nature Grid margins.</a:t>
-            </a:r>
-          </a:p>
-          <a:p>
-            <a:pPr>
-              <a:spcAft>
-                <a:spcPts val="600"/>
-              </a:spcAft>
-              <a:defRPr sz="950">
-                <a:solidFill>
-                  <a:srgbClr val="1E293B"/>
-                </a:solidFill>
-                <a:latin typeface="Inter"/>
-              </a:defRPr>
-            </a:pPr>
-            <a:r>
-              <a:t>• Map Aequalis's client accounts for warm SaaS cross-sell opportunities.</a:t>
-            </a:r>
-          </a:p>
-        </p:txBody>
-      </p:sp>
-      <p:sp>
-        <p:nvSpPr>
-          <p:cNvPr id="11" name="Right Arrow 10"/>
+              <a:t>Audit JCS developer utilization rates, analyze Nature Grid C&amp;I solar project margins, and identify target Aequalis CRM cross-sell accounts.</a:t>
+            </a:r>
+          </a:p>
+        </p:txBody>
+      </p:sp>
+      <p:sp>
+        <p:nvSpPr>
+          <p:cNvPr id="12" name="Right Arrow 11"/>
           <p:cNvSpPr/>
           <p:nvPr/>
         </p:nvSpPr>
         <p:spPr>
           <a:xfrm>
-            <a:off x="4109313" y="3291840"/>
-            <a:ext cx="182880" cy="182880"/>
+            <a:off x="4017873" y="3291840"/>
+            <a:ext cx="274320" cy="182880"/>
           </a:xfrm>
           <a:prstGeom prst="rightArrow">
             <a:avLst/>
@@ -4312,14 +4330,14 @@
       </p:sp>
       <p:sp>
         <p:nvSpPr>
-          <p:cNvPr id="12" name="Rounded Rectangle 11"/>
+          <p:cNvPr id="13" name="Rounded Rectangle 12"/>
           <p:cNvSpPr/>
           <p:nvPr/>
         </p:nvSpPr>
         <p:spPr>
           <a:xfrm>
-            <a:off x="4337913" y="1508760"/>
-            <a:ext cx="3514953" cy="3931920"/>
+            <a:off x="4429353" y="1508760"/>
+            <a:ext cx="3332073" cy="3931920"/>
           </a:xfrm>
           <a:prstGeom prst="roundRect">
             <a:avLst/>
@@ -4357,14 +4375,67 @@
       </p:sp>
       <p:sp>
         <p:nvSpPr>
-          <p:cNvPr id="13" name="TextBox 12"/>
+          <p:cNvPr id="14" name="Oval 13"/>
+          <p:cNvSpPr/>
+          <p:nvPr/>
+        </p:nvSpPr>
+        <p:spPr>
+          <a:xfrm>
+            <a:off x="5800953" y="1691640"/>
+            <a:ext cx="588873" cy="588873"/>
+          </a:xfrm>
+          <a:prstGeom prst="ellipse">
+            <a:avLst/>
+          </a:prstGeom>
+          <a:solidFill>
+            <a:srgbClr val="0F2537"/>
+          </a:solidFill>
+          <a:ln>
+            <a:noFill/>
+          </a:ln>
+        </p:spPr>
+        <p:style>
+          <a:lnRef idx="1">
+            <a:schemeClr val="accent1"/>
+          </a:lnRef>
+          <a:fillRef idx="3">
+            <a:schemeClr val="accent1"/>
+          </a:fillRef>
+          <a:effectRef idx="2">
+            <a:schemeClr val="accent1"/>
+          </a:effectRef>
+          <a:fontRef idx="minor">
+            <a:schemeClr val="lt1"/>
+          </a:fontRef>
+        </p:style>
+        <p:txBody>
+          <a:bodyPr rtlCol="0" anchor="ctr"/>
+          <a:lstStyle/>
+          <a:p>
+            <a:pPr algn="ctr">
+              <a:defRPr sz="1300" b="1">
+                <a:solidFill>
+                  <a:srgbClr val="FFFFFF"/>
+                </a:solidFill>
+                <a:latin typeface="Outfit"/>
+              </a:defRPr>
+            </a:pPr>
+            <a:r>
+              <a:t>M2</a:t>
+            </a:r>
+          </a:p>
+        </p:txBody>
+      </p:sp>
+      <p:sp>
+        <p:nvSpPr>
+          <p:cNvPr id="15" name="TextBox 14"/>
           <p:cNvSpPr txBox="1"/>
           <p:nvPr/>
         </p:nvSpPr>
         <p:spPr>
           <a:xfrm>
-            <a:off x="4475073" y="1600200"/>
-            <a:ext cx="3240633" cy="3749039"/>
+            <a:off x="4566513" y="2377440"/>
+            <a:ext cx="3057753" cy="2926080"/>
           </a:xfrm>
           <a:prstGeom prst="rect">
             <a:avLst/>
@@ -4377,13 +4448,13 @@
           </a:bodyPr>
           <a:lstStyle/>
           <a:p>
-            <a:pPr>
+            <a:pPr algn="ctr">
               <a:spcAft>
                 <a:spcPts val="400"/>
               </a:spcAft>
               <a:defRPr sz="850" b="1">
                 <a:solidFill>
-                  <a:srgbClr val="0284C7"/>
+                  <a:srgbClr val="64748B"/>
                 </a:solidFill>
                 <a:latin typeface="Inter"/>
               </a:defRPr>
@@ -4393,7 +4464,7 @@
             </a:r>
           </a:p>
           <a:p>
-            <a:pPr>
+            <a:pPr algn="ctr">
               <a:spcAft>
                 <a:spcPts val="1000"/>
               </a:spcAft>
@@ -4409,10 +4480,7 @@
             </a:r>
           </a:p>
           <a:p>
-            <a:pPr>
-              <a:spcAft>
-                <a:spcPts val="600"/>
-              </a:spcAft>
+            <a:pPr algn="ctr">
               <a:defRPr sz="950">
                 <a:solidFill>
                   <a:srgbClr val="1E293B"/>
@@ -4421,53 +4489,21 @@
               </a:defRPr>
             </a:pPr>
             <a:r>
-              <a:t>• Score pipeline ideas using prioritized scorecard.</a:t>
-            </a:r>
-          </a:p>
-          <a:p>
-            <a:pPr>
-              <a:spcAft>
-                <a:spcPts val="600"/>
-              </a:spcAft>
-              <a:defRPr sz="950">
-                <a:solidFill>
-                  <a:srgbClr val="1E293B"/>
-                </a:solidFill>
-                <a:latin typeface="Inter"/>
-              </a:defRPr>
-            </a:pPr>
-            <a:r>
-              <a:t>• Build interactive B2B simulators to demonstrate solar &amp; staffing SaaS.</a:t>
-            </a:r>
-          </a:p>
-          <a:p>
-            <a:pPr>
-              <a:spcAft>
-                <a:spcPts val="600"/>
-              </a:spcAft>
-              <a:defRPr sz="950">
-                <a:solidFill>
-                  <a:srgbClr val="1E293B"/>
-                </a:solidFill>
-                <a:latin typeface="Inter"/>
-              </a:defRPr>
-            </a:pPr>
-            <a:r>
-              <a:t>• Draft API connector marketplace database schemas.</a:t>
-            </a:r>
-          </a:p>
-        </p:txBody>
-      </p:sp>
-      <p:sp>
-        <p:nvSpPr>
-          <p:cNvPr id="14" name="Right Arrow 13"/>
+              <a:t>Score pipeline ideas using prioritized scorecard. Build interactive B2B simulators to demonstrate solar &amp; staffing SaaS concepts to clients.</a:t>
+            </a:r>
+          </a:p>
+        </p:txBody>
+      </p:sp>
+      <p:sp>
+        <p:nvSpPr>
+          <p:cNvPr id="16" name="Right Arrow 15"/>
           <p:cNvSpPr/>
           <p:nvPr/>
         </p:nvSpPr>
         <p:spPr>
           <a:xfrm>
             <a:off x="7898586" y="3291840"/>
-            <a:ext cx="182880" cy="182880"/>
+            <a:ext cx="274320" cy="182880"/>
           </a:xfrm>
           <a:prstGeom prst="rightArrow">
             <a:avLst/>
@@ -4503,14 +4539,14 @@
       </p:sp>
       <p:sp>
         <p:nvSpPr>
-          <p:cNvPr id="15" name="Rounded Rectangle 14"/>
+          <p:cNvPr id="17" name="Rounded Rectangle 16"/>
           <p:cNvSpPr/>
           <p:nvPr/>
         </p:nvSpPr>
         <p:spPr>
           <a:xfrm>
-            <a:off x="8127186" y="1508760"/>
-            <a:ext cx="3514953" cy="3931920"/>
+            <a:off x="8310066" y="1508760"/>
+            <a:ext cx="3332073" cy="3931920"/>
           </a:xfrm>
           <a:prstGeom prst="roundRect">
             <a:avLst/>
@@ -4548,14 +4584,67 @@
       </p:sp>
       <p:sp>
         <p:nvSpPr>
-          <p:cNvPr id="16" name="TextBox 15"/>
+          <p:cNvPr id="18" name="Oval 17"/>
+          <p:cNvSpPr/>
+          <p:nvPr/>
+        </p:nvSpPr>
+        <p:spPr>
+          <a:xfrm>
+            <a:off x="9681666" y="1691640"/>
+            <a:ext cx="588873" cy="588873"/>
+          </a:xfrm>
+          <a:prstGeom prst="ellipse">
+            <a:avLst/>
+          </a:prstGeom>
+          <a:solidFill>
+            <a:srgbClr val="0284C7"/>
+          </a:solidFill>
+          <a:ln>
+            <a:noFill/>
+          </a:ln>
+        </p:spPr>
+        <p:style>
+          <a:lnRef idx="1">
+            <a:schemeClr val="accent1"/>
+          </a:lnRef>
+          <a:fillRef idx="3">
+            <a:schemeClr val="accent1"/>
+          </a:fillRef>
+          <a:effectRef idx="2">
+            <a:schemeClr val="accent1"/>
+          </a:effectRef>
+          <a:fontRef idx="minor">
+            <a:schemeClr val="lt1"/>
+          </a:fontRef>
+        </p:style>
+        <p:txBody>
+          <a:bodyPr rtlCol="0" anchor="ctr"/>
+          <a:lstStyle/>
+          <a:p>
+            <a:pPr algn="ctr">
+              <a:defRPr sz="1300" b="1">
+                <a:solidFill>
+                  <a:srgbClr val="FFFFFF"/>
+                </a:solidFill>
+                <a:latin typeface="Outfit"/>
+              </a:defRPr>
+            </a:pPr>
+            <a:r>
+              <a:t>M3</a:t>
+            </a:r>
+          </a:p>
+        </p:txBody>
+      </p:sp>
+      <p:sp>
+        <p:nvSpPr>
+          <p:cNvPr id="19" name="TextBox 18"/>
           <p:cNvSpPr txBox="1"/>
           <p:nvPr/>
         </p:nvSpPr>
         <p:spPr>
           <a:xfrm>
-            <a:off x="8264346" y="1600200"/>
-            <a:ext cx="3240633" cy="3749039"/>
+            <a:off x="8447226" y="2377440"/>
+            <a:ext cx="3057753" cy="2926080"/>
           </a:xfrm>
           <a:prstGeom prst="rect">
             <a:avLst/>
@@ -4568,13 +4657,13 @@
           </a:bodyPr>
           <a:lstStyle/>
           <a:p>
-            <a:pPr>
+            <a:pPr algn="ctr">
               <a:spcAft>
                 <a:spcPts val="400"/>
               </a:spcAft>
               <a:defRPr sz="850" b="1">
                 <a:solidFill>
-                  <a:srgbClr val="0284C7"/>
+                  <a:srgbClr val="64748B"/>
                 </a:solidFill>
                 <a:latin typeface="Inter"/>
               </a:defRPr>
@@ -4584,7 +4673,7 @@
             </a:r>
           </a:p>
           <a:p>
-            <a:pPr>
+            <a:pPr algn="ctr">
               <a:spcAft>
                 <a:spcPts val="1000"/>
               </a:spcAft>
@@ -4596,14 +4685,11 @@
               </a:defRPr>
             </a:pPr>
             <a:r>
-              <a:t>Phase 3: Pilot &amp; Validate</a:t>
-            </a:r>
-          </a:p>
-          <a:p>
-            <a:pPr>
-              <a:spcAft>
-                <a:spcPts val="600"/>
-              </a:spcAft>
+              <a:t>Phase 3: Validate</a:t>
+            </a:r>
+          </a:p>
+          <a:p>
+            <a:pPr algn="ctr">
               <a:defRPr sz="950">
                 <a:solidFill>
                   <a:srgbClr val="1E293B"/>
@@ -4612,39 +4698,7 @@
               </a:defRPr>
             </a:pPr>
             <a:r>
-              <a:t>• Present simulators to 5 strategic B2B clients.</a:t>
-            </a:r>
-          </a:p>
-          <a:p>
-            <a:pPr>
-              <a:spcAft>
-                <a:spcPts val="600"/>
-              </a:spcAft>
-              <a:defRPr sz="950">
-                <a:solidFill>
-                  <a:srgbClr val="1E293B"/>
-                </a:solidFill>
-                <a:latin typeface="Inter"/>
-              </a:defRPr>
-            </a:pPr>
-            <a:r>
-              <a:t>• Collect feedback, define subscription pricing models.</a:t>
-            </a:r>
-          </a:p>
-          <a:p>
-            <a:pPr>
-              <a:spcAft>
-                <a:spcPts val="600"/>
-              </a:spcAft>
-              <a:defRPr sz="950">
-                <a:solidFill>
-                  <a:srgbClr val="1E293B"/>
-                </a:solidFill>
-                <a:latin typeface="Inter"/>
-              </a:defRPr>
-            </a:pPr>
-            <a:r>
-              <a:t>• Secure early pilot letters of intent (LOI) to validate demand.</a:t>
+              <a:t>Present simulators to 5 target clients. Collect feedback, define subscription pricing models, and acquire early pilot commitments.</a:t>
             </a:r>
           </a:p>
         </p:txBody>
@@ -4826,7 +4880,7 @@
         </p:nvSpPr>
         <p:spPr>
           <a:xfrm>
-            <a:off x="548640" y="5623560"/>
+            <a:off x="548640" y="5577840"/>
             <a:ext cx="11094415" cy="594360"/>
           </a:xfrm>
           <a:prstGeom prst="rect">
@@ -4869,7 +4923,7 @@
         </p:nvSpPr>
         <p:spPr>
           <a:xfrm>
-            <a:off x="548640" y="5623560"/>
+            <a:off x="548640" y="5577840"/>
             <a:ext cx="73152" cy="594360"/>
           </a:xfrm>
           <a:prstGeom prst="rect">
@@ -4912,7 +4966,7 @@
         </p:nvSpPr>
         <p:spPr>
           <a:xfrm>
-            <a:off x="731520" y="5669280"/>
+            <a:off x="731520" y="5623560"/>
             <a:ext cx="10698480" cy="502920"/>
           </a:xfrm>
           <a:prstGeom prst="rect">
@@ -5007,9 +5061,9 @@
           </a:bodyPr>
           <a:lstStyle/>
           <a:p>
-            <a:pPr>
+            <a:pPr algn="ctr">
               <a:spcAft>
-                <a:spcPts val="400"/>
+                <a:spcPts val="800"/>
               </a:spcAft>
               <a:defRPr sz="850" b="1">
                 <a:solidFill>
@@ -5023,26 +5077,36 @@
             </a:r>
           </a:p>
           <a:p>
-            <a:pPr>
+            <a:pPr algn="ctr">
+              <a:defRPr sz="2800" b="1">
+                <a:solidFill>
+                  <a:srgbClr val="0F2537"/>
+                </a:solidFill>
+                <a:latin typeface="Outfit"/>
+              </a:defRPr>
+            </a:pPr>
+            <a:r>
+              <a:t>ROIC &amp; Margin</a:t>
+            </a:r>
+          </a:p>
+          <a:p>
+            <a:pPr algn="ctr">
               <a:spcAft>
-                <a:spcPts val="1000"/>
+                <a:spcPts val="1400"/>
               </a:spcAft>
-              <a:defRPr sz="1300" b="1">
-                <a:solidFill>
-                  <a:srgbClr val="0F2537"/>
-                </a:solidFill>
-                <a:latin typeface="Outfit"/>
-              </a:defRPr>
-            </a:pPr>
-            <a:r>
-              <a:t>Group Level Metrics</a:t>
-            </a:r>
-          </a:p>
-          <a:p>
-            <a:pPr>
-              <a:spcAft>
-                <a:spcPts val="600"/>
-              </a:spcAft>
+              <a:defRPr sz="900" b="1">
+                <a:solidFill>
+                  <a:srgbClr val="64748B"/>
+                </a:solidFill>
+                <a:latin typeface="Inter"/>
+              </a:defRPr>
+            </a:pPr>
+            <a:r>
+              <a:t>Group Efficiency</a:t>
+            </a:r>
+          </a:p>
+          <a:p>
+            <a:pPr algn="ctr">
               <a:defRPr sz="950">
                 <a:solidFill>
                   <a:srgbClr val="1E293B"/>
@@ -5051,39 +5115,7 @@
               </a:defRPr>
             </a:pPr>
             <a:r>
-              <a:t>• Group-wide EBITDA margin expansion.</a:t>
-            </a:r>
-          </a:p>
-          <a:p>
-            <a:pPr>
-              <a:spcAft>
-                <a:spcPts val="600"/>
-              </a:spcAft>
-              <a:defRPr sz="950">
-                <a:solidFill>
-                  <a:srgbClr val="1E293B"/>
-                </a:solidFill>
-                <a:latin typeface="Inter"/>
-              </a:defRPr>
-            </a:pPr>
-            <a:r>
-              <a:t>• Group Return on Invested Capital (ROIC).</a:t>
-            </a:r>
-          </a:p>
-          <a:p>
-            <a:pPr>
-              <a:spcAft>
-                <a:spcPts val="600"/>
-              </a:spcAft>
-              <a:defRPr sz="950">
-                <a:solidFill>
-                  <a:srgbClr val="1E293B"/>
-                </a:solidFill>
-                <a:latin typeface="Inter"/>
-              </a:defRPr>
-            </a:pPr>
-            <a:r>
-              <a:t>• Software engineer resource utilization rates.</a:t>
+              <a:t>Track overall Group Return on Invested Capital, group-wide EBITDA margin expansion, and software developer utilization rates.</a:t>
             </a:r>
           </a:p>
         </p:txBody>
@@ -5155,42 +5187,52 @@
           </a:bodyPr>
           <a:lstStyle/>
           <a:p>
-            <a:pPr>
+            <a:pPr algn="ctr">
               <a:spcAft>
-                <a:spcPts val="400"/>
+                <a:spcPts val="800"/>
               </a:spcAft>
               <a:defRPr sz="850" b="1">
                 <a:solidFill>
+                  <a:srgbClr val="64748B"/>
+                </a:solidFill>
+                <a:latin typeface="Inter"/>
+              </a:defRPr>
+            </a:pPr>
+            <a:r>
+              <a:t>[UNIT ECONOMICS]</a:t>
+            </a:r>
+          </a:p>
+          <a:p>
+            <a:pPr algn="ctr">
+              <a:defRPr sz="2800" b="1">
+                <a:solidFill>
                   <a:srgbClr val="0284C7"/>
                 </a:solidFill>
+                <a:latin typeface="Outfit"/>
+              </a:defRPr>
+            </a:pPr>
+            <a:r>
+              <a:t>&gt; 3.0x</a:t>
+            </a:r>
+          </a:p>
+          <a:p>
+            <a:pPr algn="ctr">
+              <a:spcAft>
+                <a:spcPts val="1400"/>
+              </a:spcAft>
+              <a:defRPr sz="900" b="1">
+                <a:solidFill>
+                  <a:srgbClr val="64748B"/>
+                </a:solidFill>
                 <a:latin typeface="Inter"/>
               </a:defRPr>
             </a:pPr>
             <a:r>
-              <a:t>[UNIT ECONOMICS]</a:t>
-            </a:r>
-          </a:p>
-          <a:p>
-            <a:pPr>
-              <a:spcAft>
-                <a:spcPts val="1000"/>
-              </a:spcAft>
-              <a:defRPr sz="1300" b="1">
-                <a:solidFill>
-                  <a:srgbClr val="0F2537"/>
-                </a:solidFill>
-                <a:latin typeface="Outfit"/>
-              </a:defRPr>
-            </a:pPr>
-            <a:r>
-              <a:t>Commercial Viability</a:t>
-            </a:r>
-          </a:p>
-          <a:p>
-            <a:pPr>
-              <a:spcAft>
-                <a:spcPts val="600"/>
-              </a:spcAft>
+              <a:t>LTV : CAC Target</a:t>
+            </a:r>
+          </a:p>
+          <a:p>
+            <a:pPr algn="ctr">
               <a:defRPr sz="950">
                 <a:solidFill>
                   <a:srgbClr val="1E293B"/>
@@ -5199,39 +5241,7 @@
               </a:defRPr>
             </a:pPr>
             <a:r>
-              <a:t>• Customer Lifetime Value to CAC ratio (LTV:CAC) &gt; 3.0x.</a:t>
-            </a:r>
-          </a:p>
-          <a:p>
-            <a:pPr>
-              <a:spcAft>
-                <a:spcPts val="600"/>
-              </a:spcAft>
-              <a:defRPr sz="950">
-                <a:solidFill>
-                  <a:srgbClr val="1E293B"/>
-                </a:solidFill>
-                <a:latin typeface="Inter"/>
-              </a:defRPr>
-            </a:pPr>
-            <a:r>
-              <a:t>• Cash payback cycle under 12 months.</a:t>
-            </a:r>
-          </a:p>
-          <a:p>
-            <a:pPr>
-              <a:spcAft>
-                <a:spcPts val="600"/>
-              </a:spcAft>
-              <a:defRPr sz="950">
-                <a:solidFill>
-                  <a:srgbClr val="1E293B"/>
-                </a:solidFill>
-                <a:latin typeface="Inter"/>
-              </a:defRPr>
-            </a:pPr>
-            <a:r>
-              <a:t>• Subscription churn rate under 1.5% per month.</a:t>
+              <a:t>Enforce Customer Lifetime Value to CAC ratios above 3x, and cash payback cycles under 12 months for commercial software pilots.</a:t>
             </a:r>
           </a:p>
         </p:txBody>
@@ -5303,9 +5313,9 @@
           </a:bodyPr>
           <a:lstStyle/>
           <a:p>
-            <a:pPr>
+            <a:pPr algn="ctr">
               <a:spcAft>
-                <a:spcPts val="400"/>
+                <a:spcPts val="800"/>
               </a:spcAft>
               <a:defRPr sz="850" b="1">
                 <a:solidFill>
@@ -5319,26 +5329,36 @@
             </a:r>
           </a:p>
           <a:p>
-            <a:pPr>
+            <a:pPr algn="ctr">
+              <a:defRPr sz="2800" b="1">
+                <a:solidFill>
+                  <a:srgbClr val="D60000"/>
+                </a:solidFill>
+                <a:latin typeface="Outfit"/>
+              </a:defRPr>
+            </a:pPr>
+            <a:r>
+              <a:t>Day 60</a:t>
+            </a:r>
+          </a:p>
+          <a:p>
+            <a:pPr algn="ctr">
               <a:spcAft>
-                <a:spcPts val="1000"/>
+                <a:spcPts val="1400"/>
               </a:spcAft>
-              <a:defRPr sz="1300" b="1">
-                <a:solidFill>
-                  <a:srgbClr val="0F2537"/>
-                </a:solidFill>
-                <a:latin typeface="Outfit"/>
-              </a:defRPr>
-            </a:pPr>
-            <a:r>
-              <a:t>Fail-Fast Rules</a:t>
-            </a:r>
-          </a:p>
-          <a:p>
-            <a:pPr>
-              <a:spcAft>
-                <a:spcPts val="600"/>
-              </a:spcAft>
+              <a:defRPr sz="900" b="1">
+                <a:solidFill>
+                  <a:srgbClr val="64748B"/>
+                </a:solidFill>
+                <a:latin typeface="Inter"/>
+              </a:defRPr>
+            </a:pPr>
+            <a:r>
+              <a:t>Kill / Pivot Gate</a:t>
+            </a:r>
+          </a:p>
+          <a:p>
+            <a:pPr algn="ctr">
               <a:defRPr sz="950">
                 <a:solidFill>
                   <a:srgbClr val="1E293B"/>
@@ -5347,39 +5367,7 @@
               </a:defRPr>
             </a:pPr>
             <a:r>
-              <a:t>• Enforce strict 60-day development milestones.</a:t>
-            </a:r>
-          </a:p>
-          <a:p>
-            <a:pPr>
-              <a:spcAft>
-                <a:spcPts val="600"/>
-              </a:spcAft>
-              <a:defRPr sz="950">
-                <a:solidFill>
-                  <a:srgbClr val="1E293B"/>
-                </a:solidFill>
-                <a:latin typeface="Inter"/>
-              </a:defRPr>
-            </a:pPr>
-            <a:r>
-              <a:t>• Automatically terminate any MVP that does not secure at least 2 paid pilot commitments in 60 days.</a:t>
-            </a:r>
-          </a:p>
-          <a:p>
-            <a:pPr>
-              <a:spcAft>
-                <a:spcPts val="600"/>
-              </a:spcAft>
-              <a:defRPr sz="950">
-                <a:solidFill>
-                  <a:srgbClr val="1E293B"/>
-                </a:solidFill>
-                <a:latin typeface="Inter"/>
-              </a:defRPr>
-            </a:pPr>
-            <a:r>
-              <a:t>• Target &gt; 70% early rejection rate at the design gate.</a:t>
+              <a:t>Automatically terminate any B2B MVP project that does not secure at least 2 paid client pilot signups within 60 days of launch.</a:t>
             </a:r>
           </a:p>
         </p:txBody>
@@ -5561,7 +5549,7 @@
         </p:nvSpPr>
         <p:spPr>
           <a:xfrm>
-            <a:off x="548640" y="5623560"/>
+            <a:off x="548640" y="5577840"/>
             <a:ext cx="11094415" cy="594360"/>
           </a:xfrm>
           <a:prstGeom prst="rect">
@@ -5604,7 +5592,7 @@
         </p:nvSpPr>
         <p:spPr>
           <a:xfrm>
-            <a:off x="548640" y="5623560"/>
+            <a:off x="548640" y="5577840"/>
             <a:ext cx="73152" cy="594360"/>
           </a:xfrm>
           <a:prstGeom prst="rect">
@@ -5647,7 +5635,7 @@
         </p:nvSpPr>
         <p:spPr>
           <a:xfrm>
-            <a:off x="731520" y="5669280"/>
+            <a:off x="731520" y="5623560"/>
             <a:ext cx="10698480" cy="502920"/>
           </a:xfrm>
           <a:prstGeom prst="rect">
@@ -6132,7 +6120,7 @@
         </p:nvSpPr>
         <p:spPr>
           <a:xfrm>
-            <a:off x="548640" y="5623560"/>
+            <a:off x="548640" y="5577840"/>
             <a:ext cx="11094415" cy="594360"/>
           </a:xfrm>
           <a:prstGeom prst="rect">
@@ -6175,7 +6163,7 @@
         </p:nvSpPr>
         <p:spPr>
           <a:xfrm>
-            <a:off x="548640" y="5623560"/>
+            <a:off x="548640" y="5577840"/>
             <a:ext cx="73152" cy="594360"/>
           </a:xfrm>
           <a:prstGeom prst="rect">
@@ -6218,7 +6206,7 @@
         </p:nvSpPr>
         <p:spPr>
           <a:xfrm>
-            <a:off x="731520" y="5669280"/>
+            <a:off x="731520" y="5623560"/>
             <a:ext cx="10698480" cy="502920"/>
           </a:xfrm>
           <a:prstGeom prst="rect">
@@ -6313,23 +6301,36 @@
           </a:bodyPr>
           <a:lstStyle/>
           <a:p>
-            <a:pPr>
+            <a:pPr algn="ctr">
               <a:spcAft>
-                <a:spcPts val="400"/>
+                <a:spcPts val="800"/>
               </a:spcAft>
               <a:defRPr sz="850" b="1">
                 <a:solidFill>
+                  <a:srgbClr val="0284C7"/>
+                </a:solidFill>
+                <a:latin typeface="Inter"/>
+              </a:defRPr>
+            </a:pPr>
+            <a:r>
+              <a:t>[JCS (TECHNOLOGY)]</a:t>
+            </a:r>
+          </a:p>
+          <a:p>
+            <a:pPr algn="ctr">
+              <a:defRPr sz="800" b="1">
+                <a:solidFill>
                   <a:srgbClr val="64748B"/>
                 </a:solidFill>
                 <a:latin typeface="Inter"/>
               </a:defRPr>
             </a:pPr>
             <a:r>
-              <a:t>[JCS (TECHNOLOGY)]</a:t>
-            </a:r>
-          </a:p>
-          <a:p>
-            <a:pPr>
+              <a:t>CORE SERVICES</a:t>
+            </a:r>
+          </a:p>
+          <a:p>
+            <a:pPr algn="ctr">
               <a:spcAft>
                 <a:spcPts val="1000"/>
               </a:spcAft>
@@ -6341,14 +6342,56 @@
               </a:defRPr>
             </a:pPr>
             <a:r>
-              <a:t>Core: Software Consulting</a:t>
-            </a:r>
-          </a:p>
-          <a:p>
-            <a:pPr>
+              <a:t>Software Consulting</a:t>
+            </a:r>
+          </a:p>
+          <a:p>
+            <a:pPr algn="ctr">
+              <a:defRPr sz="800" b="1">
+                <a:solidFill>
+                  <a:srgbClr val="D60000"/>
+                </a:solidFill>
+                <a:latin typeface="Inter"/>
+              </a:defRPr>
+            </a:pPr>
+            <a:r>
+              <a:t>PIVOT ADJACENCY</a:t>
+            </a:r>
+          </a:p>
+          <a:p>
+            <a:pPr algn="ctr">
               <a:spcAft>
-                <a:spcPts val="600"/>
+                <a:spcPts val="800"/>
               </a:spcAft>
+              <a:defRPr sz="1600" b="1">
+                <a:solidFill>
+                  <a:srgbClr val="D60000"/>
+                </a:solidFill>
+                <a:latin typeface="Outfit"/>
+              </a:defRPr>
+            </a:pPr>
+            <a:r>
+              <a:t>▼</a:t>
+            </a:r>
+          </a:p>
+          <a:p>
+            <a:pPr algn="ctr">
+              <a:spcAft>
+                <a:spcPts val="400"/>
+              </a:spcAft>
+              <a:defRPr sz="1300" b="1">
+                <a:solidFill>
+                  <a:srgbClr val="0284C7"/>
+                </a:solidFill>
+                <a:latin typeface="Outfit"/>
+              </a:defRPr>
+            </a:pPr>
+            <a:r>
+              <a:t>Managed Service Retainers</a:t>
+            </a:r>
+          </a:p>
+          <a:p>
+            <a:pPr algn="ctr">
               <a:defRPr sz="950">
                 <a:solidFill>
                   <a:srgbClr val="1E293B"/>
@@ -6357,23 +6400,7 @@
               </a:defRPr>
             </a:pPr>
             <a:r>
-              <a:t>• Bespoke application dev and digital support.</a:t>
-            </a:r>
-          </a:p>
-          <a:p>
-            <a:pPr>
-              <a:spcAft>
-                <a:spcPts val="600"/>
-              </a:spcAft>
-              <a:defRPr sz="950">
-                <a:solidFill>
-                  <a:srgbClr val="1E293B"/>
-                </a:solidFill>
-                <a:latin typeface="Inter"/>
-              </a:defRPr>
-            </a:pPr>
-            <a:r>
-              <a:t>• Adjacency: Move from custom contracts to international managed service retainers to secure stable monthly software revenue.</a:t>
+              <a:t>Pivot bespoke developer project contracts to recurring monthly managed service fees.</a:t>
             </a:r>
           </a:p>
         </p:txBody>
@@ -6445,9 +6472,9 @@
           </a:bodyPr>
           <a:lstStyle/>
           <a:p>
-            <a:pPr>
+            <a:pPr algn="ctr">
               <a:spcAft>
-                <a:spcPts val="400"/>
+                <a:spcPts val="800"/>
               </a:spcAft>
               <a:defRPr sz="850" b="1">
                 <a:solidFill>
@@ -6461,7 +6488,20 @@
             </a:r>
           </a:p>
           <a:p>
-            <a:pPr>
+            <a:pPr algn="ctr">
+              <a:defRPr sz="800" b="1">
+                <a:solidFill>
+                  <a:srgbClr val="64748B"/>
+                </a:solidFill>
+                <a:latin typeface="Inter"/>
+              </a:defRPr>
+            </a:pPr>
+            <a:r>
+              <a:t>CORE SERVICES</a:t>
+            </a:r>
+          </a:p>
+          <a:p>
+            <a:pPr algn="ctr">
               <a:spcAft>
                 <a:spcPts val="1000"/>
               </a:spcAft>
@@ -6473,14 +6513,56 @@
               </a:defRPr>
             </a:pPr>
             <a:r>
-              <a:t>Core: Residential Solar</a:t>
-            </a:r>
-          </a:p>
-          <a:p>
-            <a:pPr>
+              <a:t>Residential Solar</a:t>
+            </a:r>
+          </a:p>
+          <a:p>
+            <a:pPr algn="ctr">
+              <a:defRPr sz="800" b="1">
+                <a:solidFill>
+                  <a:srgbClr val="D60000"/>
+                </a:solidFill>
+                <a:latin typeface="Inter"/>
+              </a:defRPr>
+            </a:pPr>
+            <a:r>
+              <a:t>PIVOT ADJACENCY</a:t>
+            </a:r>
+          </a:p>
+          <a:p>
+            <a:pPr algn="ctr">
               <a:spcAft>
-                <a:spcPts val="600"/>
+                <a:spcPts val="800"/>
               </a:spcAft>
+              <a:defRPr sz="1600" b="1">
+                <a:solidFill>
+                  <a:srgbClr val="D60000"/>
+                </a:solidFill>
+                <a:latin typeface="Outfit"/>
+              </a:defRPr>
+            </a:pPr>
+            <a:r>
+              <a:t>▼</a:t>
+            </a:r>
+          </a:p>
+          <a:p>
+            <a:pPr algn="ctr">
+              <a:spcAft>
+                <a:spcPts val="400"/>
+              </a:spcAft>
+              <a:defRPr sz="1300" b="1">
+                <a:solidFill>
+                  <a:srgbClr val="0284C7"/>
+                </a:solidFill>
+                <a:latin typeface="Outfit"/>
+              </a:defRPr>
+            </a:pPr>
+            <a:r>
+              <a:t>C&amp;I Projects + O&amp;M</a:t>
+            </a:r>
+          </a:p>
+          <a:p>
+            <a:pPr algn="ctr">
               <a:defRPr sz="950">
                 <a:solidFill>
                   <a:srgbClr val="1E293B"/>
@@ -6489,23 +6571,7 @@
               </a:defRPr>
             </a:pPr>
             <a:r>
-              <a:t>• Residential panel installs and setups.</a:t>
-            </a:r>
-          </a:p>
-          <a:p>
-            <a:pPr>
-              <a:spcAft>
-                <a:spcPts val="600"/>
-              </a:spcAft>
-              <a:defRPr sz="950">
-                <a:solidFill>
-                  <a:srgbClr val="1E293B"/>
-                </a:solidFill>
-                <a:latin typeface="Inter"/>
-              </a:defRPr>
-            </a:pPr>
-            <a:r>
-              <a:t>• Adjacency: Shift focus to Commercial &amp; Industrial (C&amp;I) installations and multi-year Operations &amp; Maintenance (O&amp;M) service contracts.</a:t>
+              <a:t>Pivot residential setups to Commercial solar contracts bundled with active telemetry monitoring retainers.</a:t>
             </a:r>
           </a:p>
         </p:txBody>
@@ -6577,9 +6643,9 @@
           </a:bodyPr>
           <a:lstStyle/>
           <a:p>
-            <a:pPr>
+            <a:pPr algn="ctr">
               <a:spcAft>
-                <a:spcPts val="400"/>
+                <a:spcPts val="800"/>
               </a:spcAft>
               <a:defRPr sz="850" b="1">
                 <a:solidFill>
@@ -6593,7 +6659,20 @@
             </a:r>
           </a:p>
           <a:p>
-            <a:pPr>
+            <a:pPr algn="ctr">
+              <a:defRPr sz="800" b="1">
+                <a:solidFill>
+                  <a:srgbClr val="64748B"/>
+                </a:solidFill>
+                <a:latin typeface="Inter"/>
+              </a:defRPr>
+            </a:pPr>
+            <a:r>
+              <a:t>CORE SERVICES</a:t>
+            </a:r>
+          </a:p>
+          <a:p>
+            <a:pPr algn="ctr">
               <a:spcAft>
                 <a:spcPts val="1000"/>
               </a:spcAft>
@@ -6605,14 +6684,56 @@
               </a:defRPr>
             </a:pPr>
             <a:r>
-              <a:t>Core: Executive Search</a:t>
-            </a:r>
-          </a:p>
-          <a:p>
-            <a:pPr>
+              <a:t>Executive Search</a:t>
+            </a:r>
+          </a:p>
+          <a:p>
+            <a:pPr algn="ctr">
+              <a:defRPr sz="800" b="1">
+                <a:solidFill>
+                  <a:srgbClr val="D60000"/>
+                </a:solidFill>
+                <a:latin typeface="Inter"/>
+              </a:defRPr>
+            </a:pPr>
+            <a:r>
+              <a:t>PIVOT ADJACENCY</a:t>
+            </a:r>
+          </a:p>
+          <a:p>
+            <a:pPr algn="ctr">
               <a:spcAft>
-                <a:spcPts val="600"/>
+                <a:spcPts val="800"/>
               </a:spcAft>
+              <a:defRPr sz="1600" b="1">
+                <a:solidFill>
+                  <a:srgbClr val="D60000"/>
+                </a:solidFill>
+                <a:latin typeface="Outfit"/>
+              </a:defRPr>
+            </a:pPr>
+            <a:r>
+              <a:t>▼</a:t>
+            </a:r>
+          </a:p>
+          <a:p>
+            <a:pPr algn="ctr">
+              <a:spcAft>
+                <a:spcPts val="400"/>
+              </a:spcAft>
+              <a:defRPr sz="1300" b="1">
+                <a:solidFill>
+                  <a:srgbClr val="0284C7"/>
+                </a:solidFill>
+                <a:latin typeface="Outfit"/>
+              </a:defRPr>
+            </a:pPr>
+            <a:r>
+              <a:t>Contract Staffing Retainers</a:t>
+            </a:r>
+          </a:p>
+          <a:p>
+            <a:pPr algn="ctr">
               <a:defRPr sz="950">
                 <a:solidFill>
                   <a:srgbClr val="1E293B"/>
@@ -6621,23 +6742,7 @@
               </a:defRPr>
             </a:pPr>
             <a:r>
-              <a:t>• Transactional recruiter matching and bulk hiring.</a:t>
-            </a:r>
-          </a:p>
-          <a:p>
-            <a:pPr>
-              <a:spcAft>
-                <a:spcPts val="600"/>
-              </a:spcAft>
-              <a:defRPr sz="950">
-                <a:solidFill>
-                  <a:srgbClr val="1E293B"/>
-                </a:solidFill>
-                <a:latin typeface="Inter"/>
-              </a:defRPr>
-            </a:pPr>
-            <a:r>
-              <a:t>• Adjacency: Pivot manual search fees into predictable, high-margin contract staffing retainers.</a:t>
+              <a:t>Pivot manual candidate search commissions to recurring B2B IT staffing retainer contracts.</a:t>
             </a:r>
           </a:p>
         </p:txBody>
@@ -6819,7 +6924,7 @@
         </p:nvSpPr>
         <p:spPr>
           <a:xfrm>
-            <a:off x="548640" y="5623560"/>
+            <a:off x="548640" y="5577840"/>
             <a:ext cx="11094415" cy="594360"/>
           </a:xfrm>
           <a:prstGeom prst="rect">
@@ -6862,7 +6967,7 @@
         </p:nvSpPr>
         <p:spPr>
           <a:xfrm>
-            <a:off x="548640" y="5623560"/>
+            <a:off x="548640" y="5577840"/>
             <a:ext cx="73152" cy="594360"/>
           </a:xfrm>
           <a:prstGeom prst="rect">
@@ -6905,7 +7010,7 @@
         </p:nvSpPr>
         <p:spPr>
           <a:xfrm>
-            <a:off x="731520" y="5669280"/>
+            <a:off x="731520" y="5623560"/>
             <a:ext cx="10698480" cy="502920"/>
           </a:xfrm>
           <a:prstGeom prst="rect">
@@ -7890,14 +7995,85 @@
       </p:sp>
       <p:sp>
         <p:nvSpPr>
-          <p:cNvPr id="11" name="TextBox 10"/>
+          <p:cNvPr id="11" name="Rectangle 10"/>
+          <p:cNvSpPr/>
+          <p:nvPr/>
+        </p:nvSpPr>
+        <p:spPr>
+          <a:xfrm>
+            <a:off x="8046720" y="1691640"/>
+            <a:ext cx="3139135" cy="1280160"/>
+          </a:xfrm>
+          <a:prstGeom prst="rect">
+            <a:avLst/>
+          </a:prstGeom>
+          <a:solidFill>
+            <a:srgbClr val="F8FAFC"/>
+          </a:solidFill>
+          <a:ln>
+            <a:solidFill>
+              <a:srgbClr val="CBD5E1"/>
+            </a:solidFill>
+          </a:ln>
+        </p:spPr>
+        <p:style>
+          <a:lnRef idx="1">
+            <a:schemeClr val="accent1"/>
+          </a:lnRef>
+          <a:fillRef idx="3">
+            <a:schemeClr val="accent1"/>
+          </a:fillRef>
+          <a:effectRef idx="2">
+            <a:schemeClr val="accent1"/>
+          </a:effectRef>
+          <a:fontRef idx="minor">
+            <a:schemeClr val="lt1"/>
+          </a:fontRef>
+        </p:style>
+        <p:txBody>
+          <a:bodyPr rtlCol="0" anchor="ctr" wrap="square"/>
+          <a:lstStyle/>
+          <a:p>
+            <a:pPr algn="ctr">
+              <a:defRPr sz="3600" b="1">
+                <a:solidFill>
+                  <a:srgbClr val="D60000"/>
+                </a:solidFill>
+                <a:latin typeface="Outfit"/>
+              </a:defRPr>
+            </a:pPr>
+            <a:r>
+              <a:t>65 / 100</a:t>
+            </a:r>
+          </a:p>
+          <a:p>
+            <a:pPr algn="ctr">
+              <a:spcBef>
+                <a:spcPts val="400"/>
+              </a:spcBef>
+              <a:defRPr sz="900" b="1">
+                <a:solidFill>
+                  <a:srgbClr val="64748B"/>
+                </a:solidFill>
+                <a:latin typeface="Inter"/>
+              </a:defRPr>
+            </a:pPr>
+            <a:r>
+              <a:t>Minimum MVP Gate Score</a:t>
+            </a:r>
+          </a:p>
+        </p:txBody>
+      </p:sp>
+      <p:sp>
+        <p:nvSpPr>
+          <p:cNvPr id="12" name="TextBox 11"/>
           <p:cNvSpPr txBox="1"/>
           <p:nvPr/>
         </p:nvSpPr>
         <p:spPr>
           <a:xfrm>
-            <a:off x="7726679" y="1600200"/>
-            <a:ext cx="3779215" cy="3749039"/>
+            <a:off x="7726679" y="3063240"/>
+            <a:ext cx="3779215" cy="2194560"/>
           </a:xfrm>
           <a:prstGeom prst="rect">
             <a:avLst/>
@@ -7909,42 +8085,26 @@
             <a:spAutoFit/>
           </a:bodyPr>
           <a:lstStyle/>
-          <a:p>
-            <a:pPr>
-              <a:spcAft>
-                <a:spcPts val="1200"/>
-              </a:spcAft>
-              <a:defRPr sz="1400" b="1">
-                <a:solidFill>
-                  <a:srgbClr val="0F2537"/>
-                </a:solidFill>
-                <a:latin typeface="Outfit"/>
-              </a:defRPr>
-            </a:pPr>
-            <a:r>
-              <a:t>Evaluation Protocol</a:t>
-            </a:r>
-          </a:p>
           <a:p>
             <a:pPr>
               <a:spcAft>
                 <a:spcPts val="1000"/>
               </a:spcAft>
-              <a:defRPr sz="950">
-                <a:solidFill>
-                  <a:srgbClr val="1E293B"/>
-                </a:solidFill>
-                <a:latin typeface="Inter"/>
-              </a:defRPr>
-            </a:pPr>
-            <a:r>
-              <a:t>• Opportunities are rated 1 to 10 across these 8 factors, resulting in a weighted score out of 100.</a:t>
+              <a:defRPr sz="1250" b="1">
+                <a:solidFill>
+                  <a:srgbClr val="0F2537"/>
+                </a:solidFill>
+                <a:latin typeface="Outfit"/>
+              </a:defRPr>
+            </a:pPr>
+            <a:r>
+              <a:t>Evaluation Protocol</a:t>
             </a:r>
           </a:p>
           <a:p>
             <a:pPr>
               <a:spcAft>
-                <a:spcPts val="1000"/>
+                <a:spcPts val="800"/>
               </a:spcAft>
               <a:defRPr sz="950">
                 <a:solidFill>
@@ -7954,13 +8114,29 @@
               </a:defRPr>
             </a:pPr>
             <a:r>
-              <a:t>• A threshold score of &gt;= 65/100 is required to allocate seed MVP validation funding.</a:t>
+              <a:t>• Opportunities are rated 1 to 10 across these 8 factors, resulting in a weighted score out of 100.</a:t>
             </a:r>
           </a:p>
           <a:p>
             <a:pPr>
               <a:spcAft>
-                <a:spcPts val="1000"/>
+                <a:spcPts val="800"/>
+              </a:spcAft>
+              <a:defRPr sz="950">
+                <a:solidFill>
+                  <a:srgbClr val="1E293B"/>
+                </a:solidFill>
+                <a:latin typeface="Inter"/>
+              </a:defRPr>
+            </a:pPr>
+            <a:r>
+              <a:t>• A threshold score of &gt;= 65/100 is required to allocate seed MVP validation funding.</a:t>
+            </a:r>
+          </a:p>
+          <a:p>
+            <a:pPr>
+              <a:spcAft>
+                <a:spcPts val="800"/>
               </a:spcAft>
               <a:defRPr sz="950">
                 <a:solidFill>
@@ -8152,7 +8328,7 @@
         </p:nvSpPr>
         <p:spPr>
           <a:xfrm>
-            <a:off x="548640" y="5623560"/>
+            <a:off x="548640" y="5577840"/>
             <a:ext cx="11094415" cy="594360"/>
           </a:xfrm>
           <a:prstGeom prst="rect">
@@ -8195,7 +8371,7 @@
         </p:nvSpPr>
         <p:spPr>
           <a:xfrm>
-            <a:off x="548640" y="5623560"/>
+            <a:off x="548640" y="5577840"/>
             <a:ext cx="73152" cy="594360"/>
           </a:xfrm>
           <a:prstGeom prst="rect">
@@ -8238,7 +8414,7 @@
         </p:nvSpPr>
         <p:spPr>
           <a:xfrm>
-            <a:off x="731520" y="5669280"/>
+            <a:off x="731520" y="5623560"/>
             <a:ext cx="10698480" cy="502920"/>
           </a:xfrm>
           <a:prstGeom prst="rect">
@@ -8830,14 +9006,85 @@
       </p:sp>
       <p:sp>
         <p:nvSpPr>
-          <p:cNvPr id="11" name="TextBox 10"/>
+          <p:cNvPr id="11" name="Rectangle 10"/>
+          <p:cNvSpPr/>
+          <p:nvPr/>
+        </p:nvSpPr>
+        <p:spPr>
+          <a:xfrm>
+            <a:off x="8046720" y="1691640"/>
+            <a:ext cx="3139135" cy="1280160"/>
+          </a:xfrm>
+          <a:prstGeom prst="rect">
+            <a:avLst/>
+          </a:prstGeom>
+          <a:solidFill>
+            <a:srgbClr val="F8FAFC"/>
+          </a:solidFill>
+          <a:ln>
+            <a:solidFill>
+              <a:srgbClr val="CBD5E1"/>
+            </a:solidFill>
+          </a:ln>
+        </p:spPr>
+        <p:style>
+          <a:lnRef idx="1">
+            <a:schemeClr val="accent1"/>
+          </a:lnRef>
+          <a:fillRef idx="3">
+            <a:schemeClr val="accent1"/>
+          </a:fillRef>
+          <a:effectRef idx="2">
+            <a:schemeClr val="accent1"/>
+          </a:effectRef>
+          <a:fontRef idx="minor">
+            <a:schemeClr val="lt1"/>
+          </a:fontRef>
+        </p:style>
+        <p:txBody>
+          <a:bodyPr rtlCol="0" anchor="ctr" wrap="square"/>
+          <a:lstStyle/>
+          <a:p>
+            <a:pPr algn="ctr">
+              <a:defRPr sz="3600" b="1">
+                <a:solidFill>
+                  <a:srgbClr val="D60000"/>
+                </a:solidFill>
+                <a:latin typeface="Outfit"/>
+              </a:defRPr>
+            </a:pPr>
+            <a:r>
+              <a:t>Rank 1: HR SaaS</a:t>
+            </a:r>
+          </a:p>
+          <a:p>
+            <a:pPr algn="ctr">
+              <a:spcBef>
+                <a:spcPts val="400"/>
+              </a:spcBef>
+              <a:defRPr sz="900" b="1">
+                <a:solidFill>
+                  <a:srgbClr val="64748B"/>
+                </a:solidFill>
+                <a:latin typeface="Inter"/>
+              </a:defRPr>
+            </a:pPr>
+            <a:r>
+              <a:t>Score: 84 / 100</a:t>
+            </a:r>
+          </a:p>
+        </p:txBody>
+      </p:sp>
+      <p:sp>
+        <p:nvSpPr>
+          <p:cNvPr id="12" name="TextBox 11"/>
           <p:cNvSpPr txBox="1"/>
           <p:nvPr/>
         </p:nvSpPr>
         <p:spPr>
           <a:xfrm>
-            <a:off x="7726679" y="1600200"/>
-            <a:ext cx="3779215" cy="3749039"/>
+            <a:off x="7726679" y="3063240"/>
+            <a:ext cx="3779215" cy="2194560"/>
           </a:xfrm>
           <a:prstGeom prst="rect">
             <a:avLst/>
@@ -8849,42 +9096,26 @@
             <a:spAutoFit/>
           </a:bodyPr>
           <a:lstStyle/>
-          <a:p>
-            <a:pPr>
-              <a:spcAft>
-                <a:spcPts val="1200"/>
-              </a:spcAft>
-              <a:defRPr sz="1400" b="1">
-                <a:solidFill>
-                  <a:srgbClr val="0F2537"/>
-                </a:solidFill>
-                <a:latin typeface="Outfit"/>
-              </a:defRPr>
-            </a:pPr>
-            <a:r>
-              <a:t>Strategic Synergy Logic</a:t>
-            </a:r>
-          </a:p>
           <a:p>
             <a:pPr>
               <a:spcAft>
                 <a:spcPts val="1000"/>
               </a:spcAft>
-              <a:defRPr sz="950">
-                <a:solidFill>
-                  <a:srgbClr val="1E293B"/>
-                </a:solidFill>
-                <a:latin typeface="Inter"/>
-              </a:defRPr>
-            </a:pPr>
-            <a:r>
-              <a:t>• Prioritize cross-business synergies where one unit's tech capability (JCS) scales another unit's distribution network (Aequalis, Nature Grid).</a:t>
+              <a:defRPr sz="1250" b="1">
+                <a:solidFill>
+                  <a:srgbClr val="0F2537"/>
+                </a:solidFill>
+                <a:latin typeface="Outfit"/>
+              </a:defRPr>
+            </a:pPr>
+            <a:r>
+              <a:t>Strategic Synergy Logic</a:t>
             </a:r>
           </a:p>
           <a:p>
             <a:pPr>
               <a:spcAft>
-                <a:spcPts val="1000"/>
+                <a:spcPts val="800"/>
               </a:spcAft>
               <a:defRPr sz="950">
                 <a:solidFill>
@@ -8894,13 +9125,29 @@
               </a:defRPr>
             </a:pPr>
             <a:r>
-              <a:t>• SaaS product models scale revenues exponentially without adding linear headcount or developer pools.</a:t>
+              <a:t>• Prioritize cross-business synergies where one unit's tech capability (JCS) scales another unit's distribution network (Aequalis, Nature Grid).</a:t>
             </a:r>
           </a:p>
           <a:p>
             <a:pPr>
               <a:spcAft>
-                <a:spcPts val="1000"/>
+                <a:spcPts val="800"/>
+              </a:spcAft>
+              <a:defRPr sz="950">
+                <a:solidFill>
+                  <a:srgbClr val="1E293B"/>
+                </a:solidFill>
+                <a:latin typeface="Inter"/>
+              </a:defRPr>
+            </a:pPr>
+            <a:r>
+              <a:t>• SaaS product models scale revenues exponentially without adding linear headcount or developer pools.</a:t>
+            </a:r>
+          </a:p>
+          <a:p>
+            <a:pPr>
+              <a:spcAft>
+                <a:spcPts val="800"/>
               </a:spcAft>
               <a:defRPr sz="950">
                 <a:solidFill>
@@ -9092,7 +9339,7 @@
         </p:nvSpPr>
         <p:spPr>
           <a:xfrm>
-            <a:off x="548640" y="5623560"/>
+            <a:off x="548640" y="5577840"/>
             <a:ext cx="11094415" cy="594360"/>
           </a:xfrm>
           <a:prstGeom prst="rect">
@@ -9135,7 +9382,7 @@
         </p:nvSpPr>
         <p:spPr>
           <a:xfrm>
-            <a:off x="548640" y="5623560"/>
+            <a:off x="548640" y="5577840"/>
             <a:ext cx="73152" cy="594360"/>
           </a:xfrm>
           <a:prstGeom prst="rect">
@@ -9178,7 +9425,7 @@
         </p:nvSpPr>
         <p:spPr>
           <a:xfrm>
-            <a:off x="731520" y="5669280"/>
+            <a:off x="731520" y="5623560"/>
             <a:ext cx="10698480" cy="502920"/>
           </a:xfrm>
           <a:prstGeom prst="rect">
@@ -9244,56 +9491,40 @@
           </a:fontRef>
         </p:style>
         <p:txBody>
-          <a:bodyPr rtlCol="0" anchor="ctr"/>
-          <a:lstStyle/>
-          <a:p>
-            <a:pPr algn="ctr"/>
-          </a:p>
-        </p:txBody>
-      </p:sp>
-      <p:sp>
-        <p:nvSpPr>
-          <p:cNvPr id="10" name="TextBox 9"/>
-          <p:cNvSpPr txBox="1"/>
-          <p:nvPr/>
-        </p:nvSpPr>
-        <p:spPr>
-          <a:xfrm>
-            <a:off x="685800" y="1600200"/>
-            <a:ext cx="3057753" cy="3749039"/>
-          </a:xfrm>
-          <a:prstGeom prst="rect">
-            <a:avLst/>
-          </a:prstGeom>
-          <a:noFill/>
-        </p:spPr>
-        <p:txBody>
-          <a:bodyPr wrap="square">
-            <a:spAutoFit/>
-          </a:bodyPr>
-          <a:lstStyle/>
-          <a:p>
-            <a:pPr>
+          <a:bodyPr rtlCol="0" anchor="ctr" wrap="square"/>
+          <a:lstStyle/>
+          <a:p>
+            <a:pPr algn="ctr">
+              <a:defRPr sz="3600" b="1">
+                <a:solidFill>
+                  <a:srgbClr val="D60000"/>
+                </a:solidFill>
+                <a:latin typeface="Outfit"/>
+              </a:defRPr>
+            </a:pPr>
+            <a:r>
+              <a:t>70%</a:t>
+            </a:r>
+          </a:p>
+          <a:p>
+            <a:pPr algn="ctr">
               <a:spcAft>
                 <a:spcPts val="1400"/>
               </a:spcAft>
-              <a:defRPr sz="1300" b="1">
-                <a:solidFill>
-                  <a:srgbClr val="0F2537"/>
-                </a:solidFill>
-                <a:latin typeface="Outfit"/>
-              </a:defRPr>
-            </a:pPr>
-            <a:r>
-              <a:t>1. Core Capability &amp; Pain</a:t>
-            </a:r>
-          </a:p>
-          <a:p>
-            <a:pPr>
-              <a:spcAft>
-                <a:spcPts val="1200"/>
-              </a:spcAft>
-              <a:defRPr sz="1050">
+              <a:defRPr sz="950" b="1">
+                <a:solidFill>
+                  <a:srgbClr val="64748B"/>
+                </a:solidFill>
+                <a:latin typeface="Inter"/>
+              </a:defRPr>
+            </a:pPr>
+            <a:r>
+              <a:t>Sourcing Time Saved</a:t>
+            </a:r>
+          </a:p>
+          <a:p>
+            <a:pPr algn="ctr">
+              <a:defRPr sz="950">
                 <a:solidFill>
                   <a:srgbClr val="1E293B"/>
                 </a:solidFill>
@@ -9301,20 +9532,20 @@
               </a:defRPr>
             </a:pPr>
             <a:r>
-              <a:t>Aequalis human recruiters manually read resumes, call candidates, and match profiles. Extremely slow, resource-heavy process. JCS has software engineers capable of automating screening pipelines.</a:t>
-            </a:r>
-          </a:p>
-        </p:txBody>
-      </p:sp>
-      <p:sp>
-        <p:nvSpPr>
-          <p:cNvPr id="11" name="Right Arrow 10"/>
+              <a:t>AI candidate screening parser scores resumes instantly, replacing human recruiter labor and accelerating hiring.</a:t>
+            </a:r>
+          </a:p>
+        </p:txBody>
+      </p:sp>
+      <p:sp>
+        <p:nvSpPr>
+          <p:cNvPr id="10" name="Right Arrow 9"/>
           <p:cNvSpPr/>
           <p:nvPr/>
         </p:nvSpPr>
         <p:spPr>
           <a:xfrm>
-            <a:off x="4017873" y="3291840"/>
+            <a:off x="4023360" y="3291840"/>
             <a:ext cx="274320" cy="182880"/>
           </a:xfrm>
           <a:prstGeom prst="rightArrow">
@@ -9351,13 +9582,13 @@
       </p:sp>
       <p:sp>
         <p:nvSpPr>
-          <p:cNvPr id="12" name="Rounded Rectangle 11"/>
+          <p:cNvPr id="11" name="Rounded Rectangle 10"/>
           <p:cNvSpPr/>
           <p:nvPr/>
         </p:nvSpPr>
         <p:spPr>
           <a:xfrm>
-            <a:off x="4429353" y="1508760"/>
+            <a:off x="4434840" y="1508760"/>
             <a:ext cx="3332073" cy="3931920"/>
           </a:xfrm>
           <a:prstGeom prst="roundRect">
@@ -9387,38 +9618,12 @@
           </a:fontRef>
         </p:style>
         <p:txBody>
-          <a:bodyPr rtlCol="0" anchor="ctr"/>
-          <a:lstStyle/>
-          <a:p>
-            <a:pPr algn="ctr"/>
-          </a:p>
-        </p:txBody>
-      </p:sp>
-      <p:sp>
-        <p:nvSpPr>
-          <p:cNvPr id="13" name="TextBox 12"/>
-          <p:cNvSpPr txBox="1"/>
-          <p:nvPr/>
-        </p:nvSpPr>
-        <p:spPr>
-          <a:xfrm>
-            <a:off x="4566513" y="1600200"/>
-            <a:ext cx="3057753" cy="3749039"/>
-          </a:xfrm>
-          <a:prstGeom prst="rect">
-            <a:avLst/>
-          </a:prstGeom>
-          <a:noFill/>
-        </p:spPr>
-        <p:txBody>
-          <a:bodyPr wrap="square">
-            <a:spAutoFit/>
-          </a:bodyPr>
-          <a:lstStyle/>
-          <a:p>
-            <a:pPr>
+          <a:bodyPr rtlCol="0" anchor="ctr" wrap="square"/>
+          <a:lstStyle/>
+          <a:p>
+            <a:pPr algn="ctr">
               <a:spcAft>
-                <a:spcPts val="1400"/>
+                <a:spcPts val="2000"/>
               </a:spcAft>
               <a:defRPr sz="1300" b="1">
                 <a:solidFill>
@@ -9428,15 +9633,12 @@
               </a:defRPr>
             </a:pPr>
             <a:r>
-              <a:t>2. The SaaS Solution</a:t>
-            </a:r>
-          </a:p>
-          <a:p>
-            <a:pPr>
-              <a:spcAft>
-                <a:spcPts val="1200"/>
-              </a:spcAft>
-              <a:defRPr sz="1050">
+              <a:t>JCS + Aequalis Synergy</a:t>
+            </a:r>
+          </a:p>
+          <a:p>
+            <a:pPr algn="ctr">
+              <a:defRPr sz="950">
                 <a:solidFill>
                   <a:srgbClr val="1E293B"/>
                 </a:solidFill>
@@ -9444,20 +9646,20 @@
               </a:defRPr>
             </a:pPr>
             <a:r>
-              <a:t>An automated applicant sourcing, screening, and matching platform. Integrates CV-matching algorithms to score candidates instantly. Aequalis cross-sells the platform to its corporate base.</a:t>
-            </a:r>
-          </a:p>
-        </p:txBody>
-      </p:sp>
-      <p:sp>
-        <p:nvSpPr>
-          <p:cNvPr id="14" name="Right Arrow 13"/>
+              <a:t>JCS engineers build the cloud matching algorithms. Aequalis acts as design partner and distributes directly to its database of corporate staffing clients, ensuring zero marketing CAC.</a:t>
+            </a:r>
+          </a:p>
+        </p:txBody>
+      </p:sp>
+      <p:sp>
+        <p:nvSpPr>
+          <p:cNvPr id="12" name="Right Arrow 11"/>
           <p:cNvSpPr/>
           <p:nvPr/>
         </p:nvSpPr>
         <p:spPr>
           <a:xfrm>
-            <a:off x="7898586" y="3291840"/>
+            <a:off x="7909560" y="3291840"/>
             <a:ext cx="274320" cy="182880"/>
           </a:xfrm>
           <a:prstGeom prst="rightArrow">
@@ -9494,13 +9696,13 @@
       </p:sp>
       <p:sp>
         <p:nvSpPr>
-          <p:cNvPr id="15" name="Rounded Rectangle 14"/>
+          <p:cNvPr id="13" name="Rounded Rectangle 12"/>
           <p:cNvSpPr/>
           <p:nvPr/>
         </p:nvSpPr>
         <p:spPr>
           <a:xfrm>
-            <a:off x="8310066" y="1508760"/>
+            <a:off x="8321040" y="1508760"/>
             <a:ext cx="3332073" cy="3931920"/>
           </a:xfrm>
           <a:prstGeom prst="roundRect">
@@ -9530,56 +9732,40 @@
           </a:fontRef>
         </p:style>
         <p:txBody>
-          <a:bodyPr rtlCol="0" anchor="ctr"/>
-          <a:lstStyle/>
-          <a:p>
-            <a:pPr algn="ctr"/>
-          </a:p>
-        </p:txBody>
-      </p:sp>
-      <p:sp>
-        <p:nvSpPr>
-          <p:cNvPr id="16" name="TextBox 15"/>
-          <p:cNvSpPr txBox="1"/>
-          <p:nvPr/>
-        </p:nvSpPr>
-        <p:spPr>
-          <a:xfrm>
-            <a:off x="8447226" y="1600200"/>
-            <a:ext cx="3057753" cy="3749039"/>
-          </a:xfrm>
-          <a:prstGeom prst="rect">
-            <a:avLst/>
-          </a:prstGeom>
-          <a:noFill/>
-        </p:spPr>
-        <p:txBody>
-          <a:bodyPr wrap="square">
-            <a:spAutoFit/>
-          </a:bodyPr>
-          <a:lstStyle/>
-          <a:p>
-            <a:pPr>
+          <a:bodyPr rtlCol="0" anchor="ctr" wrap="square"/>
+          <a:lstStyle/>
+          <a:p>
+            <a:pPr algn="ctr">
+              <a:defRPr sz="3600" b="1">
+                <a:solidFill>
+                  <a:srgbClr val="0284C7"/>
+                </a:solidFill>
+                <a:latin typeface="Outfit"/>
+              </a:defRPr>
+            </a:pPr>
+            <a:r>
+              <a:t>$2,000+</a:t>
+            </a:r>
+          </a:p>
+          <a:p>
+            <a:pPr algn="ctr">
               <a:spcAft>
                 <a:spcPts val="1400"/>
               </a:spcAft>
-              <a:defRPr sz="1300" b="1">
-                <a:solidFill>
-                  <a:srgbClr val="0284C7"/>
-                </a:solidFill>
-                <a:latin typeface="Outfit"/>
-              </a:defRPr>
-            </a:pPr>
-            <a:r>
-              <a:t>3. Target Economics</a:t>
-            </a:r>
-          </a:p>
-          <a:p>
-            <a:pPr>
-              <a:spcAft>
-                <a:spcPts val="1200"/>
-              </a:spcAft>
-              <a:defRPr sz="1050">
+              <a:defRPr sz="950" b="1">
+                <a:solidFill>
+                  <a:srgbClr val="64748B"/>
+                </a:solidFill>
+                <a:latin typeface="Inter"/>
+              </a:defRPr>
+            </a:pPr>
+            <a:r>
+              <a:t>Monthly SaaS ARPU</a:t>
+            </a:r>
+          </a:p>
+          <a:p>
+            <a:pPr algn="ctr">
+              <a:defRPr sz="950">
                 <a:solidFill>
                   <a:srgbClr val="1E293B"/>
                 </a:solidFill>
@@ -9587,7 +9773,7 @@
               </a:defRPr>
             </a:pPr>
             <a:r>
-              <a:t>Saves recruiters 70% of manual effort. Warm cross-selling eliminates marketing CAC. Standard monthly subscription contract captures $2,000+ monthly ARPU per enterprise client.</a:t>
+              <a:t>B2B subscription licensing captures high-margin recurring software revenues on top of traditional placement commissions.</a:t>
             </a:r>
           </a:p>
         </p:txBody>
@@ -9769,7 +9955,7 @@
         </p:nvSpPr>
         <p:spPr>
           <a:xfrm>
-            <a:off x="548640" y="5623560"/>
+            <a:off x="548640" y="5577840"/>
             <a:ext cx="11094415" cy="594360"/>
           </a:xfrm>
           <a:prstGeom prst="rect">
@@ -9812,7 +9998,7 @@
         </p:nvSpPr>
         <p:spPr>
           <a:xfrm>
-            <a:off x="548640" y="5623560"/>
+            <a:off x="548640" y="5577840"/>
             <a:ext cx="73152" cy="594360"/>
           </a:xfrm>
           <a:prstGeom prst="rect">
@@ -9855,7 +10041,7 @@
         </p:nvSpPr>
         <p:spPr>
           <a:xfrm>
-            <a:off x="731520" y="5669280"/>
+            <a:off x="731520" y="5623560"/>
             <a:ext cx="10698480" cy="502920"/>
           </a:xfrm>
           <a:prstGeom prst="rect">
@@ -9921,56 +10107,40 @@
           </a:fontRef>
         </p:style>
         <p:txBody>
-          <a:bodyPr rtlCol="0" anchor="ctr"/>
-          <a:lstStyle/>
-          <a:p>
-            <a:pPr algn="ctr"/>
-          </a:p>
-        </p:txBody>
-      </p:sp>
-      <p:sp>
-        <p:nvSpPr>
-          <p:cNvPr id="10" name="TextBox 9"/>
-          <p:cNvSpPr txBox="1"/>
-          <p:nvPr/>
-        </p:nvSpPr>
-        <p:spPr>
-          <a:xfrm>
-            <a:off x="685800" y="1600200"/>
-            <a:ext cx="3057753" cy="3749039"/>
-          </a:xfrm>
-          <a:prstGeom prst="rect">
-            <a:avLst/>
-          </a:prstGeom>
-          <a:noFill/>
-        </p:spPr>
-        <p:txBody>
-          <a:bodyPr wrap="square">
-            <a:spAutoFit/>
-          </a:bodyPr>
-          <a:lstStyle/>
-          <a:p>
-            <a:pPr>
+          <a:bodyPr rtlCol="0" anchor="ctr" wrap="square"/>
+          <a:lstStyle/>
+          <a:p>
+            <a:pPr algn="ctr">
+              <a:defRPr sz="3600" b="1">
+                <a:solidFill>
+                  <a:srgbClr val="D60000"/>
+                </a:solidFill>
+                <a:latin typeface="Outfit"/>
+              </a:defRPr>
+            </a:pPr>
+            <a:r>
+              <a:t>+15%</a:t>
+            </a:r>
+          </a:p>
+          <a:p>
+            <a:pPr algn="ctr">
               <a:spcAft>
                 <a:spcPts val="1400"/>
               </a:spcAft>
-              <a:defRPr sz="1300" b="1">
-                <a:solidFill>
-                  <a:srgbClr val="0F2537"/>
-                </a:solidFill>
-                <a:latin typeface="Outfit"/>
-              </a:defRPr>
-            </a:pPr>
-            <a:r>
-              <a:t>1. Core Capability &amp; Pain</a:t>
-            </a:r>
-          </a:p>
-          <a:p>
-            <a:pPr>
-              <a:spcAft>
-                <a:spcPts val="1200"/>
-              </a:spcAft>
-              <a:defRPr sz="1050">
+              <a:defRPr sz="950" b="1">
+                <a:solidFill>
+                  <a:srgbClr val="64748B"/>
+                </a:solidFill>
+                <a:latin typeface="Inter"/>
+              </a:defRPr>
+            </a:pPr>
+            <a:r>
+              <a:t>Solar Yield Boost</a:t>
+            </a:r>
+          </a:p>
+          <a:p>
+            <a:pPr algn="ctr">
+              <a:defRPr sz="950">
                 <a:solidFill>
                   <a:srgbClr val="1E293B"/>
                 </a:solidFill>
@@ -9978,20 +10148,20 @@
               </a:defRPr>
             </a:pPr>
             <a:r>
-              <a:t>Nature Grid solar panel installation contracts are one-time capital purchases. Customers lack transparency into active energy yields and degradation. JCS can design IoT analytics dashboards.</a:t>
-            </a:r>
-          </a:p>
-        </p:txBody>
-      </p:sp>
-      <p:sp>
-        <p:nvSpPr>
-          <p:cNvPr id="11" name="Right Arrow 10"/>
+              <a:t>Sensors track panel degradation, dust coverage, and ROI in real-time, preventing energy loss.</a:t>
+            </a:r>
+          </a:p>
+        </p:txBody>
+      </p:sp>
+      <p:sp>
+        <p:nvSpPr>
+          <p:cNvPr id="10" name="Right Arrow 9"/>
           <p:cNvSpPr/>
           <p:nvPr/>
         </p:nvSpPr>
         <p:spPr>
           <a:xfrm>
-            <a:off x="4017873" y="3291840"/>
+            <a:off x="4023360" y="3291840"/>
             <a:ext cx="274320" cy="182880"/>
           </a:xfrm>
           <a:prstGeom prst="rightArrow">
@@ -10028,13 +10198,13 @@
       </p:sp>
       <p:sp>
         <p:nvSpPr>
-          <p:cNvPr id="12" name="Rounded Rectangle 11"/>
+          <p:cNvPr id="11" name="Rounded Rectangle 10"/>
           <p:cNvSpPr/>
           <p:nvPr/>
         </p:nvSpPr>
         <p:spPr>
           <a:xfrm>
-            <a:off x="4429353" y="1508760"/>
+            <a:off x="4434840" y="1508760"/>
             <a:ext cx="3332073" cy="3931920"/>
           </a:xfrm>
           <a:prstGeom prst="roundRect">
@@ -10064,38 +10234,12 @@
           </a:fontRef>
         </p:style>
         <p:txBody>
-          <a:bodyPr rtlCol="0" anchor="ctr"/>
-          <a:lstStyle/>
-          <a:p>
-            <a:pPr algn="ctr"/>
-          </a:p>
-        </p:txBody>
-      </p:sp>
-      <p:sp>
-        <p:nvSpPr>
-          <p:cNvPr id="13" name="TextBox 12"/>
-          <p:cNvSpPr txBox="1"/>
-          <p:nvPr/>
-        </p:nvSpPr>
-        <p:spPr>
-          <a:xfrm>
-            <a:off x="4566513" y="1600200"/>
-            <a:ext cx="3057753" cy="3749039"/>
-          </a:xfrm>
-          <a:prstGeom prst="rect">
-            <a:avLst/>
-          </a:prstGeom>
-          <a:noFill/>
-        </p:spPr>
-        <p:txBody>
-          <a:bodyPr wrap="square">
-            <a:spAutoFit/>
-          </a:bodyPr>
-          <a:lstStyle/>
-          <a:p>
-            <a:pPr>
+          <a:bodyPr rtlCol="0" anchor="ctr" wrap="square"/>
+          <a:lstStyle/>
+          <a:p>
+            <a:pPr algn="ctr">
               <a:spcAft>
-                <a:spcPts val="1400"/>
+                <a:spcPts val="2000"/>
               </a:spcAft>
               <a:defRPr sz="1300" b="1">
                 <a:solidFill>
@@ -10105,15 +10249,12 @@
               </a:defRPr>
             </a:pPr>
             <a:r>
-              <a:t>2. The SaaS Solution</a:t>
-            </a:r>
-          </a:p>
-          <a:p>
-            <a:pPr>
-              <a:spcAft>
-                <a:spcPts val="1200"/>
-              </a:spcAft>
-              <a:defRPr sz="1050">
+              <a:t>JCS + Nature Grid Synergy</a:t>
+            </a:r>
+          </a:p>
+          <a:p>
+            <a:pPr algn="ctr">
+              <a:defRPr sz="950">
                 <a:solidFill>
                   <a:srgbClr val="1E293B"/>
                 </a:solidFill>
@@ -10121,20 +10262,20 @@
               </a:defRPr>
             </a:pPr>
             <a:r>
-              <a:t>An IoT monitoring panel telemetry software. Tracks active output (kW) and daily counts (kWh). Automatically detects dust, triggering cleanings and scheduling maintenance dispatches.</a:t>
-            </a:r>
-          </a:p>
-        </p:txBody>
-      </p:sp>
-      <p:sp>
-        <p:nvSpPr>
-          <p:cNvPr id="14" name="Right Arrow 13"/>
+              <a:t>JCS engineers active telemetry cloud databases. Nature Grid embeds sensors with C&amp;I panels and cleans panels with O&amp;M field dispatch crews.</a:t>
+            </a:r>
+          </a:p>
+        </p:txBody>
+      </p:sp>
+      <p:sp>
+        <p:nvSpPr>
+          <p:cNvPr id="12" name="Right Arrow 11"/>
           <p:cNvSpPr/>
           <p:nvPr/>
         </p:nvSpPr>
         <p:spPr>
           <a:xfrm>
-            <a:off x="7898586" y="3291840"/>
+            <a:off x="7909560" y="3291840"/>
             <a:ext cx="274320" cy="182880"/>
           </a:xfrm>
           <a:prstGeom prst="rightArrow">
@@ -10171,13 +10312,13 @@
       </p:sp>
       <p:sp>
         <p:nvSpPr>
-          <p:cNvPr id="15" name="Rounded Rectangle 14"/>
+          <p:cNvPr id="13" name="Rounded Rectangle 12"/>
           <p:cNvSpPr/>
           <p:nvPr/>
         </p:nvSpPr>
         <p:spPr>
           <a:xfrm>
-            <a:off x="8310066" y="1508760"/>
+            <a:off x="8321040" y="1508760"/>
             <a:ext cx="3332073" cy="3931920"/>
           </a:xfrm>
           <a:prstGeom prst="roundRect">
@@ -10207,56 +10348,40 @@
           </a:fontRef>
         </p:style>
         <p:txBody>
-          <a:bodyPr rtlCol="0" anchor="ctr"/>
-          <a:lstStyle/>
-          <a:p>
-            <a:pPr algn="ctr"/>
-          </a:p>
-        </p:txBody>
-      </p:sp>
-      <p:sp>
-        <p:nvSpPr>
-          <p:cNvPr id="16" name="TextBox 15"/>
-          <p:cNvSpPr txBox="1"/>
-          <p:nvPr/>
-        </p:nvSpPr>
-        <p:spPr>
-          <a:xfrm>
-            <a:off x="8447226" y="1600200"/>
-            <a:ext cx="3057753" cy="3749039"/>
-          </a:xfrm>
-          <a:prstGeom prst="rect">
-            <a:avLst/>
-          </a:prstGeom>
-          <a:noFill/>
-        </p:spPr>
-        <p:txBody>
-          <a:bodyPr wrap="square">
-            <a:spAutoFit/>
-          </a:bodyPr>
-          <a:lstStyle/>
-          <a:p>
-            <a:pPr>
+          <a:bodyPr rtlCol="0" anchor="ctr" wrap="square"/>
+          <a:lstStyle/>
+          <a:p>
+            <a:pPr algn="ctr">
+              <a:defRPr sz="3600" b="1">
+                <a:solidFill>
+                  <a:srgbClr val="0284C7"/>
+                </a:solidFill>
+                <a:latin typeface="Outfit"/>
+              </a:defRPr>
+            </a:pPr>
+            <a:r>
+              <a:t>100%</a:t>
+            </a:r>
+          </a:p>
+          <a:p>
+            <a:pPr algn="ctr">
               <a:spcAft>
                 <a:spcPts val="1400"/>
               </a:spcAft>
-              <a:defRPr sz="1300" b="1">
-                <a:solidFill>
-                  <a:srgbClr val="0284C7"/>
-                </a:solidFill>
-                <a:latin typeface="Outfit"/>
-              </a:defRPr>
-            </a:pPr>
-            <a:r>
-              <a:t>3. Target Economics</a:t>
-            </a:r>
-          </a:p>
-          <a:p>
-            <a:pPr>
-              <a:spcAft>
-                <a:spcPts val="1200"/>
-              </a:spcAft>
-              <a:defRPr sz="1050">
+              <a:defRPr sz="950" b="1">
+                <a:solidFill>
+                  <a:srgbClr val="64748B"/>
+                </a:solidFill>
+                <a:latin typeface="Inter"/>
+              </a:defRPr>
+            </a:pPr>
+            <a:r>
+              <a:t>Live Telemetry</a:t>
+            </a:r>
+          </a:p>
+          <a:p>
+            <a:pPr algn="ctr">
+              <a:defRPr sz="950">
                 <a:solidFill>
                   <a:srgbClr val="1E293B"/>
                 </a:solidFill>
@@ -10264,7 +10389,7 @@
               </a:defRPr>
             </a:pPr>
             <a:r>
-              <a:t>Secures multi-year predictive maintenance agreements. Boosts panel yields by 15%, transforming transactional sales into high-margin recurring retainers.</a:t>
+              <a:t>Transforms transactional one-time hardware sales into multi-year recurring service and maintenance retainers.</a:t>
             </a:r>
           </a:p>
         </p:txBody>
@@ -10446,7 +10571,7 @@
         </p:nvSpPr>
         <p:spPr>
           <a:xfrm>
-            <a:off x="548640" y="5623560"/>
+            <a:off x="548640" y="5577840"/>
             <a:ext cx="11094415" cy="594360"/>
           </a:xfrm>
           <a:prstGeom prst="rect">
@@ -10489,7 +10614,7 @@
         </p:nvSpPr>
         <p:spPr>
           <a:xfrm>
-            <a:off x="548640" y="5623560"/>
+            <a:off x="548640" y="5577840"/>
             <a:ext cx="73152" cy="594360"/>
           </a:xfrm>
           <a:prstGeom prst="rect">
@@ -10532,7 +10657,7 @@
         </p:nvSpPr>
         <p:spPr>
           <a:xfrm>
-            <a:off x="731520" y="5669280"/>
+            <a:off x="731520" y="5623560"/>
             <a:ext cx="10698480" cy="502920"/>
           </a:xfrm>
           <a:prstGeom prst="rect">
@@ -11033,7 +11158,7 @@
         </p:nvSpPr>
         <p:spPr>
           <a:xfrm>
-            <a:off x="548640" y="5623560"/>
+            <a:off x="548640" y="5577840"/>
             <a:ext cx="11094415" cy="594360"/>
           </a:xfrm>
           <a:prstGeom prst="rect">
@@ -11076,7 +11201,7 @@
         </p:nvSpPr>
         <p:spPr>
           <a:xfrm>
-            <a:off x="548640" y="5623560"/>
+            <a:off x="548640" y="5577840"/>
             <a:ext cx="73152" cy="594360"/>
           </a:xfrm>
           <a:prstGeom prst="rect">
@@ -11119,7 +11244,7 @@
         </p:nvSpPr>
         <p:spPr>
           <a:xfrm>
-            <a:off x="731520" y="5669280"/>
+            <a:off x="731520" y="5623560"/>
             <a:ext cx="10698480" cy="502920"/>
           </a:xfrm>
           <a:prstGeom prst="rect">
@@ -11220,7 +11345,7 @@
               </a:spcAft>
               <a:defRPr sz="850" b="1">
                 <a:solidFill>
-                  <a:srgbClr val="64748B"/>
+                  <a:srgbClr val="0284C7"/>
                 </a:solidFill>
                 <a:latin typeface="Inter"/>
               </a:defRPr>
